--- a/deck/btp_midterm_review.pptx
+++ b/deck/btp_midterm_review.pptx
@@ -21,9 +21,10 @@
     <p:sldId id="269" r:id="rId15"/>
     <p:sldId id="270" r:id="rId16"/>
     <p:sldId id="271" r:id="rId17"/>
+    <p:sldId id="272" r:id="rId18"/>
   </p:sldIdLst>
   <p:notesMasterIdLst>
-    <p:notesMasterId r:id="rId18"/>
+    <p:notesMasterId r:id="rId19"/>
   </p:notesMasterIdLst>
   <p:sldSz cx="12192000" cy="6858000"/>
   <p:notesSz cx="6858000" cy="12192000"/>
@@ -1157,6 +1158,94 @@
             <a:fld id="{F7021451-1387-4CA6-816F-3879F97B5CBC}" type="slidenum">
               <a:rPr lang="en-US"/>
               <a:t>16</a:t>
+            </a:fld>
+            <a:endParaRPr lang="en-US"/>
+          </a:p>
+        </p:txBody>
+      </p:sp>
+    </p:spTree>
+    <p:extLst>
+      <p:ext uri="{BB962C8B-B14F-4D97-AF65-F5344CB8AC3E}">
+        <p14:creationId xmlns:p14="http://schemas.microsoft.com/office/powerpoint/2010/main" val="1024086991"/>
+      </p:ext>
+    </p:extLst>
+  </p:cSld>
+  <p:clrMapOvr>
+    <a:masterClrMapping/>
+  </p:clrMapOvr>
+</p:notes>
+</file>
+
+<file path=ppt/notesSlides/notesSlide17.xml><?xml version="1.0" encoding="utf-8"?>
+<p:notes xmlns:a="http://schemas.openxmlformats.org/drawingml/2006/main" xmlns:r="http://schemas.openxmlformats.org/officeDocument/2006/relationships" xmlns:p="http://schemas.openxmlformats.org/presentationml/2006/main">
+  <p:cSld>
+    <p:spTree>
+      <p:nvGrpSpPr>
+        <p:cNvPr id="1" name=""/>
+        <p:cNvGrpSpPr/>
+        <p:nvPr/>
+      </p:nvGrpSpPr>
+      <p:grpSpPr>
+        <a:xfrm>
+          <a:off x="0" y="0"/>
+          <a:ext cx="0" cy="0"/>
+          <a:chOff x="0" y="0"/>
+          <a:chExt cx="0" cy="0"/>
+        </a:xfrm>
+      </p:grpSpPr>
+      <p:sp>
+        <p:nvSpPr>
+          <p:cNvPr id="2" name="Slide Image Placeholder 1"/>
+          <p:cNvSpPr>
+            <a:spLocks noGrp="1" noRot="1" noChangeAspect="1"/>
+          </p:cNvSpPr>
+          <p:nvPr>
+            <p:ph type="sldImg"/>
+          </p:nvPr>
+        </p:nvSpPr>
+        <p:spPr/>
+      </p:sp>
+      <p:sp>
+        <p:nvSpPr>
+          <p:cNvPr id="3" name="Notes Placeholder 2"/>
+          <p:cNvSpPr>
+            <a:spLocks noGrp="1"/>
+          </p:cNvSpPr>
+          <p:nvPr>
+            <p:ph type="body" idx="1"/>
+          </p:nvPr>
+        </p:nvSpPr>
+        <p:spPr/>
+        <p:txBody>
+          <a:bodyPr/>
+          <a:lstStyle/>
+          <a:p>
+            <a:r>
+              <a:rPr lang="en-US" dirty="0"/>
+              <a:t/>
+            </a:r>
+            <a:endParaRPr lang="en-US" dirty="0"/>
+          </a:p>
+        </p:txBody>
+      </p:sp>
+      <p:sp>
+        <p:nvSpPr>
+          <p:cNvPr id="4" name="Slide Number Placeholder 3"/>
+          <p:cNvSpPr>
+            <a:spLocks noGrp="1"/>
+          </p:cNvSpPr>
+          <p:nvPr>
+            <p:ph type="sldNum" sz="quarter" idx="10"/>
+          </p:nvPr>
+        </p:nvSpPr>
+        <p:spPr/>
+        <p:txBody>
+          <a:bodyPr/>
+          <a:lstStyle/>
+          <a:p>
+            <a:fld id="{F7021451-1387-4CA6-816F-3879F97B5CBC}" type="slidenum">
+              <a:rPr lang="en-US"/>
+              <a:t>17</a:t>
             </a:fld>
             <a:endParaRPr lang="en-US"/>
           </a:p>
@@ -3137,45 +3226,6 @@
           </a:prstGeom>
         </p:spPr>
       </p:pic>
-      <p:sp>
-        <p:nvSpPr>
-          <p:cNvPr id="14" name="Text 7"/>
-          <p:cNvSpPr txBox="1"/>
-          <p:nvPr/>
-        </p:nvSpPr>
-        <p:spPr>
-          <a:xfrm>
-            <a:off x="685800" y="5989320"/>
-            <a:ext cx="10820095" cy="457200"/>
-          </a:xfrm>
-          <a:prstGeom prst="rect">
-            <a:avLst/>
-          </a:prstGeom>
-          <a:noFill/>
-          <a:ln/>
-        </p:spPr>
-        <p:txBody>
-          <a:bodyPr wrap="square" lIns="0" tIns="0" rIns="0" bIns="0" rtlCol="0" anchor="ctr"/>
-          <a:lstStyle/>
-          <a:p>
-            <a:pPr algn="ctr" indent="0" marL="0">
-              <a:buNone/>
-            </a:pPr>
-            <a:r>
-              <a:rPr lang="en-US" sz="1150" b="1" dirty="0">
-                <a:solidFill>
-                  <a:srgbClr val="000000"/>
-                </a:solidFill>
-                <a:latin typeface="Times New Roman" pitchFamily="34" charset="0"/>
-                <a:ea typeface="Times New Roman" pitchFamily="34" charset="-122"/>
-                <a:cs typeface="Times New Roman" pitchFamily="34" charset="-120"/>
-              </a:rPr>
-              <a:t>193 features = 80 ECG temporal + 80 PPG temporal + 19 ECG and 14 PPG morphological; selection typically retains ~10. Validation: median QTc 0.405 s against a textbook normal of 0.35–0.44 s.</a:t>
-            </a:r>
-            <a:endParaRPr lang="en-US" sz="1150" dirty="0"/>
-          </a:p>
-        </p:txBody>
-      </p:sp>
     </p:spTree>
   </p:cSld>
   <p:clrMapOvr>
@@ -3241,7 +3291,7 @@
                 <a:ea typeface="Times New Roman" pitchFamily="34" charset="-122"/>
                 <a:cs typeface="Times New Roman" pitchFamily="34" charset="-120"/>
               </a:rPr>
-              <a:t>9. Results I — Performance Under Three Split Protocols</a:t>
+              <a:t>9. Results I — Reproducing the Published Result</a:t>
             </a:r>
             <a:endParaRPr lang="en-US" sz="2100" dirty="0"/>
           </a:p>
@@ -3381,7 +3431,7 @@
                 <a:ea typeface="Times New Roman" pitchFamily="34" charset="-122"/>
                 <a:cs typeface="Times New Roman" pitchFamily="34" charset="-120"/>
               </a:rPr>
-              <a:t>Fused feature set (193 features), 30,830 windows, 10 participants. Each method is reported beside the baseline computed on the same folds.</a:t>
+              <a:t>Evaluated under the source paper's own protocol: a random split at the window level. 193 features, 30,830 windows, 10 participants.</a:t>
             </a:r>
             <a:endParaRPr lang="en-US" sz="1300" dirty="0"/>
           </a:p>
@@ -3402,7 +3452,7 @@
           </p:nvPr>
         </p:nvGraphicFramePr>
         <p:xfrm>
-          <a:off x="685800" y="1600200"/>
+          <a:off x="685800" y="1572768"/>
           <a:ext cx="10835640" cy="914400"/>
         </p:xfrm>
         <a:graphic>
@@ -3410,15 +3460,14 @@
             <a:tbl>
               <a:tblPr/>
               <a:tblGrid>
-                <a:gridCol w="2606040"/>
+                <a:gridCol w="3017520"/>
+                <a:gridCol w="1234440"/>
+                <a:gridCol w="1737360"/>
+                <a:gridCol w="1371600"/>
+                <a:gridCol w="1463040"/>
                 <a:gridCol w="2011680"/>
-                <a:gridCol w="1051560"/>
-                <a:gridCol w="1051560"/>
-                <a:gridCol w="1234440"/>
-                <a:gridCol w="1371600"/>
-                <a:gridCol w="1508760"/>
               </a:tblGrid>
-              <a:tr h="283464">
+              <a:tr h="310896">
                 <a:tc>
                   <a:txBody>
                     <a:bodyPr/>
@@ -3428,7 +3477,7 @@
                         <a:buNone/>
                       </a:pPr>
                       <a:r>
-                        <a:rPr lang="en-US" sz="1050" b="1" dirty="0">
+                        <a:rPr lang="en-US" sz="1100" b="1" dirty="0">
                           <a:solidFill>
                             <a:srgbClr val="000000"/>
                           </a:solidFill>
@@ -3436,9 +3485,9 @@
                           <a:ea typeface="Times New Roman" pitchFamily="34" charset="-122"/>
                           <a:cs typeface="Times New Roman" pitchFamily="34" charset="-120"/>
                         </a:rPr>
-                        <a:t>Split protocol</a:t>
+                        <a:t>Method</a:t>
                       </a:r>
-                      <a:endParaRPr lang="en-US" sz="1050" dirty="0">
+                      <a:endParaRPr lang="en-US" sz="1100" dirty="0">
                         <a:latin typeface="Times New Roman" charset="0"/>
                         <a:ea typeface="Times New Roman" charset="0"/>
                         <a:cs typeface="Times New Roman" charset="0"/>
@@ -3496,7 +3545,7 @@
                         <a:buNone/>
                       </a:pPr>
                       <a:r>
-                        <a:rPr lang="en-US" sz="1050" b="1" dirty="0">
+                        <a:rPr lang="en-US" sz="1100" b="1" dirty="0">
                           <a:solidFill>
                             <a:srgbClr val="000000"/>
                           </a:solidFill>
@@ -3504,9 +3553,9 @@
                           <a:ea typeface="Times New Roman" pitchFamily="34" charset="-122"/>
                           <a:cs typeface="Times New Roman" pitchFamily="34" charset="-120"/>
                         </a:rPr>
-                        <a:t>Method</a:t>
+                        <a:t>R²</a:t>
                       </a:r>
-                      <a:endParaRPr lang="en-US" sz="1050" dirty="0">
+                      <a:endParaRPr lang="en-US" sz="1100" dirty="0">
                         <a:latin typeface="Times New Roman" charset="0"/>
                         <a:ea typeface="Times New Roman" charset="0"/>
                         <a:cs typeface="Times New Roman" charset="0"/>
@@ -3564,7 +3613,7 @@
                         <a:buNone/>
                       </a:pPr>
                       <a:r>
-                        <a:rPr lang="en-US" sz="1050" b="1" dirty="0">
+                        <a:rPr lang="en-US" sz="1100" b="1" dirty="0">
                           <a:solidFill>
                             <a:srgbClr val="000000"/>
                           </a:solidFill>
@@ -3572,9 +3621,9 @@
                           <a:ea typeface="Times New Roman" pitchFamily="34" charset="-122"/>
                           <a:cs typeface="Times New Roman" pitchFamily="34" charset="-120"/>
                         </a:rPr>
-                        <a:t>R²</a:t>
+                        <a:t>RMSE (mmol/L)</a:t>
                       </a:r>
-                      <a:endParaRPr lang="en-US" sz="1050" dirty="0">
+                      <a:endParaRPr lang="en-US" sz="1100" dirty="0">
                         <a:latin typeface="Times New Roman" charset="0"/>
                         <a:ea typeface="Times New Roman" charset="0"/>
                         <a:cs typeface="Times New Roman" charset="0"/>
@@ -3632,7 +3681,7 @@
                         <a:buNone/>
                       </a:pPr>
                       <a:r>
-                        <a:rPr lang="en-US" sz="1050" b="1" dirty="0">
+                        <a:rPr lang="en-US" sz="1100" b="1" dirty="0">
                           <a:solidFill>
                             <a:srgbClr val="000000"/>
                           </a:solidFill>
@@ -3640,9 +3689,9 @@
                           <a:ea typeface="Times New Roman" pitchFamily="34" charset="-122"/>
                           <a:cs typeface="Times New Roman" pitchFamily="34" charset="-120"/>
                         </a:rPr>
-                        <a:t>RMSE</a:t>
+                        <a:t>MARD (%)</a:t>
                       </a:r>
-                      <a:endParaRPr lang="en-US" sz="1050" dirty="0">
+                      <a:endParaRPr lang="en-US" sz="1100" dirty="0">
                         <a:latin typeface="Times New Roman" charset="0"/>
                         <a:ea typeface="Times New Roman" charset="0"/>
                         <a:cs typeface="Times New Roman" charset="0"/>
@@ -3700,7 +3749,7 @@
                         <a:buNone/>
                       </a:pPr>
                       <a:r>
-                        <a:rPr lang="en-US" sz="1050" b="1" dirty="0">
+                        <a:rPr lang="en-US" sz="1100" b="1" dirty="0">
                           <a:solidFill>
                             <a:srgbClr val="000000"/>
                           </a:solidFill>
@@ -3708,9 +3757,9 @@
                           <a:ea typeface="Times New Roman" pitchFamily="34" charset="-122"/>
                           <a:cs typeface="Times New Roman" pitchFamily="34" charset="-120"/>
                         </a:rPr>
-                        <a:t>MARD (%)</a:t>
+                        <a:t>Zone A (%)</a:t>
                       </a:r>
-                      <a:endParaRPr lang="en-US" sz="1050" dirty="0">
+                      <a:endParaRPr lang="en-US" sz="1100" dirty="0">
                         <a:latin typeface="Times New Roman" charset="0"/>
                         <a:ea typeface="Times New Roman" charset="0"/>
                         <a:cs typeface="Times New Roman" charset="0"/>
@@ -3768,75 +3817,7 @@
                         <a:buNone/>
                       </a:pPr>
                       <a:r>
-                        <a:rPr lang="en-US" sz="1050" b="1" dirty="0">
-                          <a:solidFill>
-                            <a:srgbClr val="000000"/>
-                          </a:solidFill>
-                          <a:latin typeface="Times New Roman" pitchFamily="34" charset="0"/>
-                          <a:ea typeface="Times New Roman" pitchFamily="34" charset="-122"/>
-                          <a:cs typeface="Times New Roman" pitchFamily="34" charset="-120"/>
-                        </a:rPr>
-                        <a:t>Zone A (%)</a:t>
-                      </a:r>
-                      <a:endParaRPr lang="en-US" sz="1050" dirty="0">
-                        <a:latin typeface="Times New Roman" charset="0"/>
-                        <a:ea typeface="Times New Roman" charset="0"/>
-                        <a:cs typeface="Times New Roman" charset="0"/>
-                      </a:endParaRPr>
-                    </a:p>
-                  </a:txBody>
-                  <a:tcPr marL="91440" marR="91440" marT="45720" marB="45720" anchor="ctr">
-                    <a:lnL w="12700" cap="flat" cmpd="sng" algn="ctr">
-                      <a:solidFill>
-                        <a:srgbClr val="FFFFFF"/>
-                      </a:solidFill>
-                      <a:prstDash val="solid"/>
-                      <a:round/>
-                      <a:headEnd type="none" w="med" len="med"/>
-                      <a:tailEnd type="none" w="med" len="med"/>
-                    </a:lnL>
-                    <a:lnR w="12700" cap="flat" cmpd="sng" algn="ctr">
-                      <a:solidFill>
-                        <a:srgbClr val="FFFFFF"/>
-                      </a:solidFill>
-                      <a:prstDash val="solid"/>
-                      <a:round/>
-                      <a:headEnd type="none" w="med" len="med"/>
-                      <a:tailEnd type="none" w="med" len="med"/>
-                    </a:lnR>
-                    <a:lnT w="12700" cap="flat" cmpd="sng" algn="ctr">
-                      <a:solidFill>
-                        <a:srgbClr val="FFFFFF"/>
-                      </a:solidFill>
-                      <a:prstDash val="solid"/>
-                      <a:round/>
-                      <a:headEnd type="none" w="med" len="med"/>
-                      <a:tailEnd type="none" w="med" len="med"/>
-                    </a:lnT>
-                    <a:lnB w="6350" cap="flat" cmpd="sng" algn="ctr">
-                      <a:solidFill>
-                        <a:srgbClr val="D9D9D9"/>
-                      </a:solidFill>
-                      <a:prstDash val="solid"/>
-                      <a:round/>
-                      <a:headEnd type="none" w="med" len="med"/>
-                      <a:tailEnd type="none" w="med" len="med"/>
-                    </a:lnB>
-                    <a:solidFill>
-                      <a:srgbClr val="EBEBEB"/>
-                    </a:solidFill>
-                  </a:tcPr>
-                </a:tc>
-                <a:tc>
-                  <a:txBody>
-                    <a:bodyPr/>
-                    <a:lstStyle/>
-                    <a:p>
-                      <a:pPr algn="ctr" indent="0" marL="0">
-                        <a:buNone/>
-                      </a:pPr>
-                      <a:r>
-                        <a:rPr lang="en-US" sz="1050" b="1" dirty="0">
+                        <a:rPr lang="en-US" sz="1100" b="1" dirty="0">
                           <a:solidFill>
                             <a:srgbClr val="000000"/>
                           </a:solidFill>
@@ -3846,7 +3827,7 @@
                         </a:rPr>
                         <a:t>Zone A+B (%)</a:t>
                       </a:r>
-                      <a:endParaRPr lang="en-US" sz="1050" dirty="0">
+                      <a:endParaRPr lang="en-US" sz="1100" dirty="0">
                         <a:latin typeface="Times New Roman" charset="0"/>
                         <a:ea typeface="Times New Roman" charset="0"/>
                         <a:cs typeface="Times New Roman" charset="0"/>
@@ -3896,7 +3877,7 @@
                   </a:tcPr>
                 </a:tc>
               </a:tr>
-              <a:tr h="283464">
+              <a:tr h="310896">
                 <a:tc>
                   <a:txBody>
                     <a:bodyPr/>
@@ -3906,7 +3887,7 @@
                         <a:buNone/>
                       </a:pPr>
                       <a:r>
-                        <a:rPr lang="en-US" sz="1050" dirty="0">
+                        <a:rPr lang="en-US" sz="1100" dirty="0">
                           <a:solidFill>
                             <a:srgbClr val="000000"/>
                           </a:solidFill>
@@ -3914,77 +3895,9 @@
                           <a:ea typeface="Times New Roman" pitchFamily="34" charset="-122"/>
                           <a:cs typeface="Times New Roman" pitchFamily="34" charset="-120"/>
                         </a:rPr>
-                        <a:t>1. Random window</a:t>
+                        <a:t>Random Forest</a:t>
                       </a:r>
-                      <a:endParaRPr lang="en-US" sz="1050" dirty="0">
-                        <a:latin typeface="Times New Roman" charset="0"/>
-                        <a:ea typeface="Times New Roman" charset="0"/>
-                        <a:cs typeface="Times New Roman" charset="0"/>
-                      </a:endParaRPr>
-                    </a:p>
-                  </a:txBody>
-                  <a:tcPr marL="91440" marR="91440" marT="45720" marB="45720" anchor="ctr">
-                    <a:lnL w="12700" cap="flat" cmpd="sng" algn="ctr">
-                      <a:solidFill>
-                        <a:srgbClr val="FFFFFF"/>
-                      </a:solidFill>
-                      <a:prstDash val="solid"/>
-                      <a:round/>
-                      <a:headEnd type="none" w="med" len="med"/>
-                      <a:tailEnd type="none" w="med" len="med"/>
-                    </a:lnL>
-                    <a:lnR w="12700" cap="flat" cmpd="sng" algn="ctr">
-                      <a:solidFill>
-                        <a:srgbClr val="FFFFFF"/>
-                      </a:solidFill>
-                      <a:prstDash val="solid"/>
-                      <a:round/>
-                      <a:headEnd type="none" w="med" len="med"/>
-                      <a:tailEnd type="none" w="med" len="med"/>
-                    </a:lnR>
-                    <a:lnT w="12700" cap="flat" cmpd="sng" algn="ctr">
-                      <a:solidFill>
-                        <a:srgbClr val="FFFFFF"/>
-                      </a:solidFill>
-                      <a:prstDash val="solid"/>
-                      <a:round/>
-                      <a:headEnd type="none" w="med" len="med"/>
-                      <a:tailEnd type="none" w="med" len="med"/>
-                    </a:lnT>
-                    <a:lnB w="6350" cap="flat" cmpd="sng" algn="ctr">
-                      <a:solidFill>
-                        <a:srgbClr val="D9D9D9"/>
-                      </a:solidFill>
-                      <a:prstDash val="solid"/>
-                      <a:round/>
-                      <a:headEnd type="none" w="med" len="med"/>
-                      <a:tailEnd type="none" w="med" len="med"/>
-                    </a:lnB>
-                    <a:solidFill>
-                      <a:srgbClr val="FFFFFF"/>
-                    </a:solidFill>
-                  </a:tcPr>
-                </a:tc>
-                <a:tc>
-                  <a:txBody>
-                    <a:bodyPr/>
-                    <a:lstStyle/>
-                    <a:p>
-                      <a:pPr algn="l" indent="0" marL="0">
-                        <a:buNone/>
-                      </a:pPr>
-                      <a:r>
-                        <a:rPr lang="en-US" sz="1050" dirty="0">
-                          <a:solidFill>
-                            <a:srgbClr val="000000"/>
-                          </a:solidFill>
-                          <a:latin typeface="Times New Roman" pitchFamily="34" charset="0"/>
-                          <a:ea typeface="Times New Roman" pitchFamily="34" charset="-122"/>
-                          <a:cs typeface="Times New Roman" pitchFamily="34" charset="-120"/>
-                        </a:rPr>
-                        <a:t>Choquet fusion</a:t>
-                      </a:r>
-                      <a:endParaRPr lang="en-US" sz="1050" dirty="0">
+                      <a:endParaRPr lang="en-US" sz="1100" dirty="0">
                         <a:latin typeface="Times New Roman" charset="0"/>
                         <a:ea typeface="Times New Roman" charset="0"/>
                         <a:cs typeface="Times New Roman" charset="0"/>
@@ -4042,7 +3955,7 @@
                         <a:buNone/>
                       </a:pPr>
                       <a:r>
-                        <a:rPr lang="en-US" sz="1050" dirty="0">
+                        <a:rPr lang="en-US" sz="1100" dirty="0">
                           <a:solidFill>
                             <a:srgbClr val="000000"/>
                           </a:solidFill>
@@ -4050,9 +3963,9 @@
                           <a:ea typeface="Times New Roman" pitchFamily="34" charset="-122"/>
                           <a:cs typeface="Times New Roman" pitchFamily="34" charset="-120"/>
                         </a:rPr>
-                        <a:t>+0.149</a:t>
+                        <a:t>+0.194</a:t>
                       </a:r>
-                      <a:endParaRPr lang="en-US" sz="1050" dirty="0">
+                      <a:endParaRPr lang="en-US" sz="1100" dirty="0">
                         <a:latin typeface="Times New Roman" charset="0"/>
                         <a:ea typeface="Times New Roman" charset="0"/>
                         <a:cs typeface="Times New Roman" charset="0"/>
@@ -4110,7 +4023,7 @@
                         <a:buNone/>
                       </a:pPr>
                       <a:r>
-                        <a:rPr lang="en-US" sz="1050" dirty="0">
+                        <a:rPr lang="en-US" sz="1100" dirty="0">
                           <a:solidFill>
                             <a:srgbClr val="000000"/>
                           </a:solidFill>
@@ -4118,9 +4031,9 @@
                           <a:ea typeface="Times New Roman" pitchFamily="34" charset="-122"/>
                           <a:cs typeface="Times New Roman" pitchFamily="34" charset="-120"/>
                         </a:rPr>
-                        <a:t>2.324</a:t>
+                        <a:t>2.262</a:t>
                       </a:r>
-                      <a:endParaRPr lang="en-US" sz="1050" dirty="0">
+                      <a:endParaRPr lang="en-US" sz="1100" dirty="0">
                         <a:latin typeface="Times New Roman" charset="0"/>
                         <a:ea typeface="Times New Roman" charset="0"/>
                         <a:cs typeface="Times New Roman" charset="0"/>
@@ -4178,7 +4091,7 @@
                         <a:buNone/>
                       </a:pPr>
                       <a:r>
-                        <a:rPr lang="en-US" sz="1050" dirty="0">
+                        <a:rPr lang="en-US" sz="1100" dirty="0">
                           <a:solidFill>
                             <a:srgbClr val="000000"/>
                           </a:solidFill>
@@ -4186,9 +4099,9 @@
                           <a:ea typeface="Times New Roman" pitchFamily="34" charset="-122"/>
                           <a:cs typeface="Times New Roman" pitchFamily="34" charset="-120"/>
                         </a:rPr>
-                        <a:t>24.86</a:t>
+                        <a:t>25.72</a:t>
                       </a:r>
-                      <a:endParaRPr lang="en-US" sz="1050" dirty="0">
+                      <a:endParaRPr lang="en-US" sz="1100" dirty="0">
                         <a:latin typeface="Times New Roman" charset="0"/>
                         <a:ea typeface="Times New Roman" charset="0"/>
                         <a:cs typeface="Times New Roman" charset="0"/>
@@ -4246,7 +4159,7 @@
                         <a:buNone/>
                       </a:pPr>
                       <a:r>
-                        <a:rPr lang="en-US" sz="1050" dirty="0">
+                        <a:rPr lang="en-US" sz="1100" dirty="0">
                           <a:solidFill>
                             <a:srgbClr val="000000"/>
                           </a:solidFill>
@@ -4254,9 +4167,9 @@
                           <a:ea typeface="Times New Roman" pitchFamily="34" charset="-122"/>
                           <a:cs typeface="Times New Roman" pitchFamily="34" charset="-120"/>
                         </a:rPr>
-                        <a:t>52.87</a:t>
+                        <a:t>53.04</a:t>
                       </a:r>
-                      <a:endParaRPr lang="en-US" sz="1050" dirty="0">
+                      <a:endParaRPr lang="en-US" sz="1100" dirty="0">
                         <a:latin typeface="Times New Roman" charset="0"/>
                         <a:ea typeface="Times New Roman" charset="0"/>
                         <a:cs typeface="Times New Roman" charset="0"/>
@@ -4314,7 +4227,7 @@
                         <a:buNone/>
                       </a:pPr>
                       <a:r>
-                        <a:rPr lang="en-US" sz="1050" dirty="0">
+                        <a:rPr lang="en-US" sz="1100" dirty="0">
                           <a:solidFill>
                             <a:srgbClr val="000000"/>
                           </a:solidFill>
@@ -4322,9 +4235,9 @@
                           <a:ea typeface="Times New Roman" pitchFamily="34" charset="-122"/>
                           <a:cs typeface="Times New Roman" pitchFamily="34" charset="-120"/>
                         </a:rPr>
-                        <a:t>93.75</a:t>
+                        <a:t>93.18</a:t>
                       </a:r>
-                      <a:endParaRPr lang="en-US" sz="1050" dirty="0">
+                      <a:endParaRPr lang="en-US" sz="1100" dirty="0">
                         <a:latin typeface="Times New Roman" charset="0"/>
                         <a:ea typeface="Times New Roman" charset="0"/>
                         <a:cs typeface="Times New Roman" charset="0"/>
@@ -4374,7 +4287,7 @@
                   </a:tcPr>
                 </a:tc>
               </a:tr>
-              <a:tr h="283464">
+              <a:tr h="310896">
                 <a:tc>
                   <a:txBody>
                     <a:bodyPr/>
@@ -4384,7 +4297,7 @@
                         <a:buNone/>
                       </a:pPr>
                       <a:r>
-                        <a:rPr lang="en-US" sz="1050" dirty="0">
+                        <a:rPr lang="en-US" sz="1100" dirty="0">
                           <a:solidFill>
                             <a:srgbClr val="000000"/>
                           </a:solidFill>
@@ -4392,77 +4305,9 @@
                           <a:ea typeface="Times New Roman" pitchFamily="34" charset="-122"/>
                           <a:cs typeface="Times New Roman" pitchFamily="34" charset="-120"/>
                         </a:rPr>
-                        <a:t>    (the paper's protocol)</a:t>
+                        <a:t>Bagging</a:t>
                       </a:r>
-                      <a:endParaRPr lang="en-US" sz="1050" dirty="0">
-                        <a:latin typeface="Times New Roman" charset="0"/>
-                        <a:ea typeface="Times New Roman" charset="0"/>
-                        <a:cs typeface="Times New Roman" charset="0"/>
-                      </a:endParaRPr>
-                    </a:p>
-                  </a:txBody>
-                  <a:tcPr marL="91440" marR="91440" marT="45720" marB="45720" anchor="ctr">
-                    <a:lnL w="12700" cap="flat" cmpd="sng" algn="ctr">
-                      <a:solidFill>
-                        <a:srgbClr val="FFFFFF"/>
-                      </a:solidFill>
-                      <a:prstDash val="solid"/>
-                      <a:round/>
-                      <a:headEnd type="none" w="med" len="med"/>
-                      <a:tailEnd type="none" w="med" len="med"/>
-                    </a:lnL>
-                    <a:lnR w="12700" cap="flat" cmpd="sng" algn="ctr">
-                      <a:solidFill>
-                        <a:srgbClr val="FFFFFF"/>
-                      </a:solidFill>
-                      <a:prstDash val="solid"/>
-                      <a:round/>
-                      <a:headEnd type="none" w="med" len="med"/>
-                      <a:tailEnd type="none" w="med" len="med"/>
-                    </a:lnR>
-                    <a:lnT w="12700" cap="flat" cmpd="sng" algn="ctr">
-                      <a:solidFill>
-                        <a:srgbClr val="FFFFFF"/>
-                      </a:solidFill>
-                      <a:prstDash val="solid"/>
-                      <a:round/>
-                      <a:headEnd type="none" w="med" len="med"/>
-                      <a:tailEnd type="none" w="med" len="med"/>
-                    </a:lnT>
-                    <a:lnB w="6350" cap="flat" cmpd="sng" algn="ctr">
-                      <a:solidFill>
-                        <a:srgbClr val="D9D9D9"/>
-                      </a:solidFill>
-                      <a:prstDash val="solid"/>
-                      <a:round/>
-                      <a:headEnd type="none" w="med" len="med"/>
-                      <a:tailEnd type="none" w="med" len="med"/>
-                    </a:lnB>
-                    <a:solidFill>
-                      <a:srgbClr val="FFFFFF"/>
-                    </a:solidFill>
-                  </a:tcPr>
-                </a:tc>
-                <a:tc>
-                  <a:txBody>
-                    <a:bodyPr/>
-                    <a:lstStyle/>
-                    <a:p>
-                      <a:pPr algn="l" indent="0" marL="0">
-                        <a:buNone/>
-                      </a:pPr>
-                      <a:r>
-                        <a:rPr lang="en-US" sz="1050" dirty="0">
-                          <a:solidFill>
-                            <a:srgbClr val="000000"/>
-                          </a:solidFill>
-                          <a:latin typeface="Times New Roman" pitchFamily="34" charset="0"/>
-                          <a:ea typeface="Times New Roman" pitchFamily="34" charset="-122"/>
-                          <a:cs typeface="Times New Roman" pitchFamily="34" charset="-120"/>
-                        </a:rPr>
-                        <a:t>No-skill baseline</a:t>
-                      </a:r>
-                      <a:endParaRPr lang="en-US" sz="1050" dirty="0">
+                      <a:endParaRPr lang="en-US" sz="1100" dirty="0">
                         <a:latin typeface="Times New Roman" charset="0"/>
                         <a:ea typeface="Times New Roman" charset="0"/>
                         <a:cs typeface="Times New Roman" charset="0"/>
@@ -4520,7 +4365,7 @@
                         <a:buNone/>
                       </a:pPr>
                       <a:r>
-                        <a:rPr lang="en-US" sz="1050" dirty="0">
+                        <a:rPr lang="en-US" sz="1100" dirty="0">
                           <a:solidFill>
                             <a:srgbClr val="000000"/>
                           </a:solidFill>
@@ -4528,9 +4373,9 @@
                           <a:ea typeface="Times New Roman" pitchFamily="34" charset="-122"/>
                           <a:cs typeface="Times New Roman" pitchFamily="34" charset="-120"/>
                         </a:rPr>
-                        <a:t>−0.000</a:t>
+                        <a:t>+0.194</a:t>
                       </a:r>
-                      <a:endParaRPr lang="en-US" sz="1050" dirty="0">
+                      <a:endParaRPr lang="en-US" sz="1100" dirty="0">
                         <a:latin typeface="Times New Roman" charset="0"/>
                         <a:ea typeface="Times New Roman" charset="0"/>
                         <a:cs typeface="Times New Roman" charset="0"/>
@@ -4588,7 +4433,7 @@
                         <a:buNone/>
                       </a:pPr>
                       <a:r>
-                        <a:rPr lang="en-US" sz="1050" dirty="0">
+                        <a:rPr lang="en-US" sz="1100" dirty="0">
                           <a:solidFill>
                             <a:srgbClr val="000000"/>
                           </a:solidFill>
@@ -4596,9 +4441,9 @@
                           <a:ea typeface="Times New Roman" pitchFamily="34" charset="-122"/>
                           <a:cs typeface="Times New Roman" pitchFamily="34" charset="-120"/>
                         </a:rPr>
-                        <a:t>2.520</a:t>
+                        <a:t>2.262</a:t>
                       </a:r>
-                      <a:endParaRPr lang="en-US" sz="1050" dirty="0">
+                      <a:endParaRPr lang="en-US" sz="1100" dirty="0">
                         <a:latin typeface="Times New Roman" charset="0"/>
                         <a:ea typeface="Times New Roman" charset="0"/>
                         <a:cs typeface="Times New Roman" charset="0"/>
@@ -4656,7 +4501,7 @@
                         <a:buNone/>
                       </a:pPr>
                       <a:r>
-                        <a:rPr lang="en-US" sz="1050" dirty="0">
+                        <a:rPr lang="en-US" sz="1100" dirty="0">
                           <a:solidFill>
                             <a:srgbClr val="000000"/>
                           </a:solidFill>
@@ -4664,9 +4509,9 @@
                           <a:ea typeface="Times New Roman" pitchFamily="34" charset="-122"/>
                           <a:cs typeface="Times New Roman" pitchFamily="34" charset="-120"/>
                         </a:rPr>
-                        <a:t>29.14</a:t>
+                        <a:t>25.72</a:t>
                       </a:r>
-                      <a:endParaRPr lang="en-US" sz="1050" dirty="0">
+                      <a:endParaRPr lang="en-US" sz="1100" dirty="0">
                         <a:latin typeface="Times New Roman" charset="0"/>
                         <a:ea typeface="Times New Roman" charset="0"/>
                         <a:cs typeface="Times New Roman" charset="0"/>
@@ -4724,7 +4569,7 @@
                         <a:buNone/>
                       </a:pPr>
                       <a:r>
-                        <a:rPr lang="en-US" sz="1050" dirty="0">
+                        <a:rPr lang="en-US" sz="1100" dirty="0">
                           <a:solidFill>
                             <a:srgbClr val="000000"/>
                           </a:solidFill>
@@ -4732,9 +4577,9 @@
                           <a:ea typeface="Times New Roman" pitchFamily="34" charset="-122"/>
                           <a:cs typeface="Times New Roman" pitchFamily="34" charset="-120"/>
                         </a:rPr>
-                        <a:t>45.34</a:t>
+                        <a:t>53.07</a:t>
                       </a:r>
-                      <a:endParaRPr lang="en-US" sz="1050" dirty="0">
+                      <a:endParaRPr lang="en-US" sz="1100" dirty="0">
                         <a:latin typeface="Times New Roman" charset="0"/>
                         <a:ea typeface="Times New Roman" charset="0"/>
                         <a:cs typeface="Times New Roman" charset="0"/>
@@ -4792,7 +4637,7 @@
                         <a:buNone/>
                       </a:pPr>
                       <a:r>
-                        <a:rPr lang="en-US" sz="1050" dirty="0">
+                        <a:rPr lang="en-US" sz="1100" dirty="0">
                           <a:solidFill>
                             <a:srgbClr val="000000"/>
                           </a:solidFill>
@@ -4800,9 +4645,9 @@
                           <a:ea typeface="Times New Roman" pitchFamily="34" charset="-122"/>
                           <a:cs typeface="Times New Roman" pitchFamily="34" charset="-120"/>
                         </a:rPr>
-                        <a:t>90.89</a:t>
+                        <a:t>93.18</a:t>
                       </a:r>
-                      <a:endParaRPr lang="en-US" sz="1050" dirty="0">
+                      <a:endParaRPr lang="en-US" sz="1100" dirty="0">
                         <a:latin typeface="Times New Roman" charset="0"/>
                         <a:ea typeface="Times New Roman" charset="0"/>
                         <a:cs typeface="Times New Roman" charset="0"/>
@@ -4852,7 +4697,7 @@
                   </a:tcPr>
                 </a:tc>
               </a:tr>
-              <a:tr h="283464">
+              <a:tr h="310896">
                 <a:tc>
                   <a:txBody>
                     <a:bodyPr/>
@@ -4862,7 +4707,7 @@
                         <a:buNone/>
                       </a:pPr>
                       <a:r>
-                        <a:rPr lang="en-US" sz="1050" dirty="0">
+                        <a:rPr lang="en-US" sz="1100" dirty="0">
                           <a:solidFill>
                             <a:srgbClr val="000000"/>
                           </a:solidFill>
@@ -4870,77 +4715,9 @@
                           <a:ea typeface="Times New Roman" pitchFamily="34" charset="-122"/>
                           <a:cs typeface="Times New Roman" pitchFamily="34" charset="-120"/>
                         </a:rPr>
-                        <a:t>2. Subject-aware</a:t>
+                        <a:t>Gradient Boosting</a:t>
                       </a:r>
-                      <a:endParaRPr lang="en-US" sz="1050" dirty="0">
-                        <a:latin typeface="Times New Roman" charset="0"/>
-                        <a:ea typeface="Times New Roman" charset="0"/>
-                        <a:cs typeface="Times New Roman" charset="0"/>
-                      </a:endParaRPr>
-                    </a:p>
-                  </a:txBody>
-                  <a:tcPr marL="91440" marR="91440" marT="45720" marB="45720" anchor="ctr">
-                    <a:lnL w="12700" cap="flat" cmpd="sng" algn="ctr">
-                      <a:solidFill>
-                        <a:srgbClr val="FFFFFF"/>
-                      </a:solidFill>
-                      <a:prstDash val="solid"/>
-                      <a:round/>
-                      <a:headEnd type="none" w="med" len="med"/>
-                      <a:tailEnd type="none" w="med" len="med"/>
-                    </a:lnL>
-                    <a:lnR w="12700" cap="flat" cmpd="sng" algn="ctr">
-                      <a:solidFill>
-                        <a:srgbClr val="FFFFFF"/>
-                      </a:solidFill>
-                      <a:prstDash val="solid"/>
-                      <a:round/>
-                      <a:headEnd type="none" w="med" len="med"/>
-                      <a:tailEnd type="none" w="med" len="med"/>
-                    </a:lnR>
-                    <a:lnT w="12700" cap="flat" cmpd="sng" algn="ctr">
-                      <a:solidFill>
-                        <a:srgbClr val="FFFFFF"/>
-                      </a:solidFill>
-                      <a:prstDash val="solid"/>
-                      <a:round/>
-                      <a:headEnd type="none" w="med" len="med"/>
-                      <a:tailEnd type="none" w="med" len="med"/>
-                    </a:lnT>
-                    <a:lnB w="6350" cap="flat" cmpd="sng" algn="ctr">
-                      <a:solidFill>
-                        <a:srgbClr val="D9D9D9"/>
-                      </a:solidFill>
-                      <a:prstDash val="solid"/>
-                      <a:round/>
-                      <a:headEnd type="none" w="med" len="med"/>
-                      <a:tailEnd type="none" w="med" len="med"/>
-                    </a:lnB>
-                    <a:solidFill>
-                      <a:srgbClr val="FFFFFF"/>
-                    </a:solidFill>
-                  </a:tcPr>
-                </a:tc>
-                <a:tc>
-                  <a:txBody>
-                    <a:bodyPr/>
-                    <a:lstStyle/>
-                    <a:p>
-                      <a:pPr algn="l" indent="0" marL="0">
-                        <a:buNone/>
-                      </a:pPr>
-                      <a:r>
-                        <a:rPr lang="en-US" sz="1050" dirty="0">
-                          <a:solidFill>
-                            <a:srgbClr val="000000"/>
-                          </a:solidFill>
-                          <a:latin typeface="Times New Roman" pitchFamily="34" charset="0"/>
-                          <a:ea typeface="Times New Roman" pitchFamily="34" charset="-122"/>
-                          <a:cs typeface="Times New Roman" pitchFamily="34" charset="-120"/>
-                        </a:rPr>
-                        <a:t>Choquet fusion</a:t>
-                      </a:r>
-                      <a:endParaRPr lang="en-US" sz="1050" dirty="0">
+                      <a:endParaRPr lang="en-US" sz="1100" dirty="0">
                         <a:latin typeface="Times New Roman" charset="0"/>
                         <a:ea typeface="Times New Roman" charset="0"/>
                         <a:cs typeface="Times New Roman" charset="0"/>
@@ -4998,7 +4775,7 @@
                         <a:buNone/>
                       </a:pPr>
                       <a:r>
-                        <a:rPr lang="en-US" sz="1050" dirty="0">
+                        <a:rPr lang="en-US" sz="1100" dirty="0">
                           <a:solidFill>
                             <a:srgbClr val="000000"/>
                           </a:solidFill>
@@ -5006,9 +4783,9 @@
                           <a:ea typeface="Times New Roman" pitchFamily="34" charset="-122"/>
                           <a:cs typeface="Times New Roman" pitchFamily="34" charset="-120"/>
                         </a:rPr>
-                        <a:t>−0.223</a:t>
+                        <a:t>+0.101</a:t>
                       </a:r>
-                      <a:endParaRPr lang="en-US" sz="1050" dirty="0">
+                      <a:endParaRPr lang="en-US" sz="1100" dirty="0">
                         <a:latin typeface="Times New Roman" charset="0"/>
                         <a:ea typeface="Times New Roman" charset="0"/>
                         <a:cs typeface="Times New Roman" charset="0"/>
@@ -5066,7 +4843,7 @@
                         <a:buNone/>
                       </a:pPr>
                       <a:r>
-                        <a:rPr lang="en-US" sz="1050" dirty="0">
+                        <a:rPr lang="en-US" sz="1100" dirty="0">
                           <a:solidFill>
                             <a:srgbClr val="000000"/>
                           </a:solidFill>
@@ -5074,9 +4851,9 @@
                           <a:ea typeface="Times New Roman" pitchFamily="34" charset="-122"/>
                           <a:cs typeface="Times New Roman" pitchFamily="34" charset="-120"/>
                         </a:rPr>
-                        <a:t>2.786</a:t>
+                        <a:t>2.389</a:t>
                       </a:r>
-                      <a:endParaRPr lang="en-US" sz="1050" dirty="0">
+                      <a:endParaRPr lang="en-US" sz="1100" dirty="0">
                         <a:latin typeface="Times New Roman" charset="0"/>
                         <a:ea typeface="Times New Roman" charset="0"/>
                         <a:cs typeface="Times New Roman" charset="0"/>
@@ -5134,7 +4911,7 @@
                         <a:buNone/>
                       </a:pPr>
                       <a:r>
-                        <a:rPr lang="en-US" sz="1050" dirty="0">
+                        <a:rPr lang="en-US" sz="1100" dirty="0">
                           <a:solidFill>
                             <a:srgbClr val="000000"/>
                           </a:solidFill>
@@ -5142,9 +4919,9 @@
                           <a:ea typeface="Times New Roman" pitchFamily="34" charset="-122"/>
                           <a:cs typeface="Times New Roman" pitchFamily="34" charset="-120"/>
                         </a:rPr>
-                        <a:t>31.50</a:t>
+                        <a:t>27.48</a:t>
                       </a:r>
-                      <a:endParaRPr lang="en-US" sz="1050" dirty="0">
+                      <a:endParaRPr lang="en-US" sz="1100" dirty="0">
                         <a:latin typeface="Times New Roman" charset="0"/>
                         <a:ea typeface="Times New Roman" charset="0"/>
                         <a:cs typeface="Times New Roman" charset="0"/>
@@ -5202,7 +4979,7 @@
                         <a:buNone/>
                       </a:pPr>
                       <a:r>
-                        <a:rPr lang="en-US" sz="1050" dirty="0">
+                        <a:rPr lang="en-US" sz="1100" dirty="0">
                           <a:solidFill>
                             <a:srgbClr val="000000"/>
                           </a:solidFill>
@@ -5210,9 +4987,9 @@
                           <a:ea typeface="Times New Roman" pitchFamily="34" charset="-122"/>
                           <a:cs typeface="Times New Roman" pitchFamily="34" charset="-120"/>
                         </a:rPr>
-                        <a:t>41.91</a:t>
+                        <a:t>48.78</a:t>
                       </a:r>
-                      <a:endParaRPr lang="en-US" sz="1050" dirty="0">
+                      <a:endParaRPr lang="en-US" sz="1100" dirty="0">
                         <a:latin typeface="Times New Roman" charset="0"/>
                         <a:ea typeface="Times New Roman" charset="0"/>
                         <a:cs typeface="Times New Roman" charset="0"/>
@@ -5270,7 +5047,7 @@
                         <a:buNone/>
                       </a:pPr>
                       <a:r>
-                        <a:rPr lang="en-US" sz="1050" dirty="0">
+                        <a:rPr lang="en-US" sz="1100" dirty="0">
                           <a:solidFill>
                             <a:srgbClr val="000000"/>
                           </a:solidFill>
@@ -5278,9 +5055,9 @@
                           <a:ea typeface="Times New Roman" pitchFamily="34" charset="-122"/>
                           <a:cs typeface="Times New Roman" pitchFamily="34" charset="-120"/>
                         </a:rPr>
-                        <a:t>89.39</a:t>
+                        <a:t>92.25</a:t>
                       </a:r>
-                      <a:endParaRPr lang="en-US" sz="1050" dirty="0">
+                      <a:endParaRPr lang="en-US" sz="1100" dirty="0">
                         <a:latin typeface="Times New Roman" charset="0"/>
                         <a:ea typeface="Times New Roman" charset="0"/>
                         <a:cs typeface="Times New Roman" charset="0"/>
@@ -5330,64 +5107,7 @@
                   </a:tcPr>
                 </a:tc>
               </a:tr>
-              <a:tr h="283464">
-                <a:tc>
-                  <a:txBody>
-                    <a:bodyPr/>
-                    <a:lstStyle/>
-                    <a:p>
-                      <a:pPr algn="l" indent="0" marL="0">
-                        <a:buNone/>
-                      </a:pPr>
-                      <a:endParaRPr lang="en-US" sz="1050" dirty="0">
-                        <a:latin typeface="Times New Roman" charset="0"/>
-                        <a:ea typeface="Times New Roman" charset="0"/>
-                        <a:cs typeface="Times New Roman" charset="0"/>
-                      </a:endParaRPr>
-                    </a:p>
-                  </a:txBody>
-                  <a:tcPr marL="91440" marR="91440" marT="45720" marB="45720" anchor="ctr">
-                    <a:lnL w="12700" cap="flat" cmpd="sng" algn="ctr">
-                      <a:solidFill>
-                        <a:srgbClr val="FFFFFF"/>
-                      </a:solidFill>
-                      <a:prstDash val="solid"/>
-                      <a:round/>
-                      <a:headEnd type="none" w="med" len="med"/>
-                      <a:tailEnd type="none" w="med" len="med"/>
-                    </a:lnL>
-                    <a:lnR w="12700" cap="flat" cmpd="sng" algn="ctr">
-                      <a:solidFill>
-                        <a:srgbClr val="FFFFFF"/>
-                      </a:solidFill>
-                      <a:prstDash val="solid"/>
-                      <a:round/>
-                      <a:headEnd type="none" w="med" len="med"/>
-                      <a:tailEnd type="none" w="med" len="med"/>
-                    </a:lnR>
-                    <a:lnT w="12700" cap="flat" cmpd="sng" algn="ctr">
-                      <a:solidFill>
-                        <a:srgbClr val="FFFFFF"/>
-                      </a:solidFill>
-                      <a:prstDash val="solid"/>
-                      <a:round/>
-                      <a:headEnd type="none" w="med" len="med"/>
-                      <a:tailEnd type="none" w="med" len="med"/>
-                    </a:lnT>
-                    <a:lnB w="6350" cap="flat" cmpd="sng" algn="ctr">
-                      <a:solidFill>
-                        <a:srgbClr val="D9D9D9"/>
-                      </a:solidFill>
-                      <a:prstDash val="solid"/>
-                      <a:round/>
-                      <a:headEnd type="none" w="med" len="med"/>
-                      <a:tailEnd type="none" w="med" len="med"/>
-                    </a:lnB>
-                    <a:solidFill>
-                      <a:srgbClr val="FFFFFF"/>
-                    </a:solidFill>
-                  </a:tcPr>
-                </a:tc>
+              <a:tr h="310896">
                 <a:tc>
                   <a:txBody>
                     <a:bodyPr/>
@@ -5397,7 +5117,7 @@
                         <a:buNone/>
                       </a:pPr>
                       <a:r>
-                        <a:rPr lang="en-US" sz="1050" dirty="0">
+                        <a:rPr lang="en-US" sz="1100" dirty="0">
                           <a:solidFill>
                             <a:srgbClr val="000000"/>
                           </a:solidFill>
@@ -5405,9 +5125,9 @@
                           <a:ea typeface="Times New Roman" pitchFamily="34" charset="-122"/>
                           <a:cs typeface="Times New Roman" pitchFamily="34" charset="-120"/>
                         </a:rPr>
-                        <a:t>No-skill baseline</a:t>
+                        <a:t>Choquet fusion</a:t>
                       </a:r>
-                      <a:endParaRPr lang="en-US" sz="1050" dirty="0">
+                      <a:endParaRPr lang="en-US" sz="1100" dirty="0">
                         <a:latin typeface="Times New Roman" charset="0"/>
                         <a:ea typeface="Times New Roman" charset="0"/>
                         <a:cs typeface="Times New Roman" charset="0"/>
@@ -5465,7 +5185,7 @@
                         <a:buNone/>
                       </a:pPr>
                       <a:r>
-                        <a:rPr lang="en-US" sz="1050" dirty="0">
+                        <a:rPr lang="en-US" sz="1100" dirty="0">
                           <a:solidFill>
                             <a:srgbClr val="000000"/>
                           </a:solidFill>
@@ -5473,9 +5193,9 @@
                           <a:ea typeface="Times New Roman" pitchFamily="34" charset="-122"/>
                           <a:cs typeface="Times New Roman" pitchFamily="34" charset="-120"/>
                         </a:rPr>
-                        <a:t>−0.074</a:t>
+                        <a:t>+0.149</a:t>
                       </a:r>
-                      <a:endParaRPr lang="en-US" sz="1050" dirty="0">
+                      <a:endParaRPr lang="en-US" sz="1100" dirty="0">
                         <a:latin typeface="Times New Roman" charset="0"/>
                         <a:ea typeface="Times New Roman" charset="0"/>
                         <a:cs typeface="Times New Roman" charset="0"/>
@@ -5533,7 +5253,7 @@
                         <a:buNone/>
                       </a:pPr>
                       <a:r>
-                        <a:rPr lang="en-US" sz="1050" dirty="0">
+                        <a:rPr lang="en-US" sz="1100" dirty="0">
                           <a:solidFill>
                             <a:srgbClr val="000000"/>
                           </a:solidFill>
@@ -5541,9 +5261,9 @@
                           <a:ea typeface="Times New Roman" pitchFamily="34" charset="-122"/>
                           <a:cs typeface="Times New Roman" pitchFamily="34" charset="-120"/>
                         </a:rPr>
-                        <a:t>2.610</a:t>
+                        <a:t>2.324</a:t>
                       </a:r>
-                      <a:endParaRPr lang="en-US" sz="1050" dirty="0">
+                      <a:endParaRPr lang="en-US" sz="1100" dirty="0">
                         <a:latin typeface="Times New Roman" charset="0"/>
                         <a:ea typeface="Times New Roman" charset="0"/>
                         <a:cs typeface="Times New Roman" charset="0"/>
@@ -5601,7 +5321,7 @@
                         <a:buNone/>
                       </a:pPr>
                       <a:r>
-                        <a:rPr lang="en-US" sz="1050" dirty="0">
+                        <a:rPr lang="en-US" sz="1100" dirty="0">
                           <a:solidFill>
                             <a:srgbClr val="000000"/>
                           </a:solidFill>
@@ -5609,9 +5329,9 @@
                           <a:ea typeface="Times New Roman" pitchFamily="34" charset="-122"/>
                           <a:cs typeface="Times New Roman" pitchFamily="34" charset="-120"/>
                         </a:rPr>
-                        <a:t>30.30</a:t>
+                        <a:t>24.86</a:t>
                       </a:r>
-                      <a:endParaRPr lang="en-US" sz="1050" dirty="0">
+                      <a:endParaRPr lang="en-US" sz="1100" dirty="0">
                         <a:latin typeface="Times New Roman" charset="0"/>
                         <a:ea typeface="Times New Roman" charset="0"/>
                         <a:cs typeface="Times New Roman" charset="0"/>
@@ -5669,7 +5389,7 @@
                         <a:buNone/>
                       </a:pPr>
                       <a:r>
-                        <a:rPr lang="en-US" sz="1050" dirty="0">
+                        <a:rPr lang="en-US" sz="1100" dirty="0">
                           <a:solidFill>
                             <a:srgbClr val="000000"/>
                           </a:solidFill>
@@ -5677,9 +5397,9 @@
                           <a:ea typeface="Times New Roman" pitchFamily="34" charset="-122"/>
                           <a:cs typeface="Times New Roman" pitchFamily="34" charset="-120"/>
                         </a:rPr>
-                        <a:t>43.74</a:t>
+                        <a:t>52.87</a:t>
                       </a:r>
-                      <a:endParaRPr lang="en-US" sz="1050" dirty="0">
+                      <a:endParaRPr lang="en-US" sz="1100" dirty="0">
                         <a:latin typeface="Times New Roman" charset="0"/>
                         <a:ea typeface="Times New Roman" charset="0"/>
                         <a:cs typeface="Times New Roman" charset="0"/>
@@ -5737,7 +5457,7 @@
                         <a:buNone/>
                       </a:pPr>
                       <a:r>
-                        <a:rPr lang="en-US" sz="1050" dirty="0">
+                        <a:rPr lang="en-US" sz="1100" dirty="0">
                           <a:solidFill>
                             <a:srgbClr val="000000"/>
                           </a:solidFill>
@@ -5745,9 +5465,9 @@
                           <a:ea typeface="Times New Roman" pitchFamily="34" charset="-122"/>
                           <a:cs typeface="Times New Roman" pitchFamily="34" charset="-120"/>
                         </a:rPr>
-                        <a:t>90.01</a:t>
+                        <a:t>93.75</a:t>
                       </a:r>
-                      <a:endParaRPr lang="en-US" sz="1050" dirty="0">
+                      <a:endParaRPr lang="en-US" sz="1100" dirty="0">
                         <a:latin typeface="Times New Roman" charset="0"/>
                         <a:ea typeface="Times New Roman" charset="0"/>
                         <a:cs typeface="Times New Roman" charset="0"/>
@@ -5797,7 +5517,7 @@
                   </a:tcPr>
                 </a:tc>
               </a:tr>
-              <a:tr h="283464">
+              <a:tr h="310896">
                 <a:tc>
                   <a:txBody>
                     <a:bodyPr/>
@@ -5807,7 +5527,7 @@
                         <a:buNone/>
                       </a:pPr>
                       <a:r>
-                        <a:rPr lang="en-US" sz="1050" dirty="0">
+                        <a:rPr lang="en-US" sz="1100" dirty="0">
                           <a:solidFill>
                             <a:srgbClr val="000000"/>
                           </a:solidFill>
@@ -5815,77 +5535,9 @@
                           <a:ea typeface="Times New Roman" pitchFamily="34" charset="-122"/>
                           <a:cs typeface="Times New Roman" pitchFamily="34" charset="-120"/>
                         </a:rPr>
-                        <a:t>3. Leave-one-subject-out</a:t>
+                        <a:t>No-skill baseline</a:t>
                       </a:r>
-                      <a:endParaRPr lang="en-US" sz="1050" dirty="0">
-                        <a:latin typeface="Times New Roman" charset="0"/>
-                        <a:ea typeface="Times New Roman" charset="0"/>
-                        <a:cs typeface="Times New Roman" charset="0"/>
-                      </a:endParaRPr>
-                    </a:p>
-                  </a:txBody>
-                  <a:tcPr marL="91440" marR="91440" marT="45720" marB="45720" anchor="ctr">
-                    <a:lnL w="12700" cap="flat" cmpd="sng" algn="ctr">
-                      <a:solidFill>
-                        <a:srgbClr val="FFFFFF"/>
-                      </a:solidFill>
-                      <a:prstDash val="solid"/>
-                      <a:round/>
-                      <a:headEnd type="none" w="med" len="med"/>
-                      <a:tailEnd type="none" w="med" len="med"/>
-                    </a:lnL>
-                    <a:lnR w="12700" cap="flat" cmpd="sng" algn="ctr">
-                      <a:solidFill>
-                        <a:srgbClr val="FFFFFF"/>
-                      </a:solidFill>
-                      <a:prstDash val="solid"/>
-                      <a:round/>
-                      <a:headEnd type="none" w="med" len="med"/>
-                      <a:tailEnd type="none" w="med" len="med"/>
-                    </a:lnR>
-                    <a:lnT w="12700" cap="flat" cmpd="sng" algn="ctr">
-                      <a:solidFill>
-                        <a:srgbClr val="FFFFFF"/>
-                      </a:solidFill>
-                      <a:prstDash val="solid"/>
-                      <a:round/>
-                      <a:headEnd type="none" w="med" len="med"/>
-                      <a:tailEnd type="none" w="med" len="med"/>
-                    </a:lnT>
-                    <a:lnB w="6350" cap="flat" cmpd="sng" algn="ctr">
-                      <a:solidFill>
-                        <a:srgbClr val="D9D9D9"/>
-                      </a:solidFill>
-                      <a:prstDash val="solid"/>
-                      <a:round/>
-                      <a:headEnd type="none" w="med" len="med"/>
-                      <a:tailEnd type="none" w="med" len="med"/>
-                    </a:lnB>
-                    <a:solidFill>
-                      <a:srgbClr val="FFFFFF"/>
-                    </a:solidFill>
-                  </a:tcPr>
-                </a:tc>
-                <a:tc>
-                  <a:txBody>
-                    <a:bodyPr/>
-                    <a:lstStyle/>
-                    <a:p>
-                      <a:pPr algn="l" indent="0" marL="0">
-                        <a:buNone/>
-                      </a:pPr>
-                      <a:r>
-                        <a:rPr lang="en-US" sz="1050" dirty="0">
-                          <a:solidFill>
-                            <a:srgbClr val="000000"/>
-                          </a:solidFill>
-                          <a:latin typeface="Times New Roman" pitchFamily="34" charset="0"/>
-                          <a:ea typeface="Times New Roman" pitchFamily="34" charset="-122"/>
-                          <a:cs typeface="Times New Roman" pitchFamily="34" charset="-120"/>
-                        </a:rPr>
-                        <a:t>Choquet fusion</a:t>
-                      </a:r>
-                      <a:endParaRPr lang="en-US" sz="1050" dirty="0">
+                      <a:endParaRPr lang="en-US" sz="1100" dirty="0">
                         <a:latin typeface="Times New Roman" charset="0"/>
                         <a:ea typeface="Times New Roman" charset="0"/>
                         <a:cs typeface="Times New Roman" charset="0"/>
@@ -5943,7 +5595,7 @@
                         <a:buNone/>
                       </a:pPr>
                       <a:r>
-                        <a:rPr lang="en-US" sz="1050" dirty="0">
+                        <a:rPr lang="en-US" sz="1100" dirty="0">
                           <a:solidFill>
                             <a:srgbClr val="000000"/>
                           </a:solidFill>
@@ -5951,9 +5603,9 @@
                           <a:ea typeface="Times New Roman" pitchFamily="34" charset="-122"/>
                           <a:cs typeface="Times New Roman" pitchFamily="34" charset="-120"/>
                         </a:rPr>
-                        <a:t>−0.097</a:t>
+                        <a:t>−0.000</a:t>
                       </a:r>
-                      <a:endParaRPr lang="en-US" sz="1050" dirty="0">
+                      <a:endParaRPr lang="en-US" sz="1100" dirty="0">
                         <a:latin typeface="Times New Roman" charset="0"/>
                         <a:ea typeface="Times New Roman" charset="0"/>
                         <a:cs typeface="Times New Roman" charset="0"/>
@@ -6011,7 +5663,7 @@
                         <a:buNone/>
                       </a:pPr>
                       <a:r>
-                        <a:rPr lang="en-US" sz="1050" dirty="0">
+                        <a:rPr lang="en-US" sz="1100" dirty="0">
                           <a:solidFill>
                             <a:srgbClr val="000000"/>
                           </a:solidFill>
@@ -6019,9 +5671,9 @@
                           <a:ea typeface="Times New Roman" pitchFamily="34" charset="-122"/>
                           <a:cs typeface="Times New Roman" pitchFamily="34" charset="-120"/>
                         </a:rPr>
-                        <a:t>2.639</a:t>
+                        <a:t>2.520</a:t>
                       </a:r>
-                      <a:endParaRPr lang="en-US" sz="1050" dirty="0">
+                      <a:endParaRPr lang="en-US" sz="1100" dirty="0">
                         <a:latin typeface="Times New Roman" charset="0"/>
                         <a:ea typeface="Times New Roman" charset="0"/>
                         <a:cs typeface="Times New Roman" charset="0"/>
@@ -6079,7 +5731,7 @@
                         <a:buNone/>
                       </a:pPr>
                       <a:r>
-                        <a:rPr lang="en-US" sz="1050" dirty="0">
+                        <a:rPr lang="en-US" sz="1100" dirty="0">
                           <a:solidFill>
                             <a:srgbClr val="000000"/>
                           </a:solidFill>
@@ -6087,9 +5739,9 @@
                           <a:ea typeface="Times New Roman" pitchFamily="34" charset="-122"/>
                           <a:cs typeface="Times New Roman" pitchFamily="34" charset="-120"/>
                         </a:rPr>
-                        <a:t>28.86</a:t>
+                        <a:t>29.14</a:t>
                       </a:r>
-                      <a:endParaRPr lang="en-US" sz="1050" dirty="0">
+                      <a:endParaRPr lang="en-US" sz="1100" dirty="0">
                         <a:latin typeface="Times New Roman" charset="0"/>
                         <a:ea typeface="Times New Roman" charset="0"/>
                         <a:cs typeface="Times New Roman" charset="0"/>
@@ -6147,7 +5799,7 @@
                         <a:buNone/>
                       </a:pPr>
                       <a:r>
-                        <a:rPr lang="en-US" sz="1050" dirty="0">
+                        <a:rPr lang="en-US" sz="1100" dirty="0">
                           <a:solidFill>
                             <a:srgbClr val="000000"/>
                           </a:solidFill>
@@ -6155,9 +5807,9 @@
                           <a:ea typeface="Times New Roman" pitchFamily="34" charset="-122"/>
                           <a:cs typeface="Times New Roman" pitchFamily="34" charset="-120"/>
                         </a:rPr>
-                        <a:t>45.57</a:t>
+                        <a:t>45.34</a:t>
                       </a:r>
-                      <a:endParaRPr lang="en-US" sz="1050" dirty="0">
+                      <a:endParaRPr lang="en-US" sz="1100" dirty="0">
                         <a:latin typeface="Times New Roman" charset="0"/>
                         <a:ea typeface="Times New Roman" charset="0"/>
                         <a:cs typeface="Times New Roman" charset="0"/>
@@ -6215,7 +5867,7 @@
                         <a:buNone/>
                       </a:pPr>
                       <a:r>
-                        <a:rPr lang="en-US" sz="1050" dirty="0">
+                        <a:rPr lang="en-US" sz="1100" dirty="0">
                           <a:solidFill>
                             <a:srgbClr val="000000"/>
                           </a:solidFill>
@@ -6223,9 +5875,9 @@
                           <a:ea typeface="Times New Roman" pitchFamily="34" charset="-122"/>
                           <a:cs typeface="Times New Roman" pitchFamily="34" charset="-120"/>
                         </a:rPr>
-                        <a:t>91.25</a:t>
+                        <a:t>90.89</a:t>
                       </a:r>
-                      <a:endParaRPr lang="en-US" sz="1050" dirty="0">
+                      <a:endParaRPr lang="en-US" sz="1100" dirty="0">
                         <a:latin typeface="Times New Roman" charset="0"/>
                         <a:ea typeface="Times New Roman" charset="0"/>
                         <a:cs typeface="Times New Roman" charset="0"/>
@@ -6275,64 +5927,7 @@
                   </a:tcPr>
                 </a:tc>
               </a:tr>
-              <a:tr h="283464">
-                <a:tc>
-                  <a:txBody>
-                    <a:bodyPr/>
-                    <a:lstStyle/>
-                    <a:p>
-                      <a:pPr algn="l" indent="0" marL="0">
-                        <a:buNone/>
-                      </a:pPr>
-                      <a:endParaRPr lang="en-US" sz="1050" dirty="0">
-                        <a:latin typeface="Times New Roman" charset="0"/>
-                        <a:ea typeface="Times New Roman" charset="0"/>
-                        <a:cs typeface="Times New Roman" charset="0"/>
-                      </a:endParaRPr>
-                    </a:p>
-                  </a:txBody>
-                  <a:tcPr marL="91440" marR="91440" marT="45720" marB="45720" anchor="ctr">
-                    <a:lnL w="12700" cap="flat" cmpd="sng" algn="ctr">
-                      <a:solidFill>
-                        <a:srgbClr val="FFFFFF"/>
-                      </a:solidFill>
-                      <a:prstDash val="solid"/>
-                      <a:round/>
-                      <a:headEnd type="none" w="med" len="med"/>
-                      <a:tailEnd type="none" w="med" len="med"/>
-                    </a:lnL>
-                    <a:lnR w="12700" cap="flat" cmpd="sng" algn="ctr">
-                      <a:solidFill>
-                        <a:srgbClr val="FFFFFF"/>
-                      </a:solidFill>
-                      <a:prstDash val="solid"/>
-                      <a:round/>
-                      <a:headEnd type="none" w="med" len="med"/>
-                      <a:tailEnd type="none" w="med" len="med"/>
-                    </a:lnR>
-                    <a:lnT w="12700" cap="flat" cmpd="sng" algn="ctr">
-                      <a:solidFill>
-                        <a:srgbClr val="FFFFFF"/>
-                      </a:solidFill>
-                      <a:prstDash val="solid"/>
-                      <a:round/>
-                      <a:headEnd type="none" w="med" len="med"/>
-                      <a:tailEnd type="none" w="med" len="med"/>
-                    </a:lnT>
-                    <a:lnB w="6350" cap="flat" cmpd="sng" algn="ctr">
-                      <a:solidFill>
-                        <a:srgbClr val="D9D9D9"/>
-                      </a:solidFill>
-                      <a:prstDash val="solid"/>
-                      <a:round/>
-                      <a:headEnd type="none" w="med" len="med"/>
-                      <a:tailEnd type="none" w="med" len="med"/>
-                    </a:lnB>
-                    <a:solidFill>
-                      <a:srgbClr val="FFFFFF"/>
-                    </a:solidFill>
-                  </a:tcPr>
-                </a:tc>
+              <a:tr h="310896">
                 <a:tc>
                   <a:txBody>
                     <a:bodyPr/>
@@ -6342,7 +5937,7 @@
                         <a:buNone/>
                       </a:pPr>
                       <a:r>
-                        <a:rPr lang="en-US" sz="1050" dirty="0">
+                        <a:rPr lang="en-US" sz="1100" b="1" dirty="0">
                           <a:solidFill>
                             <a:srgbClr val="000000"/>
                           </a:solidFill>
@@ -6350,9 +5945,9 @@
                           <a:ea typeface="Times New Roman" pitchFamily="34" charset="-122"/>
                           <a:cs typeface="Times New Roman" pitchFamily="34" charset="-120"/>
                         </a:rPr>
-                        <a:t>No-skill baseline</a:t>
+                        <a:t>Reported by the authors [1]</a:t>
                       </a:r>
-                      <a:endParaRPr lang="en-US" sz="1050" dirty="0">
+                      <a:endParaRPr lang="en-US" sz="1100" dirty="0">
                         <a:latin typeface="Times New Roman" charset="0"/>
                         <a:ea typeface="Times New Roman" charset="0"/>
                         <a:cs typeface="Times New Roman" charset="0"/>
@@ -6410,7 +6005,7 @@
                         <a:buNone/>
                       </a:pPr>
                       <a:r>
-                        <a:rPr lang="en-US" sz="1050" dirty="0">
+                        <a:rPr lang="en-US" sz="1100" b="1" dirty="0">
                           <a:solidFill>
                             <a:srgbClr val="000000"/>
                           </a:solidFill>
@@ -6418,9 +6013,9 @@
                           <a:ea typeface="Times New Roman" pitchFamily="34" charset="-122"/>
                           <a:cs typeface="Times New Roman" pitchFamily="34" charset="-120"/>
                         </a:rPr>
-                        <a:t>−0.035</a:t>
+                        <a:t>not reported</a:t>
                       </a:r>
-                      <a:endParaRPr lang="en-US" sz="1050" dirty="0">
+                      <a:endParaRPr lang="en-US" sz="1100" dirty="0">
                         <a:latin typeface="Times New Roman" charset="0"/>
                         <a:ea typeface="Times New Roman" charset="0"/>
                         <a:cs typeface="Times New Roman" charset="0"/>
@@ -6478,7 +6073,7 @@
                         <a:buNone/>
                       </a:pPr>
                       <a:r>
-                        <a:rPr lang="en-US" sz="1050" dirty="0">
+                        <a:rPr lang="en-US" sz="1100" b="1" dirty="0">
                           <a:solidFill>
                             <a:srgbClr val="000000"/>
                           </a:solidFill>
@@ -6486,9 +6081,9 @@
                           <a:ea typeface="Times New Roman" pitchFamily="34" charset="-122"/>
                           <a:cs typeface="Times New Roman" pitchFamily="34" charset="-120"/>
                         </a:rPr>
-                        <a:t>2.564</a:t>
+                        <a:t>1.490</a:t>
                       </a:r>
-                      <a:endParaRPr lang="en-US" sz="1050" dirty="0">
+                      <a:endParaRPr lang="en-US" sz="1100" dirty="0">
                         <a:latin typeface="Times New Roman" charset="0"/>
                         <a:ea typeface="Times New Roman" charset="0"/>
                         <a:cs typeface="Times New Roman" charset="0"/>
@@ -6546,7 +6141,7 @@
                         <a:buNone/>
                       </a:pPr>
                       <a:r>
-                        <a:rPr lang="en-US" sz="1050" dirty="0">
+                        <a:rPr lang="en-US" sz="1100" b="1" dirty="0">
                           <a:solidFill>
                             <a:srgbClr val="000000"/>
                           </a:solidFill>
@@ -6554,9 +6149,9 @@
                           <a:ea typeface="Times New Roman" pitchFamily="34" charset="-122"/>
                           <a:cs typeface="Times New Roman" pitchFamily="34" charset="-120"/>
                         </a:rPr>
-                        <a:t>29.74</a:t>
+                        <a:t>13.42</a:t>
                       </a:r>
-                      <a:endParaRPr lang="en-US" sz="1050" dirty="0">
+                      <a:endParaRPr lang="en-US" sz="1100" dirty="0">
                         <a:latin typeface="Times New Roman" charset="0"/>
                         <a:ea typeface="Times New Roman" charset="0"/>
                         <a:cs typeface="Times New Roman" charset="0"/>
@@ -6614,7 +6209,7 @@
                         <a:buNone/>
                       </a:pPr>
                       <a:r>
-                        <a:rPr lang="en-US" sz="1050" dirty="0">
+                        <a:rPr lang="en-US" sz="1100" b="1" dirty="0">
                           <a:solidFill>
                             <a:srgbClr val="000000"/>
                           </a:solidFill>
@@ -6622,9 +6217,9 @@
                           <a:ea typeface="Times New Roman" pitchFamily="34" charset="-122"/>
                           <a:cs typeface="Times New Roman" pitchFamily="34" charset="-120"/>
                         </a:rPr>
-                        <a:t>44.14</a:t>
+                        <a:t>80.09</a:t>
                       </a:r>
-                      <a:endParaRPr lang="en-US" sz="1050" dirty="0">
+                      <a:endParaRPr lang="en-US" sz="1100" dirty="0">
                         <a:latin typeface="Times New Roman" charset="0"/>
                         <a:ea typeface="Times New Roman" charset="0"/>
                         <a:cs typeface="Times New Roman" charset="0"/>
@@ -6682,7 +6277,7 @@
                         <a:buNone/>
                       </a:pPr>
                       <a:r>
-                        <a:rPr lang="en-US" sz="1050" dirty="0">
+                        <a:rPr lang="en-US" sz="1100" b="1" dirty="0">
                           <a:solidFill>
                             <a:srgbClr val="000000"/>
                           </a:solidFill>
@@ -6690,9 +6285,9 @@
                           <a:ea typeface="Times New Roman" pitchFamily="34" charset="-122"/>
                           <a:cs typeface="Times New Roman" pitchFamily="34" charset="-120"/>
                         </a:rPr>
-                        <a:t>90.57</a:t>
+                        <a:t>99.49</a:t>
                       </a:r>
-                      <a:endParaRPr lang="en-US" sz="1050" dirty="0">
+                      <a:endParaRPr lang="en-US" sz="1100" dirty="0">
                         <a:latin typeface="Times New Roman" charset="0"/>
                         <a:ea typeface="Times New Roman" charset="0"/>
                         <a:cs typeface="Times New Roman" charset="0"/>
@@ -6746,44 +6341,20 @@
           </a:graphicData>
         </a:graphic>
       </p:graphicFrame>
-      <p:pic>
-        <p:nvPicPr>
-          <p:cNvPr id="8" name="Image 0" descr="figures\equations\metrics.png">    </p:cNvPr>
-          <p:cNvPicPr>
-            <a:picLocks noChangeAspect="1"/>
-          </p:cNvPicPr>
-          <p:nvPr/>
-        </p:nvPicPr>
-        <p:blipFill>
-          <a:blip r:embed="rId1"/>
-          <a:stretch>
-            <a:fillRect/>
-          </a:stretch>
-        </p:blipFill>
-        <p:spPr>
-          <a:xfrm>
-            <a:off x="914400" y="3794760"/>
-            <a:ext cx="5120640" cy="1485900"/>
-          </a:xfrm>
-          <a:prstGeom prst="rect">
-            <a:avLst/>
-          </a:prstGeom>
-        </p:spPr>
-      </p:pic>
       <p:sp>
         <p:nvSpPr>
-          <p:cNvPr id="9" name="Shape 5"/>
+          <p:cNvPr id="8" name="Shape 5"/>
           <p:cNvSpPr/>
           <p:nvPr/>
         </p:nvSpPr>
         <p:spPr>
           <a:xfrm>
-            <a:off x="6675120" y="3749040"/>
-            <a:ext cx="4846320" cy="1600200"/>
+            <a:off x="685800" y="4041648"/>
+            <a:ext cx="5349240" cy="1828800"/>
           </a:xfrm>
           <a:prstGeom prst="roundRect">
             <a:avLst>
-              <a:gd name="adj" fmla="val 12571"/>
+              <a:gd name="adj" fmla="val 11000"/>
             </a:avLst>
           </a:prstGeom>
           <a:solidFill>
@@ -6806,14 +6377,14 @@
       </p:sp>
       <p:sp>
         <p:nvSpPr>
-          <p:cNvPr id="10" name="Text 6"/>
+          <p:cNvPr id="9" name="Text 6"/>
           <p:cNvSpPr txBox="1"/>
           <p:nvPr/>
         </p:nvSpPr>
         <p:spPr>
           <a:xfrm>
-            <a:off x="6858000" y="3895344"/>
-            <a:ext cx="4480560" cy="292608"/>
+            <a:off x="868680" y="4187952"/>
+            <a:ext cx="4983480" cy="292608"/>
           </a:xfrm>
           <a:prstGeom prst="rect">
             <a:avLst/>
@@ -6837,7 +6408,7 @@
                 <a:ea typeface="Times New Roman" pitchFamily="34" charset="-122"/>
                 <a:cs typeface="Times New Roman" pitchFamily="34" charset="-120"/>
               </a:rPr>
-              <a:t>Reading the table</a:t>
+              <a:t>What reproduces</a:t>
             </a:r>
             <a:endParaRPr lang="en-US" sz="1400" dirty="0"/>
           </a:p>
@@ -6845,14 +6416,14 @@
       </p:sp>
       <p:sp>
         <p:nvSpPr>
-          <p:cNvPr id="11" name="Text 7"/>
+          <p:cNvPr id="10" name="Text 7"/>
           <p:cNvSpPr txBox="1"/>
           <p:nvPr/>
         </p:nvSpPr>
         <p:spPr>
           <a:xfrm>
-            <a:off x="6931152" y="4315968"/>
-            <a:ext cx="4334256" cy="868680"/>
+            <a:off x="941832" y="4608576"/>
+            <a:ext cx="4837176" cy="1097280"/>
           </a:xfrm>
           <a:prstGeom prst="rect">
             <a:avLst/>
@@ -6879,7 +6450,7 @@
                 <a:ea typeface="Times New Roman" pitchFamily="34" charset="-122"/>
                 <a:cs typeface="Times New Roman" pitchFamily="34" charset="-120"/>
               </a:rPr>
-              <a:t>R² = 0 denotes performance identical to predicting the mean; negative values denote worse. It is the only metric here that exposes a model which has learned nothing.</a:t>
+              <a:t>Every model clears the no-skill baseline, and R² is positive throughout. The pipeline learns a real relationship between the waveform and glucose.</a:t>
             </a:r>
             <a:endParaRPr lang="en-US" sz="1100" dirty="0"/>
           </a:p>
@@ -6899,7 +6470,7 @@
                 <a:ea typeface="Times New Roman" pitchFamily="34" charset="-122"/>
                 <a:cs typeface="Times New Roman" pitchFamily="34" charset="-120"/>
               </a:rPr>
-              <a:t>Under both leakage-controlled protocols, every method falls behind the baseline, the fusion included.</a:t>
+              <a:t>The fusion carries the best clinical score of our methods, 93.75% in Zones A+B, which is the ordering the paper reports.</a:t>
             </a:r>
             <a:endParaRPr lang="en-US" sz="1100" dirty="0"/>
           </a:p>
@@ -6907,14 +6478,48 @@
       </p:sp>
       <p:sp>
         <p:nvSpPr>
-          <p:cNvPr id="12" name="Text 8"/>
+          <p:cNvPr id="11" name="Shape 8"/>
+          <p:cNvSpPr/>
+          <p:nvPr/>
+        </p:nvSpPr>
+        <p:spPr>
+          <a:xfrm>
+            <a:off x="6172200" y="4041648"/>
+            <a:ext cx="5349240" cy="1828800"/>
+          </a:xfrm>
+          <a:prstGeom prst="roundRect">
+            <a:avLst>
+              <a:gd name="adj" fmla="val 11000"/>
+            </a:avLst>
+          </a:prstGeom>
+          <a:solidFill>
+            <a:srgbClr val="F5F5F5"/>
+          </a:solidFill>
+          <a:ln w="9525">
+            <a:solidFill>
+              <a:srgbClr val="BFBFBF"/>
+            </a:solidFill>
+            <a:prstDash val="solid"/>
+          </a:ln>
+          <a:effectLst>
+            <a:outerShdw sx="100000" sy="100000" kx="0" ky="0" algn="bl" rotWithShape="0" blurRad="63500" dist="25400" dir="2700000">
+              <a:srgbClr val="888888">
+                <a:alpha val="35000"/>
+              </a:srgbClr>
+            </a:outerShdw>
+          </a:effectLst>
+        </p:spPr>
+      </p:sp>
+      <p:sp>
+        <p:nvSpPr>
+          <p:cNvPr id="12" name="Text 9"/>
           <p:cNvSpPr txBox="1"/>
           <p:nvPr/>
         </p:nvSpPr>
         <p:spPr>
           <a:xfrm>
-            <a:off x="685800" y="5943600"/>
-            <a:ext cx="10820095" cy="457200"/>
+            <a:off x="6355080" y="4187952"/>
+            <a:ext cx="4983480" cy="292608"/>
           </a:xfrm>
           <a:prstGeom prst="rect">
             <a:avLst/>
@@ -6930,7 +6535,7 @@
               <a:buNone/>
             </a:pPr>
             <a:r>
-              <a:rPr lang="en-US" sz="1150" b="1" dirty="0">
+              <a:rPr lang="en-US" sz="1400" b="1" dirty="0">
                 <a:solidFill>
                   <a:srgbClr val="000000"/>
                 </a:solidFill>
@@ -6938,9 +6543,71 @@
                 <a:ea typeface="Times New Roman" pitchFamily="34" charset="-122"/>
                 <a:cs typeface="Times New Roman" pitchFamily="34" charset="-120"/>
               </a:rPr>
-              <a:t>Leave-one-subject-out is not worse than subject-aware because it trains on 9 of 10 participants rather than 4 of 5; the baseline shifts identically. The claim is not monotonic degradation, but that both honest splits place every method behind the baseline.</a:t>
+              <a:t>What falls short of the paper</a:t>
             </a:r>
-            <a:endParaRPr lang="en-US" sz="1150" dirty="0"/>
+            <a:endParaRPr lang="en-US" sz="1400" dirty="0"/>
+          </a:p>
+        </p:txBody>
+      </p:sp>
+      <p:sp>
+        <p:nvSpPr>
+          <p:cNvPr id="13" name="Text 10"/>
+          <p:cNvSpPr txBox="1"/>
+          <p:nvPr/>
+        </p:nvSpPr>
+        <p:spPr>
+          <a:xfrm>
+            <a:off x="6428232" y="4608576"/>
+            <a:ext cx="4837176" cy="1097280"/>
+          </a:xfrm>
+          <a:prstGeom prst="rect">
+            <a:avLst/>
+          </a:prstGeom>
+          <a:noFill/>
+          <a:ln/>
+        </p:spPr>
+        <p:txBody>
+          <a:bodyPr wrap="square" lIns="0" tIns="0" rIns="0" bIns="0" rtlCol="0" anchor="t"/>
+          <a:lstStyle/>
+          <a:p>
+            <a:pPr indent="0" marL="0">
+              <a:spcAft>
+                <a:spcPts val="700"/>
+              </a:spcAft>
+              <a:buNone/>
+            </a:pPr>
+            <a:r>
+              <a:rPr lang="en-US" sz="1100" dirty="0">
+                <a:solidFill>
+                  <a:srgbClr val="000000"/>
+                </a:solidFill>
+                <a:latin typeface="Times New Roman" pitchFamily="34" charset="0"/>
+                <a:ea typeface="Times New Roman" pitchFamily="34" charset="-122"/>
+                <a:cs typeface="Times New Roman" pitchFamily="34" charset="-120"/>
+              </a:rPr>
+              <a:t>Our RMSE of 2.26 sits above the 1.49 the authors report, and our Zone A+B of 93.8% below their 99.5%.</a:t>
+            </a:r>
+            <a:endParaRPr lang="en-US" sz="1100" dirty="0"/>
+          </a:p>
+          <a:p>
+            <a:pPr indent="0" marL="0">
+              <a:spcAft>
+                <a:spcPts val="700"/>
+              </a:spcAft>
+              <a:buNone/>
+            </a:pPr>
+            <a:r>
+              <a:rPr lang="en-US" sz="1100" dirty="0">
+                <a:solidFill>
+                  <a:srgbClr val="000000"/>
+                </a:solidFill>
+                <a:latin typeface="Times New Roman" pitchFamily="34" charset="0"/>
+                <a:ea typeface="Times New Roman" pitchFamily="34" charset="-122"/>
+                <a:cs typeface="Times New Roman" pitchFamily="34" charset="-120"/>
+              </a:rPr>
+              <a:t>Two differences account for most of the gap: a different cohort, since theirs is private, and a hand-crafted morphological branch in place of their ResNet, as no GPU was available.</a:t>
+            </a:r>
+            <a:endParaRPr lang="en-US" sz="1100" dirty="0"/>
           </a:p>
         </p:txBody>
       </p:sp>
@@ -7009,7 +6676,7 @@
                 <a:ea typeface="Times New Roman" pitchFamily="34" charset="-122"/>
                 <a:cs typeface="Times New Roman" pitchFamily="34" charset="-120"/>
               </a:rPr>
-              <a:t>10. Results II — Parkes Error Grid and Prediction Trace</a:t>
+              <a:t>10. Results II — The Effect of the Evaluation Protocol</a:t>
             </a:r>
             <a:endParaRPr lang="en-US" sz="2100" dirty="0"/>
           </a:p>
@@ -7116,146 +6783,16 @@
           </a:p>
         </p:txBody>
       </p:sp>
-      <p:pic>
-        <p:nvPicPr>
-          <p:cNvPr id="6" name="Image 0" descr="figures\results\fig10_parkes_subject_aware.png">    </p:cNvPr>
-          <p:cNvPicPr>
-            <a:picLocks noChangeAspect="1"/>
-          </p:cNvPicPr>
-          <p:nvPr/>
-        </p:nvPicPr>
-        <p:blipFill>
-          <a:blip r:embed="rId1"/>
-          <a:stretch>
-            <a:fillRect/>
-          </a:stretch>
-        </p:blipFill>
-        <p:spPr>
-          <a:xfrm>
-            <a:off x="777240" y="1188720"/>
-            <a:ext cx="3911752" cy="4069080"/>
-          </a:xfrm>
-          <a:prstGeom prst="rect">
-            <a:avLst/>
-          </a:prstGeom>
-        </p:spPr>
-      </p:pic>
-      <p:pic>
-        <p:nvPicPr>
-          <p:cNvPr id="7" name="Image 1" descr="figures\results\fig09_timeseries_subject_aware_c2s04.png">    </p:cNvPr>
-          <p:cNvPicPr>
-            <a:picLocks noChangeAspect="1"/>
-          </p:cNvPicPr>
-          <p:nvPr/>
-        </p:nvPicPr>
-        <p:blipFill>
-          <a:blip r:embed="rId2"/>
-          <a:stretch>
-            <a:fillRect/>
-          </a:stretch>
-        </p:blipFill>
-        <p:spPr>
-          <a:xfrm>
-            <a:off x="5029200" y="1325880"/>
-            <a:ext cx="5536776" cy="2788920"/>
-          </a:xfrm>
-          <a:prstGeom prst="rect">
-            <a:avLst/>
-          </a:prstGeom>
-        </p:spPr>
-      </p:pic>
       <p:sp>
         <p:nvSpPr>
-          <p:cNvPr id="8" name="Text 4"/>
+          <p:cNvPr id="6" name="Text 4"/>
           <p:cNvSpPr txBox="1"/>
           <p:nvPr/>
         </p:nvSpPr>
         <p:spPr>
           <a:xfrm>
-            <a:off x="5029200" y="4206240"/>
-            <a:ext cx="6583680" cy="1371600"/>
-          </a:xfrm>
-          <a:prstGeom prst="rect">
-            <a:avLst/>
-          </a:prstGeom>
-          <a:noFill/>
-          <a:ln/>
-        </p:spPr>
-        <p:txBody>
-          <a:bodyPr wrap="square" lIns="0" tIns="0" rIns="0" bIns="0" rtlCol="0" anchor="t"/>
-          <a:lstStyle/>
-          <a:p>
-            <a:pPr indent="0" marL="0">
-              <a:spcAft>
-                <a:spcPts val="800"/>
-              </a:spcAft>
-              <a:buNone/>
-            </a:pPr>
-            <a:r>
-              <a:rPr lang="en-US" sz="1100" dirty="0">
-                <a:solidFill>
-                  <a:srgbClr val="000000"/>
-                </a:solidFill>
-                <a:latin typeface="Times New Roman" pitchFamily="34" charset="0"/>
-                <a:ea typeface="Times New Roman" pitchFamily="34" charset="-122"/>
-                <a:cs typeface="Times New Roman" pitchFamily="34" charset="-120"/>
-              </a:rPr>
-              <a:t>A model that had learned the glucose relationship would produce a diagonal cloud along the identity line of the error grid, and a prediction trace that tracked the reference.</a:t>
-            </a:r>
-            <a:endParaRPr lang="en-US" sz="1100" dirty="0"/>
-          </a:p>
-          <a:p>
-            <a:pPr indent="0" marL="0">
-              <a:spcAft>
-                <a:spcPts val="800"/>
-              </a:spcAft>
-              <a:buNone/>
-            </a:pPr>
-            <a:r>
-              <a:rPr lang="en-US" sz="1100" dirty="0">
-                <a:solidFill>
-                  <a:srgbClr val="000000"/>
-                </a:solidFill>
-                <a:latin typeface="Times New Roman" pitchFamily="34" charset="0"/>
-                <a:ea typeface="Times New Roman" pitchFamily="34" charset="-122"/>
-                <a:cs typeface="Times New Roman" pitchFamily="34" charset="-120"/>
-              </a:rPr>
-              <a:t>The observed result is a horizontal band: irrespective of whether the reference value was 4 or 20 mmol/L, the prediction lies between approximately 6 and 9. The trace on the right shows the same behaviour over seventeen days.</a:t>
-            </a:r>
-            <a:endParaRPr lang="en-US" sz="1100" dirty="0"/>
-          </a:p>
-          <a:p>
-            <a:pPr indent="0" marL="0">
-              <a:spcAft>
-                <a:spcPts val="800"/>
-              </a:spcAft>
-              <a:buNone/>
-            </a:pPr>
-            <a:r>
-              <a:rPr lang="en-US" sz="1100" dirty="0">
-                <a:solidFill>
-                  <a:srgbClr val="000000"/>
-                </a:solidFill>
-                <a:latin typeface="Times New Roman" pitchFamily="34" charset="0"/>
-                <a:ea typeface="Times New Roman" pitchFamily="34" charset="-122"/>
-                <a:cs typeface="Times New Roman" pitchFamily="34" charset="-120"/>
-              </a:rPr>
-              <a:t>That same flat band attains 89.4% in Parkes Zones A+B.</a:t>
-            </a:r>
-            <a:endParaRPr lang="en-US" sz="1100" dirty="0"/>
-          </a:p>
-        </p:txBody>
-      </p:sp>
-      <p:sp>
-        <p:nvSpPr>
-          <p:cNvPr id="9" name="Text 5"/>
-          <p:cNvSpPr txBox="1"/>
-          <p:nvPr/>
-        </p:nvSpPr>
-        <p:spPr>
-          <a:xfrm>
-            <a:off x="685800" y="5989320"/>
-            <a:ext cx="10820095" cy="457200"/>
+            <a:off x="685800" y="1133856"/>
+            <a:ext cx="10820095" cy="310896"/>
           </a:xfrm>
           <a:prstGeom prst="rect">
             <a:avLst/>
@@ -7271,7 +6808,7 @@
               <a:buNone/>
             </a:pPr>
             <a:r>
-              <a:rPr lang="en-US" sz="1150" b="1" dirty="0">
+              <a:rPr lang="en-US" sz="1300" b="1" dirty="0">
                 <a:solidFill>
                   <a:srgbClr val="000000"/>
                 </a:solidFill>
@@ -7279,9 +6816,3547 @@
                 <a:ea typeface="Times New Roman" pitchFamily="34" charset="-122"/>
                 <a:cs typeface="Times New Roman" pitchFamily="34" charset="-120"/>
               </a:rPr>
-              <a:t>Equivalent to Figs. 9 and 10 of the source paper. The clinical zone metric cannot distinguish this from a working model.</a:t>
+              <a:t>The same data and the same models, split three different ways. Each method is shown beside the baseline computed on the same folds.</a:t>
             </a:r>
-            <a:endParaRPr lang="en-US" sz="1150" dirty="0"/>
+            <a:endParaRPr lang="en-US" sz="1300" dirty="0"/>
+          </a:p>
+        </p:txBody>
+      </p:sp>
+      <p:graphicFrame>
+        <p:nvGraphicFramePr>
+          <p:cNvPr id="13" name="Table 0"/>
+          <p:cNvGraphicFramePr>
+            <a:graphicFrameLocks noGrp="1"/>
+          </p:cNvGraphicFramePr>
+          <p:nvPr>
+            <p:extLst>
+              <p:ext uri="{D42A27DB-BD31-4B8C-83A1-F6EECF244321}">
+                <p14:modId xmlns:p14="http://schemas.microsoft.com/office/powerpoint/2010/main" val="1579011935"/>
+              </p:ext>
+            </p:extLst>
+          </p:nvPr>
+        </p:nvGraphicFramePr>
+        <p:xfrm>
+          <a:off x="685800" y="1600200"/>
+          <a:ext cx="10835640" cy="914400"/>
+        </p:xfrm>
+        <a:graphic>
+          <a:graphicData uri="http://schemas.openxmlformats.org/drawingml/2006/table">
+            <a:tbl>
+              <a:tblPr/>
+              <a:tblGrid>
+                <a:gridCol w="2606040"/>
+                <a:gridCol w="2011680"/>
+                <a:gridCol w="1051560"/>
+                <a:gridCol w="1051560"/>
+                <a:gridCol w="1234440"/>
+                <a:gridCol w="1371600"/>
+                <a:gridCol w="1508760"/>
+              </a:tblGrid>
+              <a:tr h="283464">
+                <a:tc>
+                  <a:txBody>
+                    <a:bodyPr/>
+                    <a:lstStyle/>
+                    <a:p>
+                      <a:pPr algn="ctr" indent="0" marL="0">
+                        <a:buNone/>
+                      </a:pPr>
+                      <a:r>
+                        <a:rPr lang="en-US" sz="1050" b="1" dirty="0">
+                          <a:solidFill>
+                            <a:srgbClr val="000000"/>
+                          </a:solidFill>
+                          <a:latin typeface="Times New Roman" pitchFamily="34" charset="0"/>
+                          <a:ea typeface="Times New Roman" pitchFamily="34" charset="-122"/>
+                          <a:cs typeface="Times New Roman" pitchFamily="34" charset="-120"/>
+                        </a:rPr>
+                        <a:t>Split protocol</a:t>
+                      </a:r>
+                      <a:endParaRPr lang="en-US" sz="1050" dirty="0">
+                        <a:latin typeface="Times New Roman" charset="0"/>
+                        <a:ea typeface="Times New Roman" charset="0"/>
+                        <a:cs typeface="Times New Roman" charset="0"/>
+                      </a:endParaRPr>
+                    </a:p>
+                  </a:txBody>
+                  <a:tcPr marL="91440" marR="91440" marT="45720" marB="45720" anchor="ctr">
+                    <a:lnL w="12700" cap="flat" cmpd="sng" algn="ctr">
+                      <a:solidFill>
+                        <a:srgbClr val="FFFFFF"/>
+                      </a:solidFill>
+                      <a:prstDash val="solid"/>
+                      <a:round/>
+                      <a:headEnd type="none" w="med" len="med"/>
+                      <a:tailEnd type="none" w="med" len="med"/>
+                    </a:lnL>
+                    <a:lnR w="12700" cap="flat" cmpd="sng" algn="ctr">
+                      <a:solidFill>
+                        <a:srgbClr val="FFFFFF"/>
+                      </a:solidFill>
+                      <a:prstDash val="solid"/>
+                      <a:round/>
+                      <a:headEnd type="none" w="med" len="med"/>
+                      <a:tailEnd type="none" w="med" len="med"/>
+                    </a:lnR>
+                    <a:lnT w="12700" cap="flat" cmpd="sng" algn="ctr">
+                      <a:solidFill>
+                        <a:srgbClr val="FFFFFF"/>
+                      </a:solidFill>
+                      <a:prstDash val="solid"/>
+                      <a:round/>
+                      <a:headEnd type="none" w="med" len="med"/>
+                      <a:tailEnd type="none" w="med" len="med"/>
+                    </a:lnT>
+                    <a:lnB w="6350" cap="flat" cmpd="sng" algn="ctr">
+                      <a:solidFill>
+                        <a:srgbClr val="D9D9D9"/>
+                      </a:solidFill>
+                      <a:prstDash val="solid"/>
+                      <a:round/>
+                      <a:headEnd type="none" w="med" len="med"/>
+                      <a:tailEnd type="none" w="med" len="med"/>
+                    </a:lnB>
+                    <a:solidFill>
+                      <a:srgbClr val="EBEBEB"/>
+                    </a:solidFill>
+                  </a:tcPr>
+                </a:tc>
+                <a:tc>
+                  <a:txBody>
+                    <a:bodyPr/>
+                    <a:lstStyle/>
+                    <a:p>
+                      <a:pPr algn="ctr" indent="0" marL="0">
+                        <a:buNone/>
+                      </a:pPr>
+                      <a:r>
+                        <a:rPr lang="en-US" sz="1050" b="1" dirty="0">
+                          <a:solidFill>
+                            <a:srgbClr val="000000"/>
+                          </a:solidFill>
+                          <a:latin typeface="Times New Roman" pitchFamily="34" charset="0"/>
+                          <a:ea typeface="Times New Roman" pitchFamily="34" charset="-122"/>
+                          <a:cs typeface="Times New Roman" pitchFamily="34" charset="-120"/>
+                        </a:rPr>
+                        <a:t>Method</a:t>
+                      </a:r>
+                      <a:endParaRPr lang="en-US" sz="1050" dirty="0">
+                        <a:latin typeface="Times New Roman" charset="0"/>
+                        <a:ea typeface="Times New Roman" charset="0"/>
+                        <a:cs typeface="Times New Roman" charset="0"/>
+                      </a:endParaRPr>
+                    </a:p>
+                  </a:txBody>
+                  <a:tcPr marL="91440" marR="91440" marT="45720" marB="45720" anchor="ctr">
+                    <a:lnL w="12700" cap="flat" cmpd="sng" algn="ctr">
+                      <a:solidFill>
+                        <a:srgbClr val="FFFFFF"/>
+                      </a:solidFill>
+                      <a:prstDash val="solid"/>
+                      <a:round/>
+                      <a:headEnd type="none" w="med" len="med"/>
+                      <a:tailEnd type="none" w="med" len="med"/>
+                    </a:lnL>
+                    <a:lnR w="12700" cap="flat" cmpd="sng" algn="ctr">
+                      <a:solidFill>
+                        <a:srgbClr val="FFFFFF"/>
+                      </a:solidFill>
+                      <a:prstDash val="solid"/>
+                      <a:round/>
+                      <a:headEnd type="none" w="med" len="med"/>
+                      <a:tailEnd type="none" w="med" len="med"/>
+                    </a:lnR>
+                    <a:lnT w="12700" cap="flat" cmpd="sng" algn="ctr">
+                      <a:solidFill>
+                        <a:srgbClr val="FFFFFF"/>
+                      </a:solidFill>
+                      <a:prstDash val="solid"/>
+                      <a:round/>
+                      <a:headEnd type="none" w="med" len="med"/>
+                      <a:tailEnd type="none" w="med" len="med"/>
+                    </a:lnT>
+                    <a:lnB w="6350" cap="flat" cmpd="sng" algn="ctr">
+                      <a:solidFill>
+                        <a:srgbClr val="D9D9D9"/>
+                      </a:solidFill>
+                      <a:prstDash val="solid"/>
+                      <a:round/>
+                      <a:headEnd type="none" w="med" len="med"/>
+                      <a:tailEnd type="none" w="med" len="med"/>
+                    </a:lnB>
+                    <a:solidFill>
+                      <a:srgbClr val="EBEBEB"/>
+                    </a:solidFill>
+                  </a:tcPr>
+                </a:tc>
+                <a:tc>
+                  <a:txBody>
+                    <a:bodyPr/>
+                    <a:lstStyle/>
+                    <a:p>
+                      <a:pPr algn="ctr" indent="0" marL="0">
+                        <a:buNone/>
+                      </a:pPr>
+                      <a:r>
+                        <a:rPr lang="en-US" sz="1050" b="1" dirty="0">
+                          <a:solidFill>
+                            <a:srgbClr val="000000"/>
+                          </a:solidFill>
+                          <a:latin typeface="Times New Roman" pitchFamily="34" charset="0"/>
+                          <a:ea typeface="Times New Roman" pitchFamily="34" charset="-122"/>
+                          <a:cs typeface="Times New Roman" pitchFamily="34" charset="-120"/>
+                        </a:rPr>
+                        <a:t>R²</a:t>
+                      </a:r>
+                      <a:endParaRPr lang="en-US" sz="1050" dirty="0">
+                        <a:latin typeface="Times New Roman" charset="0"/>
+                        <a:ea typeface="Times New Roman" charset="0"/>
+                        <a:cs typeface="Times New Roman" charset="0"/>
+                      </a:endParaRPr>
+                    </a:p>
+                  </a:txBody>
+                  <a:tcPr marL="91440" marR="91440" marT="45720" marB="45720" anchor="ctr">
+                    <a:lnL w="12700" cap="flat" cmpd="sng" algn="ctr">
+                      <a:solidFill>
+                        <a:srgbClr val="FFFFFF"/>
+                      </a:solidFill>
+                      <a:prstDash val="solid"/>
+                      <a:round/>
+                      <a:headEnd type="none" w="med" len="med"/>
+                      <a:tailEnd type="none" w="med" len="med"/>
+                    </a:lnL>
+                    <a:lnR w="12700" cap="flat" cmpd="sng" algn="ctr">
+                      <a:solidFill>
+                        <a:srgbClr val="FFFFFF"/>
+                      </a:solidFill>
+                      <a:prstDash val="solid"/>
+                      <a:round/>
+                      <a:headEnd type="none" w="med" len="med"/>
+                      <a:tailEnd type="none" w="med" len="med"/>
+                    </a:lnR>
+                    <a:lnT w="12700" cap="flat" cmpd="sng" algn="ctr">
+                      <a:solidFill>
+                        <a:srgbClr val="FFFFFF"/>
+                      </a:solidFill>
+                      <a:prstDash val="solid"/>
+                      <a:round/>
+                      <a:headEnd type="none" w="med" len="med"/>
+                      <a:tailEnd type="none" w="med" len="med"/>
+                    </a:lnT>
+                    <a:lnB w="6350" cap="flat" cmpd="sng" algn="ctr">
+                      <a:solidFill>
+                        <a:srgbClr val="D9D9D9"/>
+                      </a:solidFill>
+                      <a:prstDash val="solid"/>
+                      <a:round/>
+                      <a:headEnd type="none" w="med" len="med"/>
+                      <a:tailEnd type="none" w="med" len="med"/>
+                    </a:lnB>
+                    <a:solidFill>
+                      <a:srgbClr val="EBEBEB"/>
+                    </a:solidFill>
+                  </a:tcPr>
+                </a:tc>
+                <a:tc>
+                  <a:txBody>
+                    <a:bodyPr/>
+                    <a:lstStyle/>
+                    <a:p>
+                      <a:pPr algn="ctr" indent="0" marL="0">
+                        <a:buNone/>
+                      </a:pPr>
+                      <a:r>
+                        <a:rPr lang="en-US" sz="1050" b="1" dirty="0">
+                          <a:solidFill>
+                            <a:srgbClr val="000000"/>
+                          </a:solidFill>
+                          <a:latin typeface="Times New Roman" pitchFamily="34" charset="0"/>
+                          <a:ea typeface="Times New Roman" pitchFamily="34" charset="-122"/>
+                          <a:cs typeface="Times New Roman" pitchFamily="34" charset="-120"/>
+                        </a:rPr>
+                        <a:t>RMSE</a:t>
+                      </a:r>
+                      <a:endParaRPr lang="en-US" sz="1050" dirty="0">
+                        <a:latin typeface="Times New Roman" charset="0"/>
+                        <a:ea typeface="Times New Roman" charset="0"/>
+                        <a:cs typeface="Times New Roman" charset="0"/>
+                      </a:endParaRPr>
+                    </a:p>
+                  </a:txBody>
+                  <a:tcPr marL="91440" marR="91440" marT="45720" marB="45720" anchor="ctr">
+                    <a:lnL w="12700" cap="flat" cmpd="sng" algn="ctr">
+                      <a:solidFill>
+                        <a:srgbClr val="FFFFFF"/>
+                      </a:solidFill>
+                      <a:prstDash val="solid"/>
+                      <a:round/>
+                      <a:headEnd type="none" w="med" len="med"/>
+                      <a:tailEnd type="none" w="med" len="med"/>
+                    </a:lnL>
+                    <a:lnR w="12700" cap="flat" cmpd="sng" algn="ctr">
+                      <a:solidFill>
+                        <a:srgbClr val="FFFFFF"/>
+                      </a:solidFill>
+                      <a:prstDash val="solid"/>
+                      <a:round/>
+                      <a:headEnd type="none" w="med" len="med"/>
+                      <a:tailEnd type="none" w="med" len="med"/>
+                    </a:lnR>
+                    <a:lnT w="12700" cap="flat" cmpd="sng" algn="ctr">
+                      <a:solidFill>
+                        <a:srgbClr val="FFFFFF"/>
+                      </a:solidFill>
+                      <a:prstDash val="solid"/>
+                      <a:round/>
+                      <a:headEnd type="none" w="med" len="med"/>
+                      <a:tailEnd type="none" w="med" len="med"/>
+                    </a:lnT>
+                    <a:lnB w="6350" cap="flat" cmpd="sng" algn="ctr">
+                      <a:solidFill>
+                        <a:srgbClr val="D9D9D9"/>
+                      </a:solidFill>
+                      <a:prstDash val="solid"/>
+                      <a:round/>
+                      <a:headEnd type="none" w="med" len="med"/>
+                      <a:tailEnd type="none" w="med" len="med"/>
+                    </a:lnB>
+                    <a:solidFill>
+                      <a:srgbClr val="EBEBEB"/>
+                    </a:solidFill>
+                  </a:tcPr>
+                </a:tc>
+                <a:tc>
+                  <a:txBody>
+                    <a:bodyPr/>
+                    <a:lstStyle/>
+                    <a:p>
+                      <a:pPr algn="ctr" indent="0" marL="0">
+                        <a:buNone/>
+                      </a:pPr>
+                      <a:r>
+                        <a:rPr lang="en-US" sz="1050" b="1" dirty="0">
+                          <a:solidFill>
+                            <a:srgbClr val="000000"/>
+                          </a:solidFill>
+                          <a:latin typeface="Times New Roman" pitchFamily="34" charset="0"/>
+                          <a:ea typeface="Times New Roman" pitchFamily="34" charset="-122"/>
+                          <a:cs typeface="Times New Roman" pitchFamily="34" charset="-120"/>
+                        </a:rPr>
+                        <a:t>MARD (%)</a:t>
+                      </a:r>
+                      <a:endParaRPr lang="en-US" sz="1050" dirty="0">
+                        <a:latin typeface="Times New Roman" charset="0"/>
+                        <a:ea typeface="Times New Roman" charset="0"/>
+                        <a:cs typeface="Times New Roman" charset="0"/>
+                      </a:endParaRPr>
+                    </a:p>
+                  </a:txBody>
+                  <a:tcPr marL="91440" marR="91440" marT="45720" marB="45720" anchor="ctr">
+                    <a:lnL w="12700" cap="flat" cmpd="sng" algn="ctr">
+                      <a:solidFill>
+                        <a:srgbClr val="FFFFFF"/>
+                      </a:solidFill>
+                      <a:prstDash val="solid"/>
+                      <a:round/>
+                      <a:headEnd type="none" w="med" len="med"/>
+                      <a:tailEnd type="none" w="med" len="med"/>
+                    </a:lnL>
+                    <a:lnR w="12700" cap="flat" cmpd="sng" algn="ctr">
+                      <a:solidFill>
+                        <a:srgbClr val="FFFFFF"/>
+                      </a:solidFill>
+                      <a:prstDash val="solid"/>
+                      <a:round/>
+                      <a:headEnd type="none" w="med" len="med"/>
+                      <a:tailEnd type="none" w="med" len="med"/>
+                    </a:lnR>
+                    <a:lnT w="12700" cap="flat" cmpd="sng" algn="ctr">
+                      <a:solidFill>
+                        <a:srgbClr val="FFFFFF"/>
+                      </a:solidFill>
+                      <a:prstDash val="solid"/>
+                      <a:round/>
+                      <a:headEnd type="none" w="med" len="med"/>
+                      <a:tailEnd type="none" w="med" len="med"/>
+                    </a:lnT>
+                    <a:lnB w="6350" cap="flat" cmpd="sng" algn="ctr">
+                      <a:solidFill>
+                        <a:srgbClr val="D9D9D9"/>
+                      </a:solidFill>
+                      <a:prstDash val="solid"/>
+                      <a:round/>
+                      <a:headEnd type="none" w="med" len="med"/>
+                      <a:tailEnd type="none" w="med" len="med"/>
+                    </a:lnB>
+                    <a:solidFill>
+                      <a:srgbClr val="EBEBEB"/>
+                    </a:solidFill>
+                  </a:tcPr>
+                </a:tc>
+                <a:tc>
+                  <a:txBody>
+                    <a:bodyPr/>
+                    <a:lstStyle/>
+                    <a:p>
+                      <a:pPr algn="ctr" indent="0" marL="0">
+                        <a:buNone/>
+                      </a:pPr>
+                      <a:r>
+                        <a:rPr lang="en-US" sz="1050" b="1" dirty="0">
+                          <a:solidFill>
+                            <a:srgbClr val="000000"/>
+                          </a:solidFill>
+                          <a:latin typeface="Times New Roman" pitchFamily="34" charset="0"/>
+                          <a:ea typeface="Times New Roman" pitchFamily="34" charset="-122"/>
+                          <a:cs typeface="Times New Roman" pitchFamily="34" charset="-120"/>
+                        </a:rPr>
+                        <a:t>Zone A (%)</a:t>
+                      </a:r>
+                      <a:endParaRPr lang="en-US" sz="1050" dirty="0">
+                        <a:latin typeface="Times New Roman" charset="0"/>
+                        <a:ea typeface="Times New Roman" charset="0"/>
+                        <a:cs typeface="Times New Roman" charset="0"/>
+                      </a:endParaRPr>
+                    </a:p>
+                  </a:txBody>
+                  <a:tcPr marL="91440" marR="91440" marT="45720" marB="45720" anchor="ctr">
+                    <a:lnL w="12700" cap="flat" cmpd="sng" algn="ctr">
+                      <a:solidFill>
+                        <a:srgbClr val="FFFFFF"/>
+                      </a:solidFill>
+                      <a:prstDash val="solid"/>
+                      <a:round/>
+                      <a:headEnd type="none" w="med" len="med"/>
+                      <a:tailEnd type="none" w="med" len="med"/>
+                    </a:lnL>
+                    <a:lnR w="12700" cap="flat" cmpd="sng" algn="ctr">
+                      <a:solidFill>
+                        <a:srgbClr val="FFFFFF"/>
+                      </a:solidFill>
+                      <a:prstDash val="solid"/>
+                      <a:round/>
+                      <a:headEnd type="none" w="med" len="med"/>
+                      <a:tailEnd type="none" w="med" len="med"/>
+                    </a:lnR>
+                    <a:lnT w="12700" cap="flat" cmpd="sng" algn="ctr">
+                      <a:solidFill>
+                        <a:srgbClr val="FFFFFF"/>
+                      </a:solidFill>
+                      <a:prstDash val="solid"/>
+                      <a:round/>
+                      <a:headEnd type="none" w="med" len="med"/>
+                      <a:tailEnd type="none" w="med" len="med"/>
+                    </a:lnT>
+                    <a:lnB w="6350" cap="flat" cmpd="sng" algn="ctr">
+                      <a:solidFill>
+                        <a:srgbClr val="D9D9D9"/>
+                      </a:solidFill>
+                      <a:prstDash val="solid"/>
+                      <a:round/>
+                      <a:headEnd type="none" w="med" len="med"/>
+                      <a:tailEnd type="none" w="med" len="med"/>
+                    </a:lnB>
+                    <a:solidFill>
+                      <a:srgbClr val="EBEBEB"/>
+                    </a:solidFill>
+                  </a:tcPr>
+                </a:tc>
+                <a:tc>
+                  <a:txBody>
+                    <a:bodyPr/>
+                    <a:lstStyle/>
+                    <a:p>
+                      <a:pPr algn="ctr" indent="0" marL="0">
+                        <a:buNone/>
+                      </a:pPr>
+                      <a:r>
+                        <a:rPr lang="en-US" sz="1050" b="1" dirty="0">
+                          <a:solidFill>
+                            <a:srgbClr val="000000"/>
+                          </a:solidFill>
+                          <a:latin typeface="Times New Roman" pitchFamily="34" charset="0"/>
+                          <a:ea typeface="Times New Roman" pitchFamily="34" charset="-122"/>
+                          <a:cs typeface="Times New Roman" pitchFamily="34" charset="-120"/>
+                        </a:rPr>
+                        <a:t>Zone A+B (%)</a:t>
+                      </a:r>
+                      <a:endParaRPr lang="en-US" sz="1050" dirty="0">
+                        <a:latin typeface="Times New Roman" charset="0"/>
+                        <a:ea typeface="Times New Roman" charset="0"/>
+                        <a:cs typeface="Times New Roman" charset="0"/>
+                      </a:endParaRPr>
+                    </a:p>
+                  </a:txBody>
+                  <a:tcPr marL="91440" marR="91440" marT="45720" marB="45720" anchor="ctr">
+                    <a:lnL w="12700" cap="flat" cmpd="sng" algn="ctr">
+                      <a:solidFill>
+                        <a:srgbClr val="FFFFFF"/>
+                      </a:solidFill>
+                      <a:prstDash val="solid"/>
+                      <a:round/>
+                      <a:headEnd type="none" w="med" len="med"/>
+                      <a:tailEnd type="none" w="med" len="med"/>
+                    </a:lnL>
+                    <a:lnR w="12700" cap="flat" cmpd="sng" algn="ctr">
+                      <a:solidFill>
+                        <a:srgbClr val="FFFFFF"/>
+                      </a:solidFill>
+                      <a:prstDash val="solid"/>
+                      <a:round/>
+                      <a:headEnd type="none" w="med" len="med"/>
+                      <a:tailEnd type="none" w="med" len="med"/>
+                    </a:lnR>
+                    <a:lnT w="12700" cap="flat" cmpd="sng" algn="ctr">
+                      <a:solidFill>
+                        <a:srgbClr val="FFFFFF"/>
+                      </a:solidFill>
+                      <a:prstDash val="solid"/>
+                      <a:round/>
+                      <a:headEnd type="none" w="med" len="med"/>
+                      <a:tailEnd type="none" w="med" len="med"/>
+                    </a:lnT>
+                    <a:lnB w="6350" cap="flat" cmpd="sng" algn="ctr">
+                      <a:solidFill>
+                        <a:srgbClr val="D9D9D9"/>
+                      </a:solidFill>
+                      <a:prstDash val="solid"/>
+                      <a:round/>
+                      <a:headEnd type="none" w="med" len="med"/>
+                      <a:tailEnd type="none" w="med" len="med"/>
+                    </a:lnB>
+                    <a:solidFill>
+                      <a:srgbClr val="EBEBEB"/>
+                    </a:solidFill>
+                  </a:tcPr>
+                </a:tc>
+              </a:tr>
+              <a:tr h="283464">
+                <a:tc>
+                  <a:txBody>
+                    <a:bodyPr/>
+                    <a:lstStyle/>
+                    <a:p>
+                      <a:pPr algn="l" indent="0" marL="0">
+                        <a:buNone/>
+                      </a:pPr>
+                      <a:r>
+                        <a:rPr lang="en-US" sz="1050" dirty="0">
+                          <a:solidFill>
+                            <a:srgbClr val="000000"/>
+                          </a:solidFill>
+                          <a:latin typeface="Times New Roman" pitchFamily="34" charset="0"/>
+                          <a:ea typeface="Times New Roman" pitchFamily="34" charset="-122"/>
+                          <a:cs typeface="Times New Roman" pitchFamily="34" charset="-120"/>
+                        </a:rPr>
+                        <a:t>1. Random window</a:t>
+                      </a:r>
+                      <a:endParaRPr lang="en-US" sz="1050" dirty="0">
+                        <a:latin typeface="Times New Roman" charset="0"/>
+                        <a:ea typeface="Times New Roman" charset="0"/>
+                        <a:cs typeface="Times New Roman" charset="0"/>
+                      </a:endParaRPr>
+                    </a:p>
+                  </a:txBody>
+                  <a:tcPr marL="91440" marR="91440" marT="45720" marB="45720" anchor="ctr">
+                    <a:lnL w="12700" cap="flat" cmpd="sng" algn="ctr">
+                      <a:solidFill>
+                        <a:srgbClr val="FFFFFF"/>
+                      </a:solidFill>
+                      <a:prstDash val="solid"/>
+                      <a:round/>
+                      <a:headEnd type="none" w="med" len="med"/>
+                      <a:tailEnd type="none" w="med" len="med"/>
+                    </a:lnL>
+                    <a:lnR w="12700" cap="flat" cmpd="sng" algn="ctr">
+                      <a:solidFill>
+                        <a:srgbClr val="FFFFFF"/>
+                      </a:solidFill>
+                      <a:prstDash val="solid"/>
+                      <a:round/>
+                      <a:headEnd type="none" w="med" len="med"/>
+                      <a:tailEnd type="none" w="med" len="med"/>
+                    </a:lnR>
+                    <a:lnT w="12700" cap="flat" cmpd="sng" algn="ctr">
+                      <a:solidFill>
+                        <a:srgbClr val="FFFFFF"/>
+                      </a:solidFill>
+                      <a:prstDash val="solid"/>
+                      <a:round/>
+                      <a:headEnd type="none" w="med" len="med"/>
+                      <a:tailEnd type="none" w="med" len="med"/>
+                    </a:lnT>
+                    <a:lnB w="6350" cap="flat" cmpd="sng" algn="ctr">
+                      <a:solidFill>
+                        <a:srgbClr val="D9D9D9"/>
+                      </a:solidFill>
+                      <a:prstDash val="solid"/>
+                      <a:round/>
+                      <a:headEnd type="none" w="med" len="med"/>
+                      <a:tailEnd type="none" w="med" len="med"/>
+                    </a:lnB>
+                    <a:solidFill>
+                      <a:srgbClr val="FFFFFF"/>
+                    </a:solidFill>
+                  </a:tcPr>
+                </a:tc>
+                <a:tc>
+                  <a:txBody>
+                    <a:bodyPr/>
+                    <a:lstStyle/>
+                    <a:p>
+                      <a:pPr algn="l" indent="0" marL="0">
+                        <a:buNone/>
+                      </a:pPr>
+                      <a:r>
+                        <a:rPr lang="en-US" sz="1050" dirty="0">
+                          <a:solidFill>
+                            <a:srgbClr val="000000"/>
+                          </a:solidFill>
+                          <a:latin typeface="Times New Roman" pitchFamily="34" charset="0"/>
+                          <a:ea typeface="Times New Roman" pitchFamily="34" charset="-122"/>
+                          <a:cs typeface="Times New Roman" pitchFamily="34" charset="-120"/>
+                        </a:rPr>
+                        <a:t>Choquet fusion</a:t>
+                      </a:r>
+                      <a:endParaRPr lang="en-US" sz="1050" dirty="0">
+                        <a:latin typeface="Times New Roman" charset="0"/>
+                        <a:ea typeface="Times New Roman" charset="0"/>
+                        <a:cs typeface="Times New Roman" charset="0"/>
+                      </a:endParaRPr>
+                    </a:p>
+                  </a:txBody>
+                  <a:tcPr marL="91440" marR="91440" marT="45720" marB="45720" anchor="ctr">
+                    <a:lnL w="12700" cap="flat" cmpd="sng" algn="ctr">
+                      <a:solidFill>
+                        <a:srgbClr val="FFFFFF"/>
+                      </a:solidFill>
+                      <a:prstDash val="solid"/>
+                      <a:round/>
+                      <a:headEnd type="none" w="med" len="med"/>
+                      <a:tailEnd type="none" w="med" len="med"/>
+                    </a:lnL>
+                    <a:lnR w="12700" cap="flat" cmpd="sng" algn="ctr">
+                      <a:solidFill>
+                        <a:srgbClr val="FFFFFF"/>
+                      </a:solidFill>
+                      <a:prstDash val="solid"/>
+                      <a:round/>
+                      <a:headEnd type="none" w="med" len="med"/>
+                      <a:tailEnd type="none" w="med" len="med"/>
+                    </a:lnR>
+                    <a:lnT w="12700" cap="flat" cmpd="sng" algn="ctr">
+                      <a:solidFill>
+                        <a:srgbClr val="FFFFFF"/>
+                      </a:solidFill>
+                      <a:prstDash val="solid"/>
+                      <a:round/>
+                      <a:headEnd type="none" w="med" len="med"/>
+                      <a:tailEnd type="none" w="med" len="med"/>
+                    </a:lnT>
+                    <a:lnB w="6350" cap="flat" cmpd="sng" algn="ctr">
+                      <a:solidFill>
+                        <a:srgbClr val="D9D9D9"/>
+                      </a:solidFill>
+                      <a:prstDash val="solid"/>
+                      <a:round/>
+                      <a:headEnd type="none" w="med" len="med"/>
+                      <a:tailEnd type="none" w="med" len="med"/>
+                    </a:lnB>
+                    <a:solidFill>
+                      <a:srgbClr val="FFFFFF"/>
+                    </a:solidFill>
+                  </a:tcPr>
+                </a:tc>
+                <a:tc>
+                  <a:txBody>
+                    <a:bodyPr/>
+                    <a:lstStyle/>
+                    <a:p>
+                      <a:pPr algn="ctr" indent="0" marL="0">
+                        <a:buNone/>
+                      </a:pPr>
+                      <a:r>
+                        <a:rPr lang="en-US" sz="1050" dirty="0">
+                          <a:solidFill>
+                            <a:srgbClr val="000000"/>
+                          </a:solidFill>
+                          <a:latin typeface="Times New Roman" pitchFamily="34" charset="0"/>
+                          <a:ea typeface="Times New Roman" pitchFamily="34" charset="-122"/>
+                          <a:cs typeface="Times New Roman" pitchFamily="34" charset="-120"/>
+                        </a:rPr>
+                        <a:t>+0.149</a:t>
+                      </a:r>
+                      <a:endParaRPr lang="en-US" sz="1050" dirty="0">
+                        <a:latin typeface="Times New Roman" charset="0"/>
+                        <a:ea typeface="Times New Roman" charset="0"/>
+                        <a:cs typeface="Times New Roman" charset="0"/>
+                      </a:endParaRPr>
+                    </a:p>
+                  </a:txBody>
+                  <a:tcPr marL="91440" marR="91440" marT="45720" marB="45720" anchor="ctr">
+                    <a:lnL w="12700" cap="flat" cmpd="sng" algn="ctr">
+                      <a:solidFill>
+                        <a:srgbClr val="FFFFFF"/>
+                      </a:solidFill>
+                      <a:prstDash val="solid"/>
+                      <a:round/>
+                      <a:headEnd type="none" w="med" len="med"/>
+                      <a:tailEnd type="none" w="med" len="med"/>
+                    </a:lnL>
+                    <a:lnR w="12700" cap="flat" cmpd="sng" algn="ctr">
+                      <a:solidFill>
+                        <a:srgbClr val="FFFFFF"/>
+                      </a:solidFill>
+                      <a:prstDash val="solid"/>
+                      <a:round/>
+                      <a:headEnd type="none" w="med" len="med"/>
+                      <a:tailEnd type="none" w="med" len="med"/>
+                    </a:lnR>
+                    <a:lnT w="12700" cap="flat" cmpd="sng" algn="ctr">
+                      <a:solidFill>
+                        <a:srgbClr val="FFFFFF"/>
+                      </a:solidFill>
+                      <a:prstDash val="solid"/>
+                      <a:round/>
+                      <a:headEnd type="none" w="med" len="med"/>
+                      <a:tailEnd type="none" w="med" len="med"/>
+                    </a:lnT>
+                    <a:lnB w="6350" cap="flat" cmpd="sng" algn="ctr">
+                      <a:solidFill>
+                        <a:srgbClr val="D9D9D9"/>
+                      </a:solidFill>
+                      <a:prstDash val="solid"/>
+                      <a:round/>
+                      <a:headEnd type="none" w="med" len="med"/>
+                      <a:tailEnd type="none" w="med" len="med"/>
+                    </a:lnB>
+                    <a:solidFill>
+                      <a:srgbClr val="FFFFFF"/>
+                    </a:solidFill>
+                  </a:tcPr>
+                </a:tc>
+                <a:tc>
+                  <a:txBody>
+                    <a:bodyPr/>
+                    <a:lstStyle/>
+                    <a:p>
+                      <a:pPr algn="ctr" indent="0" marL="0">
+                        <a:buNone/>
+                      </a:pPr>
+                      <a:r>
+                        <a:rPr lang="en-US" sz="1050" dirty="0">
+                          <a:solidFill>
+                            <a:srgbClr val="000000"/>
+                          </a:solidFill>
+                          <a:latin typeface="Times New Roman" pitchFamily="34" charset="0"/>
+                          <a:ea typeface="Times New Roman" pitchFamily="34" charset="-122"/>
+                          <a:cs typeface="Times New Roman" pitchFamily="34" charset="-120"/>
+                        </a:rPr>
+                        <a:t>2.324</a:t>
+                      </a:r>
+                      <a:endParaRPr lang="en-US" sz="1050" dirty="0">
+                        <a:latin typeface="Times New Roman" charset="0"/>
+                        <a:ea typeface="Times New Roman" charset="0"/>
+                        <a:cs typeface="Times New Roman" charset="0"/>
+                      </a:endParaRPr>
+                    </a:p>
+                  </a:txBody>
+                  <a:tcPr marL="91440" marR="91440" marT="45720" marB="45720" anchor="ctr">
+                    <a:lnL w="12700" cap="flat" cmpd="sng" algn="ctr">
+                      <a:solidFill>
+                        <a:srgbClr val="FFFFFF"/>
+                      </a:solidFill>
+                      <a:prstDash val="solid"/>
+                      <a:round/>
+                      <a:headEnd type="none" w="med" len="med"/>
+                      <a:tailEnd type="none" w="med" len="med"/>
+                    </a:lnL>
+                    <a:lnR w="12700" cap="flat" cmpd="sng" algn="ctr">
+                      <a:solidFill>
+                        <a:srgbClr val="FFFFFF"/>
+                      </a:solidFill>
+                      <a:prstDash val="solid"/>
+                      <a:round/>
+                      <a:headEnd type="none" w="med" len="med"/>
+                      <a:tailEnd type="none" w="med" len="med"/>
+                    </a:lnR>
+                    <a:lnT w="12700" cap="flat" cmpd="sng" algn="ctr">
+                      <a:solidFill>
+                        <a:srgbClr val="FFFFFF"/>
+                      </a:solidFill>
+                      <a:prstDash val="solid"/>
+                      <a:round/>
+                      <a:headEnd type="none" w="med" len="med"/>
+                      <a:tailEnd type="none" w="med" len="med"/>
+                    </a:lnT>
+                    <a:lnB w="6350" cap="flat" cmpd="sng" algn="ctr">
+                      <a:solidFill>
+                        <a:srgbClr val="D9D9D9"/>
+                      </a:solidFill>
+                      <a:prstDash val="solid"/>
+                      <a:round/>
+                      <a:headEnd type="none" w="med" len="med"/>
+                      <a:tailEnd type="none" w="med" len="med"/>
+                    </a:lnB>
+                    <a:solidFill>
+                      <a:srgbClr val="FFFFFF"/>
+                    </a:solidFill>
+                  </a:tcPr>
+                </a:tc>
+                <a:tc>
+                  <a:txBody>
+                    <a:bodyPr/>
+                    <a:lstStyle/>
+                    <a:p>
+                      <a:pPr algn="ctr" indent="0" marL="0">
+                        <a:buNone/>
+                      </a:pPr>
+                      <a:r>
+                        <a:rPr lang="en-US" sz="1050" dirty="0">
+                          <a:solidFill>
+                            <a:srgbClr val="000000"/>
+                          </a:solidFill>
+                          <a:latin typeface="Times New Roman" pitchFamily="34" charset="0"/>
+                          <a:ea typeface="Times New Roman" pitchFamily="34" charset="-122"/>
+                          <a:cs typeface="Times New Roman" pitchFamily="34" charset="-120"/>
+                        </a:rPr>
+                        <a:t>24.86</a:t>
+                      </a:r>
+                      <a:endParaRPr lang="en-US" sz="1050" dirty="0">
+                        <a:latin typeface="Times New Roman" charset="0"/>
+                        <a:ea typeface="Times New Roman" charset="0"/>
+                        <a:cs typeface="Times New Roman" charset="0"/>
+                      </a:endParaRPr>
+                    </a:p>
+                  </a:txBody>
+                  <a:tcPr marL="91440" marR="91440" marT="45720" marB="45720" anchor="ctr">
+                    <a:lnL w="12700" cap="flat" cmpd="sng" algn="ctr">
+                      <a:solidFill>
+                        <a:srgbClr val="FFFFFF"/>
+                      </a:solidFill>
+                      <a:prstDash val="solid"/>
+                      <a:round/>
+                      <a:headEnd type="none" w="med" len="med"/>
+                      <a:tailEnd type="none" w="med" len="med"/>
+                    </a:lnL>
+                    <a:lnR w="12700" cap="flat" cmpd="sng" algn="ctr">
+                      <a:solidFill>
+                        <a:srgbClr val="FFFFFF"/>
+                      </a:solidFill>
+                      <a:prstDash val="solid"/>
+                      <a:round/>
+                      <a:headEnd type="none" w="med" len="med"/>
+                      <a:tailEnd type="none" w="med" len="med"/>
+                    </a:lnR>
+                    <a:lnT w="12700" cap="flat" cmpd="sng" algn="ctr">
+                      <a:solidFill>
+                        <a:srgbClr val="FFFFFF"/>
+                      </a:solidFill>
+                      <a:prstDash val="solid"/>
+                      <a:round/>
+                      <a:headEnd type="none" w="med" len="med"/>
+                      <a:tailEnd type="none" w="med" len="med"/>
+                    </a:lnT>
+                    <a:lnB w="6350" cap="flat" cmpd="sng" algn="ctr">
+                      <a:solidFill>
+                        <a:srgbClr val="D9D9D9"/>
+                      </a:solidFill>
+                      <a:prstDash val="solid"/>
+                      <a:round/>
+                      <a:headEnd type="none" w="med" len="med"/>
+                      <a:tailEnd type="none" w="med" len="med"/>
+                    </a:lnB>
+                    <a:solidFill>
+                      <a:srgbClr val="FFFFFF"/>
+                    </a:solidFill>
+                  </a:tcPr>
+                </a:tc>
+                <a:tc>
+                  <a:txBody>
+                    <a:bodyPr/>
+                    <a:lstStyle/>
+                    <a:p>
+                      <a:pPr algn="ctr" indent="0" marL="0">
+                        <a:buNone/>
+                      </a:pPr>
+                      <a:r>
+                        <a:rPr lang="en-US" sz="1050" dirty="0">
+                          <a:solidFill>
+                            <a:srgbClr val="000000"/>
+                          </a:solidFill>
+                          <a:latin typeface="Times New Roman" pitchFamily="34" charset="0"/>
+                          <a:ea typeface="Times New Roman" pitchFamily="34" charset="-122"/>
+                          <a:cs typeface="Times New Roman" pitchFamily="34" charset="-120"/>
+                        </a:rPr>
+                        <a:t>52.87</a:t>
+                      </a:r>
+                      <a:endParaRPr lang="en-US" sz="1050" dirty="0">
+                        <a:latin typeface="Times New Roman" charset="0"/>
+                        <a:ea typeface="Times New Roman" charset="0"/>
+                        <a:cs typeface="Times New Roman" charset="0"/>
+                      </a:endParaRPr>
+                    </a:p>
+                  </a:txBody>
+                  <a:tcPr marL="91440" marR="91440" marT="45720" marB="45720" anchor="ctr">
+                    <a:lnL w="12700" cap="flat" cmpd="sng" algn="ctr">
+                      <a:solidFill>
+                        <a:srgbClr val="FFFFFF"/>
+                      </a:solidFill>
+                      <a:prstDash val="solid"/>
+                      <a:round/>
+                      <a:headEnd type="none" w="med" len="med"/>
+                      <a:tailEnd type="none" w="med" len="med"/>
+                    </a:lnL>
+                    <a:lnR w="12700" cap="flat" cmpd="sng" algn="ctr">
+                      <a:solidFill>
+                        <a:srgbClr val="FFFFFF"/>
+                      </a:solidFill>
+                      <a:prstDash val="solid"/>
+                      <a:round/>
+                      <a:headEnd type="none" w="med" len="med"/>
+                      <a:tailEnd type="none" w="med" len="med"/>
+                    </a:lnR>
+                    <a:lnT w="12700" cap="flat" cmpd="sng" algn="ctr">
+                      <a:solidFill>
+                        <a:srgbClr val="FFFFFF"/>
+                      </a:solidFill>
+                      <a:prstDash val="solid"/>
+                      <a:round/>
+                      <a:headEnd type="none" w="med" len="med"/>
+                      <a:tailEnd type="none" w="med" len="med"/>
+                    </a:lnT>
+                    <a:lnB w="6350" cap="flat" cmpd="sng" algn="ctr">
+                      <a:solidFill>
+                        <a:srgbClr val="D9D9D9"/>
+                      </a:solidFill>
+                      <a:prstDash val="solid"/>
+                      <a:round/>
+                      <a:headEnd type="none" w="med" len="med"/>
+                      <a:tailEnd type="none" w="med" len="med"/>
+                    </a:lnB>
+                    <a:solidFill>
+                      <a:srgbClr val="FFFFFF"/>
+                    </a:solidFill>
+                  </a:tcPr>
+                </a:tc>
+                <a:tc>
+                  <a:txBody>
+                    <a:bodyPr/>
+                    <a:lstStyle/>
+                    <a:p>
+                      <a:pPr algn="ctr" indent="0" marL="0">
+                        <a:buNone/>
+                      </a:pPr>
+                      <a:r>
+                        <a:rPr lang="en-US" sz="1050" dirty="0">
+                          <a:solidFill>
+                            <a:srgbClr val="000000"/>
+                          </a:solidFill>
+                          <a:latin typeface="Times New Roman" pitchFamily="34" charset="0"/>
+                          <a:ea typeface="Times New Roman" pitchFamily="34" charset="-122"/>
+                          <a:cs typeface="Times New Roman" pitchFamily="34" charset="-120"/>
+                        </a:rPr>
+                        <a:t>93.75</a:t>
+                      </a:r>
+                      <a:endParaRPr lang="en-US" sz="1050" dirty="0">
+                        <a:latin typeface="Times New Roman" charset="0"/>
+                        <a:ea typeface="Times New Roman" charset="0"/>
+                        <a:cs typeface="Times New Roman" charset="0"/>
+                      </a:endParaRPr>
+                    </a:p>
+                  </a:txBody>
+                  <a:tcPr marL="91440" marR="91440" marT="45720" marB="45720" anchor="ctr">
+                    <a:lnL w="12700" cap="flat" cmpd="sng" algn="ctr">
+                      <a:solidFill>
+                        <a:srgbClr val="FFFFFF"/>
+                      </a:solidFill>
+                      <a:prstDash val="solid"/>
+                      <a:round/>
+                      <a:headEnd type="none" w="med" len="med"/>
+                      <a:tailEnd type="none" w="med" len="med"/>
+                    </a:lnL>
+                    <a:lnR w="12700" cap="flat" cmpd="sng" algn="ctr">
+                      <a:solidFill>
+                        <a:srgbClr val="FFFFFF"/>
+                      </a:solidFill>
+                      <a:prstDash val="solid"/>
+                      <a:round/>
+                      <a:headEnd type="none" w="med" len="med"/>
+                      <a:tailEnd type="none" w="med" len="med"/>
+                    </a:lnR>
+                    <a:lnT w="12700" cap="flat" cmpd="sng" algn="ctr">
+                      <a:solidFill>
+                        <a:srgbClr val="FFFFFF"/>
+                      </a:solidFill>
+                      <a:prstDash val="solid"/>
+                      <a:round/>
+                      <a:headEnd type="none" w="med" len="med"/>
+                      <a:tailEnd type="none" w="med" len="med"/>
+                    </a:lnT>
+                    <a:lnB w="6350" cap="flat" cmpd="sng" algn="ctr">
+                      <a:solidFill>
+                        <a:srgbClr val="D9D9D9"/>
+                      </a:solidFill>
+                      <a:prstDash val="solid"/>
+                      <a:round/>
+                      <a:headEnd type="none" w="med" len="med"/>
+                      <a:tailEnd type="none" w="med" len="med"/>
+                    </a:lnB>
+                    <a:solidFill>
+                      <a:srgbClr val="FFFFFF"/>
+                    </a:solidFill>
+                  </a:tcPr>
+                </a:tc>
+              </a:tr>
+              <a:tr h="283464">
+                <a:tc>
+                  <a:txBody>
+                    <a:bodyPr/>
+                    <a:lstStyle/>
+                    <a:p>
+                      <a:pPr algn="l" indent="0" marL="0">
+                        <a:buNone/>
+                      </a:pPr>
+                      <a:r>
+                        <a:rPr lang="en-US" sz="1050" dirty="0">
+                          <a:solidFill>
+                            <a:srgbClr val="000000"/>
+                          </a:solidFill>
+                          <a:latin typeface="Times New Roman" pitchFamily="34" charset="0"/>
+                          <a:ea typeface="Times New Roman" pitchFamily="34" charset="-122"/>
+                          <a:cs typeface="Times New Roman" pitchFamily="34" charset="-120"/>
+                        </a:rPr>
+                        <a:t>    (the paper's protocol)</a:t>
+                      </a:r>
+                      <a:endParaRPr lang="en-US" sz="1050" dirty="0">
+                        <a:latin typeface="Times New Roman" charset="0"/>
+                        <a:ea typeface="Times New Roman" charset="0"/>
+                        <a:cs typeface="Times New Roman" charset="0"/>
+                      </a:endParaRPr>
+                    </a:p>
+                  </a:txBody>
+                  <a:tcPr marL="91440" marR="91440" marT="45720" marB="45720" anchor="ctr">
+                    <a:lnL w="12700" cap="flat" cmpd="sng" algn="ctr">
+                      <a:solidFill>
+                        <a:srgbClr val="FFFFFF"/>
+                      </a:solidFill>
+                      <a:prstDash val="solid"/>
+                      <a:round/>
+                      <a:headEnd type="none" w="med" len="med"/>
+                      <a:tailEnd type="none" w="med" len="med"/>
+                    </a:lnL>
+                    <a:lnR w="12700" cap="flat" cmpd="sng" algn="ctr">
+                      <a:solidFill>
+                        <a:srgbClr val="FFFFFF"/>
+                      </a:solidFill>
+                      <a:prstDash val="solid"/>
+                      <a:round/>
+                      <a:headEnd type="none" w="med" len="med"/>
+                      <a:tailEnd type="none" w="med" len="med"/>
+                    </a:lnR>
+                    <a:lnT w="12700" cap="flat" cmpd="sng" algn="ctr">
+                      <a:solidFill>
+                        <a:srgbClr val="FFFFFF"/>
+                      </a:solidFill>
+                      <a:prstDash val="solid"/>
+                      <a:round/>
+                      <a:headEnd type="none" w="med" len="med"/>
+                      <a:tailEnd type="none" w="med" len="med"/>
+                    </a:lnT>
+                    <a:lnB w="6350" cap="flat" cmpd="sng" algn="ctr">
+                      <a:solidFill>
+                        <a:srgbClr val="D9D9D9"/>
+                      </a:solidFill>
+                      <a:prstDash val="solid"/>
+                      <a:round/>
+                      <a:headEnd type="none" w="med" len="med"/>
+                      <a:tailEnd type="none" w="med" len="med"/>
+                    </a:lnB>
+                    <a:solidFill>
+                      <a:srgbClr val="FFFFFF"/>
+                    </a:solidFill>
+                  </a:tcPr>
+                </a:tc>
+                <a:tc>
+                  <a:txBody>
+                    <a:bodyPr/>
+                    <a:lstStyle/>
+                    <a:p>
+                      <a:pPr algn="l" indent="0" marL="0">
+                        <a:buNone/>
+                      </a:pPr>
+                      <a:r>
+                        <a:rPr lang="en-US" sz="1050" dirty="0">
+                          <a:solidFill>
+                            <a:srgbClr val="000000"/>
+                          </a:solidFill>
+                          <a:latin typeface="Times New Roman" pitchFamily="34" charset="0"/>
+                          <a:ea typeface="Times New Roman" pitchFamily="34" charset="-122"/>
+                          <a:cs typeface="Times New Roman" pitchFamily="34" charset="-120"/>
+                        </a:rPr>
+                        <a:t>No-skill baseline</a:t>
+                      </a:r>
+                      <a:endParaRPr lang="en-US" sz="1050" dirty="0">
+                        <a:latin typeface="Times New Roman" charset="0"/>
+                        <a:ea typeface="Times New Roman" charset="0"/>
+                        <a:cs typeface="Times New Roman" charset="0"/>
+                      </a:endParaRPr>
+                    </a:p>
+                  </a:txBody>
+                  <a:tcPr marL="91440" marR="91440" marT="45720" marB="45720" anchor="ctr">
+                    <a:lnL w="12700" cap="flat" cmpd="sng" algn="ctr">
+                      <a:solidFill>
+                        <a:srgbClr val="FFFFFF"/>
+                      </a:solidFill>
+                      <a:prstDash val="solid"/>
+                      <a:round/>
+                      <a:headEnd type="none" w="med" len="med"/>
+                      <a:tailEnd type="none" w="med" len="med"/>
+                    </a:lnL>
+                    <a:lnR w="12700" cap="flat" cmpd="sng" algn="ctr">
+                      <a:solidFill>
+                        <a:srgbClr val="FFFFFF"/>
+                      </a:solidFill>
+                      <a:prstDash val="solid"/>
+                      <a:round/>
+                      <a:headEnd type="none" w="med" len="med"/>
+                      <a:tailEnd type="none" w="med" len="med"/>
+                    </a:lnR>
+                    <a:lnT w="12700" cap="flat" cmpd="sng" algn="ctr">
+                      <a:solidFill>
+                        <a:srgbClr val="FFFFFF"/>
+                      </a:solidFill>
+                      <a:prstDash val="solid"/>
+                      <a:round/>
+                      <a:headEnd type="none" w="med" len="med"/>
+                      <a:tailEnd type="none" w="med" len="med"/>
+                    </a:lnT>
+                    <a:lnB w="6350" cap="flat" cmpd="sng" algn="ctr">
+                      <a:solidFill>
+                        <a:srgbClr val="D9D9D9"/>
+                      </a:solidFill>
+                      <a:prstDash val="solid"/>
+                      <a:round/>
+                      <a:headEnd type="none" w="med" len="med"/>
+                      <a:tailEnd type="none" w="med" len="med"/>
+                    </a:lnB>
+                    <a:solidFill>
+                      <a:srgbClr val="FFFFFF"/>
+                    </a:solidFill>
+                  </a:tcPr>
+                </a:tc>
+                <a:tc>
+                  <a:txBody>
+                    <a:bodyPr/>
+                    <a:lstStyle/>
+                    <a:p>
+                      <a:pPr algn="ctr" indent="0" marL="0">
+                        <a:buNone/>
+                      </a:pPr>
+                      <a:r>
+                        <a:rPr lang="en-US" sz="1050" dirty="0">
+                          <a:solidFill>
+                            <a:srgbClr val="000000"/>
+                          </a:solidFill>
+                          <a:latin typeface="Times New Roman" pitchFamily="34" charset="0"/>
+                          <a:ea typeface="Times New Roman" pitchFamily="34" charset="-122"/>
+                          <a:cs typeface="Times New Roman" pitchFamily="34" charset="-120"/>
+                        </a:rPr>
+                        <a:t>−0.000</a:t>
+                      </a:r>
+                      <a:endParaRPr lang="en-US" sz="1050" dirty="0">
+                        <a:latin typeface="Times New Roman" charset="0"/>
+                        <a:ea typeface="Times New Roman" charset="0"/>
+                        <a:cs typeface="Times New Roman" charset="0"/>
+                      </a:endParaRPr>
+                    </a:p>
+                  </a:txBody>
+                  <a:tcPr marL="91440" marR="91440" marT="45720" marB="45720" anchor="ctr">
+                    <a:lnL w="12700" cap="flat" cmpd="sng" algn="ctr">
+                      <a:solidFill>
+                        <a:srgbClr val="FFFFFF"/>
+                      </a:solidFill>
+                      <a:prstDash val="solid"/>
+                      <a:round/>
+                      <a:headEnd type="none" w="med" len="med"/>
+                      <a:tailEnd type="none" w="med" len="med"/>
+                    </a:lnL>
+                    <a:lnR w="12700" cap="flat" cmpd="sng" algn="ctr">
+                      <a:solidFill>
+                        <a:srgbClr val="FFFFFF"/>
+                      </a:solidFill>
+                      <a:prstDash val="solid"/>
+                      <a:round/>
+                      <a:headEnd type="none" w="med" len="med"/>
+                      <a:tailEnd type="none" w="med" len="med"/>
+                    </a:lnR>
+                    <a:lnT w="12700" cap="flat" cmpd="sng" algn="ctr">
+                      <a:solidFill>
+                        <a:srgbClr val="FFFFFF"/>
+                      </a:solidFill>
+                      <a:prstDash val="solid"/>
+                      <a:round/>
+                      <a:headEnd type="none" w="med" len="med"/>
+                      <a:tailEnd type="none" w="med" len="med"/>
+                    </a:lnT>
+                    <a:lnB w="6350" cap="flat" cmpd="sng" algn="ctr">
+                      <a:solidFill>
+                        <a:srgbClr val="D9D9D9"/>
+                      </a:solidFill>
+                      <a:prstDash val="solid"/>
+                      <a:round/>
+                      <a:headEnd type="none" w="med" len="med"/>
+                      <a:tailEnd type="none" w="med" len="med"/>
+                    </a:lnB>
+                    <a:solidFill>
+                      <a:srgbClr val="FFFFFF"/>
+                    </a:solidFill>
+                  </a:tcPr>
+                </a:tc>
+                <a:tc>
+                  <a:txBody>
+                    <a:bodyPr/>
+                    <a:lstStyle/>
+                    <a:p>
+                      <a:pPr algn="ctr" indent="0" marL="0">
+                        <a:buNone/>
+                      </a:pPr>
+                      <a:r>
+                        <a:rPr lang="en-US" sz="1050" dirty="0">
+                          <a:solidFill>
+                            <a:srgbClr val="000000"/>
+                          </a:solidFill>
+                          <a:latin typeface="Times New Roman" pitchFamily="34" charset="0"/>
+                          <a:ea typeface="Times New Roman" pitchFamily="34" charset="-122"/>
+                          <a:cs typeface="Times New Roman" pitchFamily="34" charset="-120"/>
+                        </a:rPr>
+                        <a:t>2.520</a:t>
+                      </a:r>
+                      <a:endParaRPr lang="en-US" sz="1050" dirty="0">
+                        <a:latin typeface="Times New Roman" charset="0"/>
+                        <a:ea typeface="Times New Roman" charset="0"/>
+                        <a:cs typeface="Times New Roman" charset="0"/>
+                      </a:endParaRPr>
+                    </a:p>
+                  </a:txBody>
+                  <a:tcPr marL="91440" marR="91440" marT="45720" marB="45720" anchor="ctr">
+                    <a:lnL w="12700" cap="flat" cmpd="sng" algn="ctr">
+                      <a:solidFill>
+                        <a:srgbClr val="FFFFFF"/>
+                      </a:solidFill>
+                      <a:prstDash val="solid"/>
+                      <a:round/>
+                      <a:headEnd type="none" w="med" len="med"/>
+                      <a:tailEnd type="none" w="med" len="med"/>
+                    </a:lnL>
+                    <a:lnR w="12700" cap="flat" cmpd="sng" algn="ctr">
+                      <a:solidFill>
+                        <a:srgbClr val="FFFFFF"/>
+                      </a:solidFill>
+                      <a:prstDash val="solid"/>
+                      <a:round/>
+                      <a:headEnd type="none" w="med" len="med"/>
+                      <a:tailEnd type="none" w="med" len="med"/>
+                    </a:lnR>
+                    <a:lnT w="12700" cap="flat" cmpd="sng" algn="ctr">
+                      <a:solidFill>
+                        <a:srgbClr val="FFFFFF"/>
+                      </a:solidFill>
+                      <a:prstDash val="solid"/>
+                      <a:round/>
+                      <a:headEnd type="none" w="med" len="med"/>
+                      <a:tailEnd type="none" w="med" len="med"/>
+                    </a:lnT>
+                    <a:lnB w="6350" cap="flat" cmpd="sng" algn="ctr">
+                      <a:solidFill>
+                        <a:srgbClr val="D9D9D9"/>
+                      </a:solidFill>
+                      <a:prstDash val="solid"/>
+                      <a:round/>
+                      <a:headEnd type="none" w="med" len="med"/>
+                      <a:tailEnd type="none" w="med" len="med"/>
+                    </a:lnB>
+                    <a:solidFill>
+                      <a:srgbClr val="FFFFFF"/>
+                    </a:solidFill>
+                  </a:tcPr>
+                </a:tc>
+                <a:tc>
+                  <a:txBody>
+                    <a:bodyPr/>
+                    <a:lstStyle/>
+                    <a:p>
+                      <a:pPr algn="ctr" indent="0" marL="0">
+                        <a:buNone/>
+                      </a:pPr>
+                      <a:r>
+                        <a:rPr lang="en-US" sz="1050" dirty="0">
+                          <a:solidFill>
+                            <a:srgbClr val="000000"/>
+                          </a:solidFill>
+                          <a:latin typeface="Times New Roman" pitchFamily="34" charset="0"/>
+                          <a:ea typeface="Times New Roman" pitchFamily="34" charset="-122"/>
+                          <a:cs typeface="Times New Roman" pitchFamily="34" charset="-120"/>
+                        </a:rPr>
+                        <a:t>29.14</a:t>
+                      </a:r>
+                      <a:endParaRPr lang="en-US" sz="1050" dirty="0">
+                        <a:latin typeface="Times New Roman" charset="0"/>
+                        <a:ea typeface="Times New Roman" charset="0"/>
+                        <a:cs typeface="Times New Roman" charset="0"/>
+                      </a:endParaRPr>
+                    </a:p>
+                  </a:txBody>
+                  <a:tcPr marL="91440" marR="91440" marT="45720" marB="45720" anchor="ctr">
+                    <a:lnL w="12700" cap="flat" cmpd="sng" algn="ctr">
+                      <a:solidFill>
+                        <a:srgbClr val="FFFFFF"/>
+                      </a:solidFill>
+                      <a:prstDash val="solid"/>
+                      <a:round/>
+                      <a:headEnd type="none" w="med" len="med"/>
+                      <a:tailEnd type="none" w="med" len="med"/>
+                    </a:lnL>
+                    <a:lnR w="12700" cap="flat" cmpd="sng" algn="ctr">
+                      <a:solidFill>
+                        <a:srgbClr val="FFFFFF"/>
+                      </a:solidFill>
+                      <a:prstDash val="solid"/>
+                      <a:round/>
+                      <a:headEnd type="none" w="med" len="med"/>
+                      <a:tailEnd type="none" w="med" len="med"/>
+                    </a:lnR>
+                    <a:lnT w="12700" cap="flat" cmpd="sng" algn="ctr">
+                      <a:solidFill>
+                        <a:srgbClr val="FFFFFF"/>
+                      </a:solidFill>
+                      <a:prstDash val="solid"/>
+                      <a:round/>
+                      <a:headEnd type="none" w="med" len="med"/>
+                      <a:tailEnd type="none" w="med" len="med"/>
+                    </a:lnT>
+                    <a:lnB w="6350" cap="flat" cmpd="sng" algn="ctr">
+                      <a:solidFill>
+                        <a:srgbClr val="D9D9D9"/>
+                      </a:solidFill>
+                      <a:prstDash val="solid"/>
+                      <a:round/>
+                      <a:headEnd type="none" w="med" len="med"/>
+                      <a:tailEnd type="none" w="med" len="med"/>
+                    </a:lnB>
+                    <a:solidFill>
+                      <a:srgbClr val="FFFFFF"/>
+                    </a:solidFill>
+                  </a:tcPr>
+                </a:tc>
+                <a:tc>
+                  <a:txBody>
+                    <a:bodyPr/>
+                    <a:lstStyle/>
+                    <a:p>
+                      <a:pPr algn="ctr" indent="0" marL="0">
+                        <a:buNone/>
+                      </a:pPr>
+                      <a:r>
+                        <a:rPr lang="en-US" sz="1050" dirty="0">
+                          <a:solidFill>
+                            <a:srgbClr val="000000"/>
+                          </a:solidFill>
+                          <a:latin typeface="Times New Roman" pitchFamily="34" charset="0"/>
+                          <a:ea typeface="Times New Roman" pitchFamily="34" charset="-122"/>
+                          <a:cs typeface="Times New Roman" pitchFamily="34" charset="-120"/>
+                        </a:rPr>
+                        <a:t>45.34</a:t>
+                      </a:r>
+                      <a:endParaRPr lang="en-US" sz="1050" dirty="0">
+                        <a:latin typeface="Times New Roman" charset="0"/>
+                        <a:ea typeface="Times New Roman" charset="0"/>
+                        <a:cs typeface="Times New Roman" charset="0"/>
+                      </a:endParaRPr>
+                    </a:p>
+                  </a:txBody>
+                  <a:tcPr marL="91440" marR="91440" marT="45720" marB="45720" anchor="ctr">
+                    <a:lnL w="12700" cap="flat" cmpd="sng" algn="ctr">
+                      <a:solidFill>
+                        <a:srgbClr val="FFFFFF"/>
+                      </a:solidFill>
+                      <a:prstDash val="solid"/>
+                      <a:round/>
+                      <a:headEnd type="none" w="med" len="med"/>
+                      <a:tailEnd type="none" w="med" len="med"/>
+                    </a:lnL>
+                    <a:lnR w="12700" cap="flat" cmpd="sng" algn="ctr">
+                      <a:solidFill>
+                        <a:srgbClr val="FFFFFF"/>
+                      </a:solidFill>
+                      <a:prstDash val="solid"/>
+                      <a:round/>
+                      <a:headEnd type="none" w="med" len="med"/>
+                      <a:tailEnd type="none" w="med" len="med"/>
+                    </a:lnR>
+                    <a:lnT w="12700" cap="flat" cmpd="sng" algn="ctr">
+                      <a:solidFill>
+                        <a:srgbClr val="FFFFFF"/>
+                      </a:solidFill>
+                      <a:prstDash val="solid"/>
+                      <a:round/>
+                      <a:headEnd type="none" w="med" len="med"/>
+                      <a:tailEnd type="none" w="med" len="med"/>
+                    </a:lnT>
+                    <a:lnB w="6350" cap="flat" cmpd="sng" algn="ctr">
+                      <a:solidFill>
+                        <a:srgbClr val="D9D9D9"/>
+                      </a:solidFill>
+                      <a:prstDash val="solid"/>
+                      <a:round/>
+                      <a:headEnd type="none" w="med" len="med"/>
+                      <a:tailEnd type="none" w="med" len="med"/>
+                    </a:lnB>
+                    <a:solidFill>
+                      <a:srgbClr val="FFFFFF"/>
+                    </a:solidFill>
+                  </a:tcPr>
+                </a:tc>
+                <a:tc>
+                  <a:txBody>
+                    <a:bodyPr/>
+                    <a:lstStyle/>
+                    <a:p>
+                      <a:pPr algn="ctr" indent="0" marL="0">
+                        <a:buNone/>
+                      </a:pPr>
+                      <a:r>
+                        <a:rPr lang="en-US" sz="1050" dirty="0">
+                          <a:solidFill>
+                            <a:srgbClr val="000000"/>
+                          </a:solidFill>
+                          <a:latin typeface="Times New Roman" pitchFamily="34" charset="0"/>
+                          <a:ea typeface="Times New Roman" pitchFamily="34" charset="-122"/>
+                          <a:cs typeface="Times New Roman" pitchFamily="34" charset="-120"/>
+                        </a:rPr>
+                        <a:t>90.89</a:t>
+                      </a:r>
+                      <a:endParaRPr lang="en-US" sz="1050" dirty="0">
+                        <a:latin typeface="Times New Roman" charset="0"/>
+                        <a:ea typeface="Times New Roman" charset="0"/>
+                        <a:cs typeface="Times New Roman" charset="0"/>
+                      </a:endParaRPr>
+                    </a:p>
+                  </a:txBody>
+                  <a:tcPr marL="91440" marR="91440" marT="45720" marB="45720" anchor="ctr">
+                    <a:lnL w="12700" cap="flat" cmpd="sng" algn="ctr">
+                      <a:solidFill>
+                        <a:srgbClr val="FFFFFF"/>
+                      </a:solidFill>
+                      <a:prstDash val="solid"/>
+                      <a:round/>
+                      <a:headEnd type="none" w="med" len="med"/>
+                      <a:tailEnd type="none" w="med" len="med"/>
+                    </a:lnL>
+                    <a:lnR w="12700" cap="flat" cmpd="sng" algn="ctr">
+                      <a:solidFill>
+                        <a:srgbClr val="FFFFFF"/>
+                      </a:solidFill>
+                      <a:prstDash val="solid"/>
+                      <a:round/>
+                      <a:headEnd type="none" w="med" len="med"/>
+                      <a:tailEnd type="none" w="med" len="med"/>
+                    </a:lnR>
+                    <a:lnT w="12700" cap="flat" cmpd="sng" algn="ctr">
+                      <a:solidFill>
+                        <a:srgbClr val="FFFFFF"/>
+                      </a:solidFill>
+                      <a:prstDash val="solid"/>
+                      <a:round/>
+                      <a:headEnd type="none" w="med" len="med"/>
+                      <a:tailEnd type="none" w="med" len="med"/>
+                    </a:lnT>
+                    <a:lnB w="6350" cap="flat" cmpd="sng" algn="ctr">
+                      <a:solidFill>
+                        <a:srgbClr val="D9D9D9"/>
+                      </a:solidFill>
+                      <a:prstDash val="solid"/>
+                      <a:round/>
+                      <a:headEnd type="none" w="med" len="med"/>
+                      <a:tailEnd type="none" w="med" len="med"/>
+                    </a:lnB>
+                    <a:solidFill>
+                      <a:srgbClr val="FFFFFF"/>
+                    </a:solidFill>
+                  </a:tcPr>
+                </a:tc>
+              </a:tr>
+              <a:tr h="283464">
+                <a:tc>
+                  <a:txBody>
+                    <a:bodyPr/>
+                    <a:lstStyle/>
+                    <a:p>
+                      <a:pPr algn="l" indent="0" marL="0">
+                        <a:buNone/>
+                      </a:pPr>
+                      <a:r>
+                        <a:rPr lang="en-US" sz="1050" dirty="0">
+                          <a:solidFill>
+                            <a:srgbClr val="000000"/>
+                          </a:solidFill>
+                          <a:latin typeface="Times New Roman" pitchFamily="34" charset="0"/>
+                          <a:ea typeface="Times New Roman" pitchFamily="34" charset="-122"/>
+                          <a:cs typeface="Times New Roman" pitchFamily="34" charset="-120"/>
+                        </a:rPr>
+                        <a:t>2. Subject-aware</a:t>
+                      </a:r>
+                      <a:endParaRPr lang="en-US" sz="1050" dirty="0">
+                        <a:latin typeface="Times New Roman" charset="0"/>
+                        <a:ea typeface="Times New Roman" charset="0"/>
+                        <a:cs typeface="Times New Roman" charset="0"/>
+                      </a:endParaRPr>
+                    </a:p>
+                  </a:txBody>
+                  <a:tcPr marL="91440" marR="91440" marT="45720" marB="45720" anchor="ctr">
+                    <a:lnL w="12700" cap="flat" cmpd="sng" algn="ctr">
+                      <a:solidFill>
+                        <a:srgbClr val="FFFFFF"/>
+                      </a:solidFill>
+                      <a:prstDash val="solid"/>
+                      <a:round/>
+                      <a:headEnd type="none" w="med" len="med"/>
+                      <a:tailEnd type="none" w="med" len="med"/>
+                    </a:lnL>
+                    <a:lnR w="12700" cap="flat" cmpd="sng" algn="ctr">
+                      <a:solidFill>
+                        <a:srgbClr val="FFFFFF"/>
+                      </a:solidFill>
+                      <a:prstDash val="solid"/>
+                      <a:round/>
+                      <a:headEnd type="none" w="med" len="med"/>
+                      <a:tailEnd type="none" w="med" len="med"/>
+                    </a:lnR>
+                    <a:lnT w="12700" cap="flat" cmpd="sng" algn="ctr">
+                      <a:solidFill>
+                        <a:srgbClr val="FFFFFF"/>
+                      </a:solidFill>
+                      <a:prstDash val="solid"/>
+                      <a:round/>
+                      <a:headEnd type="none" w="med" len="med"/>
+                      <a:tailEnd type="none" w="med" len="med"/>
+                    </a:lnT>
+                    <a:lnB w="6350" cap="flat" cmpd="sng" algn="ctr">
+                      <a:solidFill>
+                        <a:srgbClr val="D9D9D9"/>
+                      </a:solidFill>
+                      <a:prstDash val="solid"/>
+                      <a:round/>
+                      <a:headEnd type="none" w="med" len="med"/>
+                      <a:tailEnd type="none" w="med" len="med"/>
+                    </a:lnB>
+                    <a:solidFill>
+                      <a:srgbClr val="FFFFFF"/>
+                    </a:solidFill>
+                  </a:tcPr>
+                </a:tc>
+                <a:tc>
+                  <a:txBody>
+                    <a:bodyPr/>
+                    <a:lstStyle/>
+                    <a:p>
+                      <a:pPr algn="l" indent="0" marL="0">
+                        <a:buNone/>
+                      </a:pPr>
+                      <a:r>
+                        <a:rPr lang="en-US" sz="1050" dirty="0">
+                          <a:solidFill>
+                            <a:srgbClr val="000000"/>
+                          </a:solidFill>
+                          <a:latin typeface="Times New Roman" pitchFamily="34" charset="0"/>
+                          <a:ea typeface="Times New Roman" pitchFamily="34" charset="-122"/>
+                          <a:cs typeface="Times New Roman" pitchFamily="34" charset="-120"/>
+                        </a:rPr>
+                        <a:t>Choquet fusion</a:t>
+                      </a:r>
+                      <a:endParaRPr lang="en-US" sz="1050" dirty="0">
+                        <a:latin typeface="Times New Roman" charset="0"/>
+                        <a:ea typeface="Times New Roman" charset="0"/>
+                        <a:cs typeface="Times New Roman" charset="0"/>
+                      </a:endParaRPr>
+                    </a:p>
+                  </a:txBody>
+                  <a:tcPr marL="91440" marR="91440" marT="45720" marB="45720" anchor="ctr">
+                    <a:lnL w="12700" cap="flat" cmpd="sng" algn="ctr">
+                      <a:solidFill>
+                        <a:srgbClr val="FFFFFF"/>
+                      </a:solidFill>
+                      <a:prstDash val="solid"/>
+                      <a:round/>
+                      <a:headEnd type="none" w="med" len="med"/>
+                      <a:tailEnd type="none" w="med" len="med"/>
+                    </a:lnL>
+                    <a:lnR w="12700" cap="flat" cmpd="sng" algn="ctr">
+                      <a:solidFill>
+                        <a:srgbClr val="FFFFFF"/>
+                      </a:solidFill>
+                      <a:prstDash val="solid"/>
+                      <a:round/>
+                      <a:headEnd type="none" w="med" len="med"/>
+                      <a:tailEnd type="none" w="med" len="med"/>
+                    </a:lnR>
+                    <a:lnT w="12700" cap="flat" cmpd="sng" algn="ctr">
+                      <a:solidFill>
+                        <a:srgbClr val="FFFFFF"/>
+                      </a:solidFill>
+                      <a:prstDash val="solid"/>
+                      <a:round/>
+                      <a:headEnd type="none" w="med" len="med"/>
+                      <a:tailEnd type="none" w="med" len="med"/>
+                    </a:lnT>
+                    <a:lnB w="6350" cap="flat" cmpd="sng" algn="ctr">
+                      <a:solidFill>
+                        <a:srgbClr val="D9D9D9"/>
+                      </a:solidFill>
+                      <a:prstDash val="solid"/>
+                      <a:round/>
+                      <a:headEnd type="none" w="med" len="med"/>
+                      <a:tailEnd type="none" w="med" len="med"/>
+                    </a:lnB>
+                    <a:solidFill>
+                      <a:srgbClr val="FFFFFF"/>
+                    </a:solidFill>
+                  </a:tcPr>
+                </a:tc>
+                <a:tc>
+                  <a:txBody>
+                    <a:bodyPr/>
+                    <a:lstStyle/>
+                    <a:p>
+                      <a:pPr algn="ctr" indent="0" marL="0">
+                        <a:buNone/>
+                      </a:pPr>
+                      <a:r>
+                        <a:rPr lang="en-US" sz="1050" dirty="0">
+                          <a:solidFill>
+                            <a:srgbClr val="000000"/>
+                          </a:solidFill>
+                          <a:latin typeface="Times New Roman" pitchFamily="34" charset="0"/>
+                          <a:ea typeface="Times New Roman" pitchFamily="34" charset="-122"/>
+                          <a:cs typeface="Times New Roman" pitchFamily="34" charset="-120"/>
+                        </a:rPr>
+                        <a:t>−0.223</a:t>
+                      </a:r>
+                      <a:endParaRPr lang="en-US" sz="1050" dirty="0">
+                        <a:latin typeface="Times New Roman" charset="0"/>
+                        <a:ea typeface="Times New Roman" charset="0"/>
+                        <a:cs typeface="Times New Roman" charset="0"/>
+                      </a:endParaRPr>
+                    </a:p>
+                  </a:txBody>
+                  <a:tcPr marL="91440" marR="91440" marT="45720" marB="45720" anchor="ctr">
+                    <a:lnL w="12700" cap="flat" cmpd="sng" algn="ctr">
+                      <a:solidFill>
+                        <a:srgbClr val="FFFFFF"/>
+                      </a:solidFill>
+                      <a:prstDash val="solid"/>
+                      <a:round/>
+                      <a:headEnd type="none" w="med" len="med"/>
+                      <a:tailEnd type="none" w="med" len="med"/>
+                    </a:lnL>
+                    <a:lnR w="12700" cap="flat" cmpd="sng" algn="ctr">
+                      <a:solidFill>
+                        <a:srgbClr val="FFFFFF"/>
+                      </a:solidFill>
+                      <a:prstDash val="solid"/>
+                      <a:round/>
+                      <a:headEnd type="none" w="med" len="med"/>
+                      <a:tailEnd type="none" w="med" len="med"/>
+                    </a:lnR>
+                    <a:lnT w="12700" cap="flat" cmpd="sng" algn="ctr">
+                      <a:solidFill>
+                        <a:srgbClr val="FFFFFF"/>
+                      </a:solidFill>
+                      <a:prstDash val="solid"/>
+                      <a:round/>
+                      <a:headEnd type="none" w="med" len="med"/>
+                      <a:tailEnd type="none" w="med" len="med"/>
+                    </a:lnT>
+                    <a:lnB w="6350" cap="flat" cmpd="sng" algn="ctr">
+                      <a:solidFill>
+                        <a:srgbClr val="D9D9D9"/>
+                      </a:solidFill>
+                      <a:prstDash val="solid"/>
+                      <a:round/>
+                      <a:headEnd type="none" w="med" len="med"/>
+                      <a:tailEnd type="none" w="med" len="med"/>
+                    </a:lnB>
+                    <a:solidFill>
+                      <a:srgbClr val="FFFFFF"/>
+                    </a:solidFill>
+                  </a:tcPr>
+                </a:tc>
+                <a:tc>
+                  <a:txBody>
+                    <a:bodyPr/>
+                    <a:lstStyle/>
+                    <a:p>
+                      <a:pPr algn="ctr" indent="0" marL="0">
+                        <a:buNone/>
+                      </a:pPr>
+                      <a:r>
+                        <a:rPr lang="en-US" sz="1050" dirty="0">
+                          <a:solidFill>
+                            <a:srgbClr val="000000"/>
+                          </a:solidFill>
+                          <a:latin typeface="Times New Roman" pitchFamily="34" charset="0"/>
+                          <a:ea typeface="Times New Roman" pitchFamily="34" charset="-122"/>
+                          <a:cs typeface="Times New Roman" pitchFamily="34" charset="-120"/>
+                        </a:rPr>
+                        <a:t>2.786</a:t>
+                      </a:r>
+                      <a:endParaRPr lang="en-US" sz="1050" dirty="0">
+                        <a:latin typeface="Times New Roman" charset="0"/>
+                        <a:ea typeface="Times New Roman" charset="0"/>
+                        <a:cs typeface="Times New Roman" charset="0"/>
+                      </a:endParaRPr>
+                    </a:p>
+                  </a:txBody>
+                  <a:tcPr marL="91440" marR="91440" marT="45720" marB="45720" anchor="ctr">
+                    <a:lnL w="12700" cap="flat" cmpd="sng" algn="ctr">
+                      <a:solidFill>
+                        <a:srgbClr val="FFFFFF"/>
+                      </a:solidFill>
+                      <a:prstDash val="solid"/>
+                      <a:round/>
+                      <a:headEnd type="none" w="med" len="med"/>
+                      <a:tailEnd type="none" w="med" len="med"/>
+                    </a:lnL>
+                    <a:lnR w="12700" cap="flat" cmpd="sng" algn="ctr">
+                      <a:solidFill>
+                        <a:srgbClr val="FFFFFF"/>
+                      </a:solidFill>
+                      <a:prstDash val="solid"/>
+                      <a:round/>
+                      <a:headEnd type="none" w="med" len="med"/>
+                      <a:tailEnd type="none" w="med" len="med"/>
+                    </a:lnR>
+                    <a:lnT w="12700" cap="flat" cmpd="sng" algn="ctr">
+                      <a:solidFill>
+                        <a:srgbClr val="FFFFFF"/>
+                      </a:solidFill>
+                      <a:prstDash val="solid"/>
+                      <a:round/>
+                      <a:headEnd type="none" w="med" len="med"/>
+                      <a:tailEnd type="none" w="med" len="med"/>
+                    </a:lnT>
+                    <a:lnB w="6350" cap="flat" cmpd="sng" algn="ctr">
+                      <a:solidFill>
+                        <a:srgbClr val="D9D9D9"/>
+                      </a:solidFill>
+                      <a:prstDash val="solid"/>
+                      <a:round/>
+                      <a:headEnd type="none" w="med" len="med"/>
+                      <a:tailEnd type="none" w="med" len="med"/>
+                    </a:lnB>
+                    <a:solidFill>
+                      <a:srgbClr val="FFFFFF"/>
+                    </a:solidFill>
+                  </a:tcPr>
+                </a:tc>
+                <a:tc>
+                  <a:txBody>
+                    <a:bodyPr/>
+                    <a:lstStyle/>
+                    <a:p>
+                      <a:pPr algn="ctr" indent="0" marL="0">
+                        <a:buNone/>
+                      </a:pPr>
+                      <a:r>
+                        <a:rPr lang="en-US" sz="1050" dirty="0">
+                          <a:solidFill>
+                            <a:srgbClr val="000000"/>
+                          </a:solidFill>
+                          <a:latin typeface="Times New Roman" pitchFamily="34" charset="0"/>
+                          <a:ea typeface="Times New Roman" pitchFamily="34" charset="-122"/>
+                          <a:cs typeface="Times New Roman" pitchFamily="34" charset="-120"/>
+                        </a:rPr>
+                        <a:t>31.50</a:t>
+                      </a:r>
+                      <a:endParaRPr lang="en-US" sz="1050" dirty="0">
+                        <a:latin typeface="Times New Roman" charset="0"/>
+                        <a:ea typeface="Times New Roman" charset="0"/>
+                        <a:cs typeface="Times New Roman" charset="0"/>
+                      </a:endParaRPr>
+                    </a:p>
+                  </a:txBody>
+                  <a:tcPr marL="91440" marR="91440" marT="45720" marB="45720" anchor="ctr">
+                    <a:lnL w="12700" cap="flat" cmpd="sng" algn="ctr">
+                      <a:solidFill>
+                        <a:srgbClr val="FFFFFF"/>
+                      </a:solidFill>
+                      <a:prstDash val="solid"/>
+                      <a:round/>
+                      <a:headEnd type="none" w="med" len="med"/>
+                      <a:tailEnd type="none" w="med" len="med"/>
+                    </a:lnL>
+                    <a:lnR w="12700" cap="flat" cmpd="sng" algn="ctr">
+                      <a:solidFill>
+                        <a:srgbClr val="FFFFFF"/>
+                      </a:solidFill>
+                      <a:prstDash val="solid"/>
+                      <a:round/>
+                      <a:headEnd type="none" w="med" len="med"/>
+                      <a:tailEnd type="none" w="med" len="med"/>
+                    </a:lnR>
+                    <a:lnT w="12700" cap="flat" cmpd="sng" algn="ctr">
+                      <a:solidFill>
+                        <a:srgbClr val="FFFFFF"/>
+                      </a:solidFill>
+                      <a:prstDash val="solid"/>
+                      <a:round/>
+                      <a:headEnd type="none" w="med" len="med"/>
+                      <a:tailEnd type="none" w="med" len="med"/>
+                    </a:lnT>
+                    <a:lnB w="6350" cap="flat" cmpd="sng" algn="ctr">
+                      <a:solidFill>
+                        <a:srgbClr val="D9D9D9"/>
+                      </a:solidFill>
+                      <a:prstDash val="solid"/>
+                      <a:round/>
+                      <a:headEnd type="none" w="med" len="med"/>
+                      <a:tailEnd type="none" w="med" len="med"/>
+                    </a:lnB>
+                    <a:solidFill>
+                      <a:srgbClr val="FFFFFF"/>
+                    </a:solidFill>
+                  </a:tcPr>
+                </a:tc>
+                <a:tc>
+                  <a:txBody>
+                    <a:bodyPr/>
+                    <a:lstStyle/>
+                    <a:p>
+                      <a:pPr algn="ctr" indent="0" marL="0">
+                        <a:buNone/>
+                      </a:pPr>
+                      <a:r>
+                        <a:rPr lang="en-US" sz="1050" dirty="0">
+                          <a:solidFill>
+                            <a:srgbClr val="000000"/>
+                          </a:solidFill>
+                          <a:latin typeface="Times New Roman" pitchFamily="34" charset="0"/>
+                          <a:ea typeface="Times New Roman" pitchFamily="34" charset="-122"/>
+                          <a:cs typeface="Times New Roman" pitchFamily="34" charset="-120"/>
+                        </a:rPr>
+                        <a:t>41.91</a:t>
+                      </a:r>
+                      <a:endParaRPr lang="en-US" sz="1050" dirty="0">
+                        <a:latin typeface="Times New Roman" charset="0"/>
+                        <a:ea typeface="Times New Roman" charset="0"/>
+                        <a:cs typeface="Times New Roman" charset="0"/>
+                      </a:endParaRPr>
+                    </a:p>
+                  </a:txBody>
+                  <a:tcPr marL="91440" marR="91440" marT="45720" marB="45720" anchor="ctr">
+                    <a:lnL w="12700" cap="flat" cmpd="sng" algn="ctr">
+                      <a:solidFill>
+                        <a:srgbClr val="FFFFFF"/>
+                      </a:solidFill>
+                      <a:prstDash val="solid"/>
+                      <a:round/>
+                      <a:headEnd type="none" w="med" len="med"/>
+                      <a:tailEnd type="none" w="med" len="med"/>
+                    </a:lnL>
+                    <a:lnR w="12700" cap="flat" cmpd="sng" algn="ctr">
+                      <a:solidFill>
+                        <a:srgbClr val="FFFFFF"/>
+                      </a:solidFill>
+                      <a:prstDash val="solid"/>
+                      <a:round/>
+                      <a:headEnd type="none" w="med" len="med"/>
+                      <a:tailEnd type="none" w="med" len="med"/>
+                    </a:lnR>
+                    <a:lnT w="12700" cap="flat" cmpd="sng" algn="ctr">
+                      <a:solidFill>
+                        <a:srgbClr val="FFFFFF"/>
+                      </a:solidFill>
+                      <a:prstDash val="solid"/>
+                      <a:round/>
+                      <a:headEnd type="none" w="med" len="med"/>
+                      <a:tailEnd type="none" w="med" len="med"/>
+                    </a:lnT>
+                    <a:lnB w="6350" cap="flat" cmpd="sng" algn="ctr">
+                      <a:solidFill>
+                        <a:srgbClr val="D9D9D9"/>
+                      </a:solidFill>
+                      <a:prstDash val="solid"/>
+                      <a:round/>
+                      <a:headEnd type="none" w="med" len="med"/>
+                      <a:tailEnd type="none" w="med" len="med"/>
+                    </a:lnB>
+                    <a:solidFill>
+                      <a:srgbClr val="FFFFFF"/>
+                    </a:solidFill>
+                  </a:tcPr>
+                </a:tc>
+                <a:tc>
+                  <a:txBody>
+                    <a:bodyPr/>
+                    <a:lstStyle/>
+                    <a:p>
+                      <a:pPr algn="ctr" indent="0" marL="0">
+                        <a:buNone/>
+                      </a:pPr>
+                      <a:r>
+                        <a:rPr lang="en-US" sz="1050" dirty="0">
+                          <a:solidFill>
+                            <a:srgbClr val="000000"/>
+                          </a:solidFill>
+                          <a:latin typeface="Times New Roman" pitchFamily="34" charset="0"/>
+                          <a:ea typeface="Times New Roman" pitchFamily="34" charset="-122"/>
+                          <a:cs typeface="Times New Roman" pitchFamily="34" charset="-120"/>
+                        </a:rPr>
+                        <a:t>89.39</a:t>
+                      </a:r>
+                      <a:endParaRPr lang="en-US" sz="1050" dirty="0">
+                        <a:latin typeface="Times New Roman" charset="0"/>
+                        <a:ea typeface="Times New Roman" charset="0"/>
+                        <a:cs typeface="Times New Roman" charset="0"/>
+                      </a:endParaRPr>
+                    </a:p>
+                  </a:txBody>
+                  <a:tcPr marL="91440" marR="91440" marT="45720" marB="45720" anchor="ctr">
+                    <a:lnL w="12700" cap="flat" cmpd="sng" algn="ctr">
+                      <a:solidFill>
+                        <a:srgbClr val="FFFFFF"/>
+                      </a:solidFill>
+                      <a:prstDash val="solid"/>
+                      <a:round/>
+                      <a:headEnd type="none" w="med" len="med"/>
+                      <a:tailEnd type="none" w="med" len="med"/>
+                    </a:lnL>
+                    <a:lnR w="12700" cap="flat" cmpd="sng" algn="ctr">
+                      <a:solidFill>
+                        <a:srgbClr val="FFFFFF"/>
+                      </a:solidFill>
+                      <a:prstDash val="solid"/>
+                      <a:round/>
+                      <a:headEnd type="none" w="med" len="med"/>
+                      <a:tailEnd type="none" w="med" len="med"/>
+                    </a:lnR>
+                    <a:lnT w="12700" cap="flat" cmpd="sng" algn="ctr">
+                      <a:solidFill>
+                        <a:srgbClr val="FFFFFF"/>
+                      </a:solidFill>
+                      <a:prstDash val="solid"/>
+                      <a:round/>
+                      <a:headEnd type="none" w="med" len="med"/>
+                      <a:tailEnd type="none" w="med" len="med"/>
+                    </a:lnT>
+                    <a:lnB w="6350" cap="flat" cmpd="sng" algn="ctr">
+                      <a:solidFill>
+                        <a:srgbClr val="D9D9D9"/>
+                      </a:solidFill>
+                      <a:prstDash val="solid"/>
+                      <a:round/>
+                      <a:headEnd type="none" w="med" len="med"/>
+                      <a:tailEnd type="none" w="med" len="med"/>
+                    </a:lnB>
+                    <a:solidFill>
+                      <a:srgbClr val="FFFFFF"/>
+                    </a:solidFill>
+                  </a:tcPr>
+                </a:tc>
+              </a:tr>
+              <a:tr h="283464">
+                <a:tc>
+                  <a:txBody>
+                    <a:bodyPr/>
+                    <a:lstStyle/>
+                    <a:p>
+                      <a:pPr algn="l" indent="0" marL="0">
+                        <a:buNone/>
+                      </a:pPr>
+                      <a:endParaRPr lang="en-US" sz="1050" dirty="0">
+                        <a:latin typeface="Times New Roman" charset="0"/>
+                        <a:ea typeface="Times New Roman" charset="0"/>
+                        <a:cs typeface="Times New Roman" charset="0"/>
+                      </a:endParaRPr>
+                    </a:p>
+                  </a:txBody>
+                  <a:tcPr marL="91440" marR="91440" marT="45720" marB="45720" anchor="ctr">
+                    <a:lnL w="12700" cap="flat" cmpd="sng" algn="ctr">
+                      <a:solidFill>
+                        <a:srgbClr val="FFFFFF"/>
+                      </a:solidFill>
+                      <a:prstDash val="solid"/>
+                      <a:round/>
+                      <a:headEnd type="none" w="med" len="med"/>
+                      <a:tailEnd type="none" w="med" len="med"/>
+                    </a:lnL>
+                    <a:lnR w="12700" cap="flat" cmpd="sng" algn="ctr">
+                      <a:solidFill>
+                        <a:srgbClr val="FFFFFF"/>
+                      </a:solidFill>
+                      <a:prstDash val="solid"/>
+                      <a:round/>
+                      <a:headEnd type="none" w="med" len="med"/>
+                      <a:tailEnd type="none" w="med" len="med"/>
+                    </a:lnR>
+                    <a:lnT w="12700" cap="flat" cmpd="sng" algn="ctr">
+                      <a:solidFill>
+                        <a:srgbClr val="FFFFFF"/>
+                      </a:solidFill>
+                      <a:prstDash val="solid"/>
+                      <a:round/>
+                      <a:headEnd type="none" w="med" len="med"/>
+                      <a:tailEnd type="none" w="med" len="med"/>
+                    </a:lnT>
+                    <a:lnB w="6350" cap="flat" cmpd="sng" algn="ctr">
+                      <a:solidFill>
+                        <a:srgbClr val="D9D9D9"/>
+                      </a:solidFill>
+                      <a:prstDash val="solid"/>
+                      <a:round/>
+                      <a:headEnd type="none" w="med" len="med"/>
+                      <a:tailEnd type="none" w="med" len="med"/>
+                    </a:lnB>
+                    <a:solidFill>
+                      <a:srgbClr val="FFFFFF"/>
+                    </a:solidFill>
+                  </a:tcPr>
+                </a:tc>
+                <a:tc>
+                  <a:txBody>
+                    <a:bodyPr/>
+                    <a:lstStyle/>
+                    <a:p>
+                      <a:pPr algn="l" indent="0" marL="0">
+                        <a:buNone/>
+                      </a:pPr>
+                      <a:r>
+                        <a:rPr lang="en-US" sz="1050" dirty="0">
+                          <a:solidFill>
+                            <a:srgbClr val="000000"/>
+                          </a:solidFill>
+                          <a:latin typeface="Times New Roman" pitchFamily="34" charset="0"/>
+                          <a:ea typeface="Times New Roman" pitchFamily="34" charset="-122"/>
+                          <a:cs typeface="Times New Roman" pitchFamily="34" charset="-120"/>
+                        </a:rPr>
+                        <a:t>No-skill baseline</a:t>
+                      </a:r>
+                      <a:endParaRPr lang="en-US" sz="1050" dirty="0">
+                        <a:latin typeface="Times New Roman" charset="0"/>
+                        <a:ea typeface="Times New Roman" charset="0"/>
+                        <a:cs typeface="Times New Roman" charset="0"/>
+                      </a:endParaRPr>
+                    </a:p>
+                  </a:txBody>
+                  <a:tcPr marL="91440" marR="91440" marT="45720" marB="45720" anchor="ctr">
+                    <a:lnL w="12700" cap="flat" cmpd="sng" algn="ctr">
+                      <a:solidFill>
+                        <a:srgbClr val="FFFFFF"/>
+                      </a:solidFill>
+                      <a:prstDash val="solid"/>
+                      <a:round/>
+                      <a:headEnd type="none" w="med" len="med"/>
+                      <a:tailEnd type="none" w="med" len="med"/>
+                    </a:lnL>
+                    <a:lnR w="12700" cap="flat" cmpd="sng" algn="ctr">
+                      <a:solidFill>
+                        <a:srgbClr val="FFFFFF"/>
+                      </a:solidFill>
+                      <a:prstDash val="solid"/>
+                      <a:round/>
+                      <a:headEnd type="none" w="med" len="med"/>
+                      <a:tailEnd type="none" w="med" len="med"/>
+                    </a:lnR>
+                    <a:lnT w="12700" cap="flat" cmpd="sng" algn="ctr">
+                      <a:solidFill>
+                        <a:srgbClr val="FFFFFF"/>
+                      </a:solidFill>
+                      <a:prstDash val="solid"/>
+                      <a:round/>
+                      <a:headEnd type="none" w="med" len="med"/>
+                      <a:tailEnd type="none" w="med" len="med"/>
+                    </a:lnT>
+                    <a:lnB w="6350" cap="flat" cmpd="sng" algn="ctr">
+                      <a:solidFill>
+                        <a:srgbClr val="D9D9D9"/>
+                      </a:solidFill>
+                      <a:prstDash val="solid"/>
+                      <a:round/>
+                      <a:headEnd type="none" w="med" len="med"/>
+                      <a:tailEnd type="none" w="med" len="med"/>
+                    </a:lnB>
+                    <a:solidFill>
+                      <a:srgbClr val="FFFFFF"/>
+                    </a:solidFill>
+                  </a:tcPr>
+                </a:tc>
+                <a:tc>
+                  <a:txBody>
+                    <a:bodyPr/>
+                    <a:lstStyle/>
+                    <a:p>
+                      <a:pPr algn="ctr" indent="0" marL="0">
+                        <a:buNone/>
+                      </a:pPr>
+                      <a:r>
+                        <a:rPr lang="en-US" sz="1050" dirty="0">
+                          <a:solidFill>
+                            <a:srgbClr val="000000"/>
+                          </a:solidFill>
+                          <a:latin typeface="Times New Roman" pitchFamily="34" charset="0"/>
+                          <a:ea typeface="Times New Roman" pitchFamily="34" charset="-122"/>
+                          <a:cs typeface="Times New Roman" pitchFamily="34" charset="-120"/>
+                        </a:rPr>
+                        <a:t>−0.074</a:t>
+                      </a:r>
+                      <a:endParaRPr lang="en-US" sz="1050" dirty="0">
+                        <a:latin typeface="Times New Roman" charset="0"/>
+                        <a:ea typeface="Times New Roman" charset="0"/>
+                        <a:cs typeface="Times New Roman" charset="0"/>
+                      </a:endParaRPr>
+                    </a:p>
+                  </a:txBody>
+                  <a:tcPr marL="91440" marR="91440" marT="45720" marB="45720" anchor="ctr">
+                    <a:lnL w="12700" cap="flat" cmpd="sng" algn="ctr">
+                      <a:solidFill>
+                        <a:srgbClr val="FFFFFF"/>
+                      </a:solidFill>
+                      <a:prstDash val="solid"/>
+                      <a:round/>
+                      <a:headEnd type="none" w="med" len="med"/>
+                      <a:tailEnd type="none" w="med" len="med"/>
+                    </a:lnL>
+                    <a:lnR w="12700" cap="flat" cmpd="sng" algn="ctr">
+                      <a:solidFill>
+                        <a:srgbClr val="FFFFFF"/>
+                      </a:solidFill>
+                      <a:prstDash val="solid"/>
+                      <a:round/>
+                      <a:headEnd type="none" w="med" len="med"/>
+                      <a:tailEnd type="none" w="med" len="med"/>
+                    </a:lnR>
+                    <a:lnT w="12700" cap="flat" cmpd="sng" algn="ctr">
+                      <a:solidFill>
+                        <a:srgbClr val="FFFFFF"/>
+                      </a:solidFill>
+                      <a:prstDash val="solid"/>
+                      <a:round/>
+                      <a:headEnd type="none" w="med" len="med"/>
+                      <a:tailEnd type="none" w="med" len="med"/>
+                    </a:lnT>
+                    <a:lnB w="6350" cap="flat" cmpd="sng" algn="ctr">
+                      <a:solidFill>
+                        <a:srgbClr val="D9D9D9"/>
+                      </a:solidFill>
+                      <a:prstDash val="solid"/>
+                      <a:round/>
+                      <a:headEnd type="none" w="med" len="med"/>
+                      <a:tailEnd type="none" w="med" len="med"/>
+                    </a:lnB>
+                    <a:solidFill>
+                      <a:srgbClr val="FFFFFF"/>
+                    </a:solidFill>
+                  </a:tcPr>
+                </a:tc>
+                <a:tc>
+                  <a:txBody>
+                    <a:bodyPr/>
+                    <a:lstStyle/>
+                    <a:p>
+                      <a:pPr algn="ctr" indent="0" marL="0">
+                        <a:buNone/>
+                      </a:pPr>
+                      <a:r>
+                        <a:rPr lang="en-US" sz="1050" dirty="0">
+                          <a:solidFill>
+                            <a:srgbClr val="000000"/>
+                          </a:solidFill>
+                          <a:latin typeface="Times New Roman" pitchFamily="34" charset="0"/>
+                          <a:ea typeface="Times New Roman" pitchFamily="34" charset="-122"/>
+                          <a:cs typeface="Times New Roman" pitchFamily="34" charset="-120"/>
+                        </a:rPr>
+                        <a:t>2.610</a:t>
+                      </a:r>
+                      <a:endParaRPr lang="en-US" sz="1050" dirty="0">
+                        <a:latin typeface="Times New Roman" charset="0"/>
+                        <a:ea typeface="Times New Roman" charset="0"/>
+                        <a:cs typeface="Times New Roman" charset="0"/>
+                      </a:endParaRPr>
+                    </a:p>
+                  </a:txBody>
+                  <a:tcPr marL="91440" marR="91440" marT="45720" marB="45720" anchor="ctr">
+                    <a:lnL w="12700" cap="flat" cmpd="sng" algn="ctr">
+                      <a:solidFill>
+                        <a:srgbClr val="FFFFFF"/>
+                      </a:solidFill>
+                      <a:prstDash val="solid"/>
+                      <a:round/>
+                      <a:headEnd type="none" w="med" len="med"/>
+                      <a:tailEnd type="none" w="med" len="med"/>
+                    </a:lnL>
+                    <a:lnR w="12700" cap="flat" cmpd="sng" algn="ctr">
+                      <a:solidFill>
+                        <a:srgbClr val="FFFFFF"/>
+                      </a:solidFill>
+                      <a:prstDash val="solid"/>
+                      <a:round/>
+                      <a:headEnd type="none" w="med" len="med"/>
+                      <a:tailEnd type="none" w="med" len="med"/>
+                    </a:lnR>
+                    <a:lnT w="12700" cap="flat" cmpd="sng" algn="ctr">
+                      <a:solidFill>
+                        <a:srgbClr val="FFFFFF"/>
+                      </a:solidFill>
+                      <a:prstDash val="solid"/>
+                      <a:round/>
+                      <a:headEnd type="none" w="med" len="med"/>
+                      <a:tailEnd type="none" w="med" len="med"/>
+                    </a:lnT>
+                    <a:lnB w="6350" cap="flat" cmpd="sng" algn="ctr">
+                      <a:solidFill>
+                        <a:srgbClr val="D9D9D9"/>
+                      </a:solidFill>
+                      <a:prstDash val="solid"/>
+                      <a:round/>
+                      <a:headEnd type="none" w="med" len="med"/>
+                      <a:tailEnd type="none" w="med" len="med"/>
+                    </a:lnB>
+                    <a:solidFill>
+                      <a:srgbClr val="FFFFFF"/>
+                    </a:solidFill>
+                  </a:tcPr>
+                </a:tc>
+                <a:tc>
+                  <a:txBody>
+                    <a:bodyPr/>
+                    <a:lstStyle/>
+                    <a:p>
+                      <a:pPr algn="ctr" indent="0" marL="0">
+                        <a:buNone/>
+                      </a:pPr>
+                      <a:r>
+                        <a:rPr lang="en-US" sz="1050" dirty="0">
+                          <a:solidFill>
+                            <a:srgbClr val="000000"/>
+                          </a:solidFill>
+                          <a:latin typeface="Times New Roman" pitchFamily="34" charset="0"/>
+                          <a:ea typeface="Times New Roman" pitchFamily="34" charset="-122"/>
+                          <a:cs typeface="Times New Roman" pitchFamily="34" charset="-120"/>
+                        </a:rPr>
+                        <a:t>30.30</a:t>
+                      </a:r>
+                      <a:endParaRPr lang="en-US" sz="1050" dirty="0">
+                        <a:latin typeface="Times New Roman" charset="0"/>
+                        <a:ea typeface="Times New Roman" charset="0"/>
+                        <a:cs typeface="Times New Roman" charset="0"/>
+                      </a:endParaRPr>
+                    </a:p>
+                  </a:txBody>
+                  <a:tcPr marL="91440" marR="91440" marT="45720" marB="45720" anchor="ctr">
+                    <a:lnL w="12700" cap="flat" cmpd="sng" algn="ctr">
+                      <a:solidFill>
+                        <a:srgbClr val="FFFFFF"/>
+                      </a:solidFill>
+                      <a:prstDash val="solid"/>
+                      <a:round/>
+                      <a:headEnd type="none" w="med" len="med"/>
+                      <a:tailEnd type="none" w="med" len="med"/>
+                    </a:lnL>
+                    <a:lnR w="12700" cap="flat" cmpd="sng" algn="ctr">
+                      <a:solidFill>
+                        <a:srgbClr val="FFFFFF"/>
+                      </a:solidFill>
+                      <a:prstDash val="solid"/>
+                      <a:round/>
+                      <a:headEnd type="none" w="med" len="med"/>
+                      <a:tailEnd type="none" w="med" len="med"/>
+                    </a:lnR>
+                    <a:lnT w="12700" cap="flat" cmpd="sng" algn="ctr">
+                      <a:solidFill>
+                        <a:srgbClr val="FFFFFF"/>
+                      </a:solidFill>
+                      <a:prstDash val="solid"/>
+                      <a:round/>
+                      <a:headEnd type="none" w="med" len="med"/>
+                      <a:tailEnd type="none" w="med" len="med"/>
+                    </a:lnT>
+                    <a:lnB w="6350" cap="flat" cmpd="sng" algn="ctr">
+                      <a:solidFill>
+                        <a:srgbClr val="D9D9D9"/>
+                      </a:solidFill>
+                      <a:prstDash val="solid"/>
+                      <a:round/>
+                      <a:headEnd type="none" w="med" len="med"/>
+                      <a:tailEnd type="none" w="med" len="med"/>
+                    </a:lnB>
+                    <a:solidFill>
+                      <a:srgbClr val="FFFFFF"/>
+                    </a:solidFill>
+                  </a:tcPr>
+                </a:tc>
+                <a:tc>
+                  <a:txBody>
+                    <a:bodyPr/>
+                    <a:lstStyle/>
+                    <a:p>
+                      <a:pPr algn="ctr" indent="0" marL="0">
+                        <a:buNone/>
+                      </a:pPr>
+                      <a:r>
+                        <a:rPr lang="en-US" sz="1050" dirty="0">
+                          <a:solidFill>
+                            <a:srgbClr val="000000"/>
+                          </a:solidFill>
+                          <a:latin typeface="Times New Roman" pitchFamily="34" charset="0"/>
+                          <a:ea typeface="Times New Roman" pitchFamily="34" charset="-122"/>
+                          <a:cs typeface="Times New Roman" pitchFamily="34" charset="-120"/>
+                        </a:rPr>
+                        <a:t>43.74</a:t>
+                      </a:r>
+                      <a:endParaRPr lang="en-US" sz="1050" dirty="0">
+                        <a:latin typeface="Times New Roman" charset="0"/>
+                        <a:ea typeface="Times New Roman" charset="0"/>
+                        <a:cs typeface="Times New Roman" charset="0"/>
+                      </a:endParaRPr>
+                    </a:p>
+                  </a:txBody>
+                  <a:tcPr marL="91440" marR="91440" marT="45720" marB="45720" anchor="ctr">
+                    <a:lnL w="12700" cap="flat" cmpd="sng" algn="ctr">
+                      <a:solidFill>
+                        <a:srgbClr val="FFFFFF"/>
+                      </a:solidFill>
+                      <a:prstDash val="solid"/>
+                      <a:round/>
+                      <a:headEnd type="none" w="med" len="med"/>
+                      <a:tailEnd type="none" w="med" len="med"/>
+                    </a:lnL>
+                    <a:lnR w="12700" cap="flat" cmpd="sng" algn="ctr">
+                      <a:solidFill>
+                        <a:srgbClr val="FFFFFF"/>
+                      </a:solidFill>
+                      <a:prstDash val="solid"/>
+                      <a:round/>
+                      <a:headEnd type="none" w="med" len="med"/>
+                      <a:tailEnd type="none" w="med" len="med"/>
+                    </a:lnR>
+                    <a:lnT w="12700" cap="flat" cmpd="sng" algn="ctr">
+                      <a:solidFill>
+                        <a:srgbClr val="FFFFFF"/>
+                      </a:solidFill>
+                      <a:prstDash val="solid"/>
+                      <a:round/>
+                      <a:headEnd type="none" w="med" len="med"/>
+                      <a:tailEnd type="none" w="med" len="med"/>
+                    </a:lnT>
+                    <a:lnB w="6350" cap="flat" cmpd="sng" algn="ctr">
+                      <a:solidFill>
+                        <a:srgbClr val="D9D9D9"/>
+                      </a:solidFill>
+                      <a:prstDash val="solid"/>
+                      <a:round/>
+                      <a:headEnd type="none" w="med" len="med"/>
+                      <a:tailEnd type="none" w="med" len="med"/>
+                    </a:lnB>
+                    <a:solidFill>
+                      <a:srgbClr val="FFFFFF"/>
+                    </a:solidFill>
+                  </a:tcPr>
+                </a:tc>
+                <a:tc>
+                  <a:txBody>
+                    <a:bodyPr/>
+                    <a:lstStyle/>
+                    <a:p>
+                      <a:pPr algn="ctr" indent="0" marL="0">
+                        <a:buNone/>
+                      </a:pPr>
+                      <a:r>
+                        <a:rPr lang="en-US" sz="1050" dirty="0">
+                          <a:solidFill>
+                            <a:srgbClr val="000000"/>
+                          </a:solidFill>
+                          <a:latin typeface="Times New Roman" pitchFamily="34" charset="0"/>
+                          <a:ea typeface="Times New Roman" pitchFamily="34" charset="-122"/>
+                          <a:cs typeface="Times New Roman" pitchFamily="34" charset="-120"/>
+                        </a:rPr>
+                        <a:t>90.01</a:t>
+                      </a:r>
+                      <a:endParaRPr lang="en-US" sz="1050" dirty="0">
+                        <a:latin typeface="Times New Roman" charset="0"/>
+                        <a:ea typeface="Times New Roman" charset="0"/>
+                        <a:cs typeface="Times New Roman" charset="0"/>
+                      </a:endParaRPr>
+                    </a:p>
+                  </a:txBody>
+                  <a:tcPr marL="91440" marR="91440" marT="45720" marB="45720" anchor="ctr">
+                    <a:lnL w="12700" cap="flat" cmpd="sng" algn="ctr">
+                      <a:solidFill>
+                        <a:srgbClr val="FFFFFF"/>
+                      </a:solidFill>
+                      <a:prstDash val="solid"/>
+                      <a:round/>
+                      <a:headEnd type="none" w="med" len="med"/>
+                      <a:tailEnd type="none" w="med" len="med"/>
+                    </a:lnL>
+                    <a:lnR w="12700" cap="flat" cmpd="sng" algn="ctr">
+                      <a:solidFill>
+                        <a:srgbClr val="FFFFFF"/>
+                      </a:solidFill>
+                      <a:prstDash val="solid"/>
+                      <a:round/>
+                      <a:headEnd type="none" w="med" len="med"/>
+                      <a:tailEnd type="none" w="med" len="med"/>
+                    </a:lnR>
+                    <a:lnT w="12700" cap="flat" cmpd="sng" algn="ctr">
+                      <a:solidFill>
+                        <a:srgbClr val="FFFFFF"/>
+                      </a:solidFill>
+                      <a:prstDash val="solid"/>
+                      <a:round/>
+                      <a:headEnd type="none" w="med" len="med"/>
+                      <a:tailEnd type="none" w="med" len="med"/>
+                    </a:lnT>
+                    <a:lnB w="6350" cap="flat" cmpd="sng" algn="ctr">
+                      <a:solidFill>
+                        <a:srgbClr val="D9D9D9"/>
+                      </a:solidFill>
+                      <a:prstDash val="solid"/>
+                      <a:round/>
+                      <a:headEnd type="none" w="med" len="med"/>
+                      <a:tailEnd type="none" w="med" len="med"/>
+                    </a:lnB>
+                    <a:solidFill>
+                      <a:srgbClr val="FFFFFF"/>
+                    </a:solidFill>
+                  </a:tcPr>
+                </a:tc>
+              </a:tr>
+              <a:tr h="283464">
+                <a:tc>
+                  <a:txBody>
+                    <a:bodyPr/>
+                    <a:lstStyle/>
+                    <a:p>
+                      <a:pPr algn="l" indent="0" marL="0">
+                        <a:buNone/>
+                      </a:pPr>
+                      <a:r>
+                        <a:rPr lang="en-US" sz="1050" dirty="0">
+                          <a:solidFill>
+                            <a:srgbClr val="000000"/>
+                          </a:solidFill>
+                          <a:latin typeface="Times New Roman" pitchFamily="34" charset="0"/>
+                          <a:ea typeface="Times New Roman" pitchFamily="34" charset="-122"/>
+                          <a:cs typeface="Times New Roman" pitchFamily="34" charset="-120"/>
+                        </a:rPr>
+                        <a:t>3. Leave-one-subject-out</a:t>
+                      </a:r>
+                      <a:endParaRPr lang="en-US" sz="1050" dirty="0">
+                        <a:latin typeface="Times New Roman" charset="0"/>
+                        <a:ea typeface="Times New Roman" charset="0"/>
+                        <a:cs typeface="Times New Roman" charset="0"/>
+                      </a:endParaRPr>
+                    </a:p>
+                  </a:txBody>
+                  <a:tcPr marL="91440" marR="91440" marT="45720" marB="45720" anchor="ctr">
+                    <a:lnL w="12700" cap="flat" cmpd="sng" algn="ctr">
+                      <a:solidFill>
+                        <a:srgbClr val="FFFFFF"/>
+                      </a:solidFill>
+                      <a:prstDash val="solid"/>
+                      <a:round/>
+                      <a:headEnd type="none" w="med" len="med"/>
+                      <a:tailEnd type="none" w="med" len="med"/>
+                    </a:lnL>
+                    <a:lnR w="12700" cap="flat" cmpd="sng" algn="ctr">
+                      <a:solidFill>
+                        <a:srgbClr val="FFFFFF"/>
+                      </a:solidFill>
+                      <a:prstDash val="solid"/>
+                      <a:round/>
+                      <a:headEnd type="none" w="med" len="med"/>
+                      <a:tailEnd type="none" w="med" len="med"/>
+                    </a:lnR>
+                    <a:lnT w="12700" cap="flat" cmpd="sng" algn="ctr">
+                      <a:solidFill>
+                        <a:srgbClr val="FFFFFF"/>
+                      </a:solidFill>
+                      <a:prstDash val="solid"/>
+                      <a:round/>
+                      <a:headEnd type="none" w="med" len="med"/>
+                      <a:tailEnd type="none" w="med" len="med"/>
+                    </a:lnT>
+                    <a:lnB w="6350" cap="flat" cmpd="sng" algn="ctr">
+                      <a:solidFill>
+                        <a:srgbClr val="D9D9D9"/>
+                      </a:solidFill>
+                      <a:prstDash val="solid"/>
+                      <a:round/>
+                      <a:headEnd type="none" w="med" len="med"/>
+                      <a:tailEnd type="none" w="med" len="med"/>
+                    </a:lnB>
+                    <a:solidFill>
+                      <a:srgbClr val="FFFFFF"/>
+                    </a:solidFill>
+                  </a:tcPr>
+                </a:tc>
+                <a:tc>
+                  <a:txBody>
+                    <a:bodyPr/>
+                    <a:lstStyle/>
+                    <a:p>
+                      <a:pPr algn="l" indent="0" marL="0">
+                        <a:buNone/>
+                      </a:pPr>
+                      <a:r>
+                        <a:rPr lang="en-US" sz="1050" dirty="0">
+                          <a:solidFill>
+                            <a:srgbClr val="000000"/>
+                          </a:solidFill>
+                          <a:latin typeface="Times New Roman" pitchFamily="34" charset="0"/>
+                          <a:ea typeface="Times New Roman" pitchFamily="34" charset="-122"/>
+                          <a:cs typeface="Times New Roman" pitchFamily="34" charset="-120"/>
+                        </a:rPr>
+                        <a:t>Choquet fusion</a:t>
+                      </a:r>
+                      <a:endParaRPr lang="en-US" sz="1050" dirty="0">
+                        <a:latin typeface="Times New Roman" charset="0"/>
+                        <a:ea typeface="Times New Roman" charset="0"/>
+                        <a:cs typeface="Times New Roman" charset="0"/>
+                      </a:endParaRPr>
+                    </a:p>
+                  </a:txBody>
+                  <a:tcPr marL="91440" marR="91440" marT="45720" marB="45720" anchor="ctr">
+                    <a:lnL w="12700" cap="flat" cmpd="sng" algn="ctr">
+                      <a:solidFill>
+                        <a:srgbClr val="FFFFFF"/>
+                      </a:solidFill>
+                      <a:prstDash val="solid"/>
+                      <a:round/>
+                      <a:headEnd type="none" w="med" len="med"/>
+                      <a:tailEnd type="none" w="med" len="med"/>
+                    </a:lnL>
+                    <a:lnR w="12700" cap="flat" cmpd="sng" algn="ctr">
+                      <a:solidFill>
+                        <a:srgbClr val="FFFFFF"/>
+                      </a:solidFill>
+                      <a:prstDash val="solid"/>
+                      <a:round/>
+                      <a:headEnd type="none" w="med" len="med"/>
+                      <a:tailEnd type="none" w="med" len="med"/>
+                    </a:lnR>
+                    <a:lnT w="12700" cap="flat" cmpd="sng" algn="ctr">
+                      <a:solidFill>
+                        <a:srgbClr val="FFFFFF"/>
+                      </a:solidFill>
+                      <a:prstDash val="solid"/>
+                      <a:round/>
+                      <a:headEnd type="none" w="med" len="med"/>
+                      <a:tailEnd type="none" w="med" len="med"/>
+                    </a:lnT>
+                    <a:lnB w="6350" cap="flat" cmpd="sng" algn="ctr">
+                      <a:solidFill>
+                        <a:srgbClr val="D9D9D9"/>
+                      </a:solidFill>
+                      <a:prstDash val="solid"/>
+                      <a:round/>
+                      <a:headEnd type="none" w="med" len="med"/>
+                      <a:tailEnd type="none" w="med" len="med"/>
+                    </a:lnB>
+                    <a:solidFill>
+                      <a:srgbClr val="FFFFFF"/>
+                    </a:solidFill>
+                  </a:tcPr>
+                </a:tc>
+                <a:tc>
+                  <a:txBody>
+                    <a:bodyPr/>
+                    <a:lstStyle/>
+                    <a:p>
+                      <a:pPr algn="ctr" indent="0" marL="0">
+                        <a:buNone/>
+                      </a:pPr>
+                      <a:r>
+                        <a:rPr lang="en-US" sz="1050" dirty="0">
+                          <a:solidFill>
+                            <a:srgbClr val="000000"/>
+                          </a:solidFill>
+                          <a:latin typeface="Times New Roman" pitchFamily="34" charset="0"/>
+                          <a:ea typeface="Times New Roman" pitchFamily="34" charset="-122"/>
+                          <a:cs typeface="Times New Roman" pitchFamily="34" charset="-120"/>
+                        </a:rPr>
+                        <a:t>−0.097</a:t>
+                      </a:r>
+                      <a:endParaRPr lang="en-US" sz="1050" dirty="0">
+                        <a:latin typeface="Times New Roman" charset="0"/>
+                        <a:ea typeface="Times New Roman" charset="0"/>
+                        <a:cs typeface="Times New Roman" charset="0"/>
+                      </a:endParaRPr>
+                    </a:p>
+                  </a:txBody>
+                  <a:tcPr marL="91440" marR="91440" marT="45720" marB="45720" anchor="ctr">
+                    <a:lnL w="12700" cap="flat" cmpd="sng" algn="ctr">
+                      <a:solidFill>
+                        <a:srgbClr val="FFFFFF"/>
+                      </a:solidFill>
+                      <a:prstDash val="solid"/>
+                      <a:round/>
+                      <a:headEnd type="none" w="med" len="med"/>
+                      <a:tailEnd type="none" w="med" len="med"/>
+                    </a:lnL>
+                    <a:lnR w="12700" cap="flat" cmpd="sng" algn="ctr">
+                      <a:solidFill>
+                        <a:srgbClr val="FFFFFF"/>
+                      </a:solidFill>
+                      <a:prstDash val="solid"/>
+                      <a:round/>
+                      <a:headEnd type="none" w="med" len="med"/>
+                      <a:tailEnd type="none" w="med" len="med"/>
+                    </a:lnR>
+                    <a:lnT w="12700" cap="flat" cmpd="sng" algn="ctr">
+                      <a:solidFill>
+                        <a:srgbClr val="FFFFFF"/>
+                      </a:solidFill>
+                      <a:prstDash val="solid"/>
+                      <a:round/>
+                      <a:headEnd type="none" w="med" len="med"/>
+                      <a:tailEnd type="none" w="med" len="med"/>
+                    </a:lnT>
+                    <a:lnB w="6350" cap="flat" cmpd="sng" algn="ctr">
+                      <a:solidFill>
+                        <a:srgbClr val="D9D9D9"/>
+                      </a:solidFill>
+                      <a:prstDash val="solid"/>
+                      <a:round/>
+                      <a:headEnd type="none" w="med" len="med"/>
+                      <a:tailEnd type="none" w="med" len="med"/>
+                    </a:lnB>
+                    <a:solidFill>
+                      <a:srgbClr val="FFFFFF"/>
+                    </a:solidFill>
+                  </a:tcPr>
+                </a:tc>
+                <a:tc>
+                  <a:txBody>
+                    <a:bodyPr/>
+                    <a:lstStyle/>
+                    <a:p>
+                      <a:pPr algn="ctr" indent="0" marL="0">
+                        <a:buNone/>
+                      </a:pPr>
+                      <a:r>
+                        <a:rPr lang="en-US" sz="1050" dirty="0">
+                          <a:solidFill>
+                            <a:srgbClr val="000000"/>
+                          </a:solidFill>
+                          <a:latin typeface="Times New Roman" pitchFamily="34" charset="0"/>
+                          <a:ea typeface="Times New Roman" pitchFamily="34" charset="-122"/>
+                          <a:cs typeface="Times New Roman" pitchFamily="34" charset="-120"/>
+                        </a:rPr>
+                        <a:t>2.639</a:t>
+                      </a:r>
+                      <a:endParaRPr lang="en-US" sz="1050" dirty="0">
+                        <a:latin typeface="Times New Roman" charset="0"/>
+                        <a:ea typeface="Times New Roman" charset="0"/>
+                        <a:cs typeface="Times New Roman" charset="0"/>
+                      </a:endParaRPr>
+                    </a:p>
+                  </a:txBody>
+                  <a:tcPr marL="91440" marR="91440" marT="45720" marB="45720" anchor="ctr">
+                    <a:lnL w="12700" cap="flat" cmpd="sng" algn="ctr">
+                      <a:solidFill>
+                        <a:srgbClr val="FFFFFF"/>
+                      </a:solidFill>
+                      <a:prstDash val="solid"/>
+                      <a:round/>
+                      <a:headEnd type="none" w="med" len="med"/>
+                      <a:tailEnd type="none" w="med" len="med"/>
+                    </a:lnL>
+                    <a:lnR w="12700" cap="flat" cmpd="sng" algn="ctr">
+                      <a:solidFill>
+                        <a:srgbClr val="FFFFFF"/>
+                      </a:solidFill>
+                      <a:prstDash val="solid"/>
+                      <a:round/>
+                      <a:headEnd type="none" w="med" len="med"/>
+                      <a:tailEnd type="none" w="med" len="med"/>
+                    </a:lnR>
+                    <a:lnT w="12700" cap="flat" cmpd="sng" algn="ctr">
+                      <a:solidFill>
+                        <a:srgbClr val="FFFFFF"/>
+                      </a:solidFill>
+                      <a:prstDash val="solid"/>
+                      <a:round/>
+                      <a:headEnd type="none" w="med" len="med"/>
+                      <a:tailEnd type="none" w="med" len="med"/>
+                    </a:lnT>
+                    <a:lnB w="6350" cap="flat" cmpd="sng" algn="ctr">
+                      <a:solidFill>
+                        <a:srgbClr val="D9D9D9"/>
+                      </a:solidFill>
+                      <a:prstDash val="solid"/>
+                      <a:round/>
+                      <a:headEnd type="none" w="med" len="med"/>
+                      <a:tailEnd type="none" w="med" len="med"/>
+                    </a:lnB>
+                    <a:solidFill>
+                      <a:srgbClr val="FFFFFF"/>
+                    </a:solidFill>
+                  </a:tcPr>
+                </a:tc>
+                <a:tc>
+                  <a:txBody>
+                    <a:bodyPr/>
+                    <a:lstStyle/>
+                    <a:p>
+                      <a:pPr algn="ctr" indent="0" marL="0">
+                        <a:buNone/>
+                      </a:pPr>
+                      <a:r>
+                        <a:rPr lang="en-US" sz="1050" dirty="0">
+                          <a:solidFill>
+                            <a:srgbClr val="000000"/>
+                          </a:solidFill>
+                          <a:latin typeface="Times New Roman" pitchFamily="34" charset="0"/>
+                          <a:ea typeface="Times New Roman" pitchFamily="34" charset="-122"/>
+                          <a:cs typeface="Times New Roman" pitchFamily="34" charset="-120"/>
+                        </a:rPr>
+                        <a:t>28.86</a:t>
+                      </a:r>
+                      <a:endParaRPr lang="en-US" sz="1050" dirty="0">
+                        <a:latin typeface="Times New Roman" charset="0"/>
+                        <a:ea typeface="Times New Roman" charset="0"/>
+                        <a:cs typeface="Times New Roman" charset="0"/>
+                      </a:endParaRPr>
+                    </a:p>
+                  </a:txBody>
+                  <a:tcPr marL="91440" marR="91440" marT="45720" marB="45720" anchor="ctr">
+                    <a:lnL w="12700" cap="flat" cmpd="sng" algn="ctr">
+                      <a:solidFill>
+                        <a:srgbClr val="FFFFFF"/>
+                      </a:solidFill>
+                      <a:prstDash val="solid"/>
+                      <a:round/>
+                      <a:headEnd type="none" w="med" len="med"/>
+                      <a:tailEnd type="none" w="med" len="med"/>
+                    </a:lnL>
+                    <a:lnR w="12700" cap="flat" cmpd="sng" algn="ctr">
+                      <a:solidFill>
+                        <a:srgbClr val="FFFFFF"/>
+                      </a:solidFill>
+                      <a:prstDash val="solid"/>
+                      <a:round/>
+                      <a:headEnd type="none" w="med" len="med"/>
+                      <a:tailEnd type="none" w="med" len="med"/>
+                    </a:lnR>
+                    <a:lnT w="12700" cap="flat" cmpd="sng" algn="ctr">
+                      <a:solidFill>
+                        <a:srgbClr val="FFFFFF"/>
+                      </a:solidFill>
+                      <a:prstDash val="solid"/>
+                      <a:round/>
+                      <a:headEnd type="none" w="med" len="med"/>
+                      <a:tailEnd type="none" w="med" len="med"/>
+                    </a:lnT>
+                    <a:lnB w="6350" cap="flat" cmpd="sng" algn="ctr">
+                      <a:solidFill>
+                        <a:srgbClr val="D9D9D9"/>
+                      </a:solidFill>
+                      <a:prstDash val="solid"/>
+                      <a:round/>
+                      <a:headEnd type="none" w="med" len="med"/>
+                      <a:tailEnd type="none" w="med" len="med"/>
+                    </a:lnB>
+                    <a:solidFill>
+                      <a:srgbClr val="FFFFFF"/>
+                    </a:solidFill>
+                  </a:tcPr>
+                </a:tc>
+                <a:tc>
+                  <a:txBody>
+                    <a:bodyPr/>
+                    <a:lstStyle/>
+                    <a:p>
+                      <a:pPr algn="ctr" indent="0" marL="0">
+                        <a:buNone/>
+                      </a:pPr>
+                      <a:r>
+                        <a:rPr lang="en-US" sz="1050" dirty="0">
+                          <a:solidFill>
+                            <a:srgbClr val="000000"/>
+                          </a:solidFill>
+                          <a:latin typeface="Times New Roman" pitchFamily="34" charset="0"/>
+                          <a:ea typeface="Times New Roman" pitchFamily="34" charset="-122"/>
+                          <a:cs typeface="Times New Roman" pitchFamily="34" charset="-120"/>
+                        </a:rPr>
+                        <a:t>45.57</a:t>
+                      </a:r>
+                      <a:endParaRPr lang="en-US" sz="1050" dirty="0">
+                        <a:latin typeface="Times New Roman" charset="0"/>
+                        <a:ea typeface="Times New Roman" charset="0"/>
+                        <a:cs typeface="Times New Roman" charset="0"/>
+                      </a:endParaRPr>
+                    </a:p>
+                  </a:txBody>
+                  <a:tcPr marL="91440" marR="91440" marT="45720" marB="45720" anchor="ctr">
+                    <a:lnL w="12700" cap="flat" cmpd="sng" algn="ctr">
+                      <a:solidFill>
+                        <a:srgbClr val="FFFFFF"/>
+                      </a:solidFill>
+                      <a:prstDash val="solid"/>
+                      <a:round/>
+                      <a:headEnd type="none" w="med" len="med"/>
+                      <a:tailEnd type="none" w="med" len="med"/>
+                    </a:lnL>
+                    <a:lnR w="12700" cap="flat" cmpd="sng" algn="ctr">
+                      <a:solidFill>
+                        <a:srgbClr val="FFFFFF"/>
+                      </a:solidFill>
+                      <a:prstDash val="solid"/>
+                      <a:round/>
+                      <a:headEnd type="none" w="med" len="med"/>
+                      <a:tailEnd type="none" w="med" len="med"/>
+                    </a:lnR>
+                    <a:lnT w="12700" cap="flat" cmpd="sng" algn="ctr">
+                      <a:solidFill>
+                        <a:srgbClr val="FFFFFF"/>
+                      </a:solidFill>
+                      <a:prstDash val="solid"/>
+                      <a:round/>
+                      <a:headEnd type="none" w="med" len="med"/>
+                      <a:tailEnd type="none" w="med" len="med"/>
+                    </a:lnT>
+                    <a:lnB w="6350" cap="flat" cmpd="sng" algn="ctr">
+                      <a:solidFill>
+                        <a:srgbClr val="D9D9D9"/>
+                      </a:solidFill>
+                      <a:prstDash val="solid"/>
+                      <a:round/>
+                      <a:headEnd type="none" w="med" len="med"/>
+                      <a:tailEnd type="none" w="med" len="med"/>
+                    </a:lnB>
+                    <a:solidFill>
+                      <a:srgbClr val="FFFFFF"/>
+                    </a:solidFill>
+                  </a:tcPr>
+                </a:tc>
+                <a:tc>
+                  <a:txBody>
+                    <a:bodyPr/>
+                    <a:lstStyle/>
+                    <a:p>
+                      <a:pPr algn="ctr" indent="0" marL="0">
+                        <a:buNone/>
+                      </a:pPr>
+                      <a:r>
+                        <a:rPr lang="en-US" sz="1050" dirty="0">
+                          <a:solidFill>
+                            <a:srgbClr val="000000"/>
+                          </a:solidFill>
+                          <a:latin typeface="Times New Roman" pitchFamily="34" charset="0"/>
+                          <a:ea typeface="Times New Roman" pitchFamily="34" charset="-122"/>
+                          <a:cs typeface="Times New Roman" pitchFamily="34" charset="-120"/>
+                        </a:rPr>
+                        <a:t>91.25</a:t>
+                      </a:r>
+                      <a:endParaRPr lang="en-US" sz="1050" dirty="0">
+                        <a:latin typeface="Times New Roman" charset="0"/>
+                        <a:ea typeface="Times New Roman" charset="0"/>
+                        <a:cs typeface="Times New Roman" charset="0"/>
+                      </a:endParaRPr>
+                    </a:p>
+                  </a:txBody>
+                  <a:tcPr marL="91440" marR="91440" marT="45720" marB="45720" anchor="ctr">
+                    <a:lnL w="12700" cap="flat" cmpd="sng" algn="ctr">
+                      <a:solidFill>
+                        <a:srgbClr val="FFFFFF"/>
+                      </a:solidFill>
+                      <a:prstDash val="solid"/>
+                      <a:round/>
+                      <a:headEnd type="none" w="med" len="med"/>
+                      <a:tailEnd type="none" w="med" len="med"/>
+                    </a:lnL>
+                    <a:lnR w="12700" cap="flat" cmpd="sng" algn="ctr">
+                      <a:solidFill>
+                        <a:srgbClr val="FFFFFF"/>
+                      </a:solidFill>
+                      <a:prstDash val="solid"/>
+                      <a:round/>
+                      <a:headEnd type="none" w="med" len="med"/>
+                      <a:tailEnd type="none" w="med" len="med"/>
+                    </a:lnR>
+                    <a:lnT w="12700" cap="flat" cmpd="sng" algn="ctr">
+                      <a:solidFill>
+                        <a:srgbClr val="FFFFFF"/>
+                      </a:solidFill>
+                      <a:prstDash val="solid"/>
+                      <a:round/>
+                      <a:headEnd type="none" w="med" len="med"/>
+                      <a:tailEnd type="none" w="med" len="med"/>
+                    </a:lnT>
+                    <a:lnB w="6350" cap="flat" cmpd="sng" algn="ctr">
+                      <a:solidFill>
+                        <a:srgbClr val="D9D9D9"/>
+                      </a:solidFill>
+                      <a:prstDash val="solid"/>
+                      <a:round/>
+                      <a:headEnd type="none" w="med" len="med"/>
+                      <a:tailEnd type="none" w="med" len="med"/>
+                    </a:lnB>
+                    <a:solidFill>
+                      <a:srgbClr val="FFFFFF"/>
+                    </a:solidFill>
+                  </a:tcPr>
+                </a:tc>
+              </a:tr>
+              <a:tr h="283464">
+                <a:tc>
+                  <a:txBody>
+                    <a:bodyPr/>
+                    <a:lstStyle/>
+                    <a:p>
+                      <a:pPr algn="l" indent="0" marL="0">
+                        <a:buNone/>
+                      </a:pPr>
+                      <a:endParaRPr lang="en-US" sz="1050" dirty="0">
+                        <a:latin typeface="Times New Roman" charset="0"/>
+                        <a:ea typeface="Times New Roman" charset="0"/>
+                        <a:cs typeface="Times New Roman" charset="0"/>
+                      </a:endParaRPr>
+                    </a:p>
+                  </a:txBody>
+                  <a:tcPr marL="91440" marR="91440" marT="45720" marB="45720" anchor="ctr">
+                    <a:lnL w="12700" cap="flat" cmpd="sng" algn="ctr">
+                      <a:solidFill>
+                        <a:srgbClr val="FFFFFF"/>
+                      </a:solidFill>
+                      <a:prstDash val="solid"/>
+                      <a:round/>
+                      <a:headEnd type="none" w="med" len="med"/>
+                      <a:tailEnd type="none" w="med" len="med"/>
+                    </a:lnL>
+                    <a:lnR w="12700" cap="flat" cmpd="sng" algn="ctr">
+                      <a:solidFill>
+                        <a:srgbClr val="FFFFFF"/>
+                      </a:solidFill>
+                      <a:prstDash val="solid"/>
+                      <a:round/>
+                      <a:headEnd type="none" w="med" len="med"/>
+                      <a:tailEnd type="none" w="med" len="med"/>
+                    </a:lnR>
+                    <a:lnT w="12700" cap="flat" cmpd="sng" algn="ctr">
+                      <a:solidFill>
+                        <a:srgbClr val="FFFFFF"/>
+                      </a:solidFill>
+                      <a:prstDash val="solid"/>
+                      <a:round/>
+                      <a:headEnd type="none" w="med" len="med"/>
+                      <a:tailEnd type="none" w="med" len="med"/>
+                    </a:lnT>
+                    <a:lnB w="6350" cap="flat" cmpd="sng" algn="ctr">
+                      <a:solidFill>
+                        <a:srgbClr val="D9D9D9"/>
+                      </a:solidFill>
+                      <a:prstDash val="solid"/>
+                      <a:round/>
+                      <a:headEnd type="none" w="med" len="med"/>
+                      <a:tailEnd type="none" w="med" len="med"/>
+                    </a:lnB>
+                    <a:solidFill>
+                      <a:srgbClr val="FFFFFF"/>
+                    </a:solidFill>
+                  </a:tcPr>
+                </a:tc>
+                <a:tc>
+                  <a:txBody>
+                    <a:bodyPr/>
+                    <a:lstStyle/>
+                    <a:p>
+                      <a:pPr algn="l" indent="0" marL="0">
+                        <a:buNone/>
+                      </a:pPr>
+                      <a:r>
+                        <a:rPr lang="en-US" sz="1050" dirty="0">
+                          <a:solidFill>
+                            <a:srgbClr val="000000"/>
+                          </a:solidFill>
+                          <a:latin typeface="Times New Roman" pitchFamily="34" charset="0"/>
+                          <a:ea typeface="Times New Roman" pitchFamily="34" charset="-122"/>
+                          <a:cs typeface="Times New Roman" pitchFamily="34" charset="-120"/>
+                        </a:rPr>
+                        <a:t>No-skill baseline</a:t>
+                      </a:r>
+                      <a:endParaRPr lang="en-US" sz="1050" dirty="0">
+                        <a:latin typeface="Times New Roman" charset="0"/>
+                        <a:ea typeface="Times New Roman" charset="0"/>
+                        <a:cs typeface="Times New Roman" charset="0"/>
+                      </a:endParaRPr>
+                    </a:p>
+                  </a:txBody>
+                  <a:tcPr marL="91440" marR="91440" marT="45720" marB="45720" anchor="ctr">
+                    <a:lnL w="12700" cap="flat" cmpd="sng" algn="ctr">
+                      <a:solidFill>
+                        <a:srgbClr val="FFFFFF"/>
+                      </a:solidFill>
+                      <a:prstDash val="solid"/>
+                      <a:round/>
+                      <a:headEnd type="none" w="med" len="med"/>
+                      <a:tailEnd type="none" w="med" len="med"/>
+                    </a:lnL>
+                    <a:lnR w="12700" cap="flat" cmpd="sng" algn="ctr">
+                      <a:solidFill>
+                        <a:srgbClr val="FFFFFF"/>
+                      </a:solidFill>
+                      <a:prstDash val="solid"/>
+                      <a:round/>
+                      <a:headEnd type="none" w="med" len="med"/>
+                      <a:tailEnd type="none" w="med" len="med"/>
+                    </a:lnR>
+                    <a:lnT w="12700" cap="flat" cmpd="sng" algn="ctr">
+                      <a:solidFill>
+                        <a:srgbClr val="FFFFFF"/>
+                      </a:solidFill>
+                      <a:prstDash val="solid"/>
+                      <a:round/>
+                      <a:headEnd type="none" w="med" len="med"/>
+                      <a:tailEnd type="none" w="med" len="med"/>
+                    </a:lnT>
+                    <a:lnB w="6350" cap="flat" cmpd="sng" algn="ctr">
+                      <a:solidFill>
+                        <a:srgbClr val="D9D9D9"/>
+                      </a:solidFill>
+                      <a:prstDash val="solid"/>
+                      <a:round/>
+                      <a:headEnd type="none" w="med" len="med"/>
+                      <a:tailEnd type="none" w="med" len="med"/>
+                    </a:lnB>
+                    <a:solidFill>
+                      <a:srgbClr val="FFFFFF"/>
+                    </a:solidFill>
+                  </a:tcPr>
+                </a:tc>
+                <a:tc>
+                  <a:txBody>
+                    <a:bodyPr/>
+                    <a:lstStyle/>
+                    <a:p>
+                      <a:pPr algn="ctr" indent="0" marL="0">
+                        <a:buNone/>
+                      </a:pPr>
+                      <a:r>
+                        <a:rPr lang="en-US" sz="1050" dirty="0">
+                          <a:solidFill>
+                            <a:srgbClr val="000000"/>
+                          </a:solidFill>
+                          <a:latin typeface="Times New Roman" pitchFamily="34" charset="0"/>
+                          <a:ea typeface="Times New Roman" pitchFamily="34" charset="-122"/>
+                          <a:cs typeface="Times New Roman" pitchFamily="34" charset="-120"/>
+                        </a:rPr>
+                        <a:t>−0.035</a:t>
+                      </a:r>
+                      <a:endParaRPr lang="en-US" sz="1050" dirty="0">
+                        <a:latin typeface="Times New Roman" charset="0"/>
+                        <a:ea typeface="Times New Roman" charset="0"/>
+                        <a:cs typeface="Times New Roman" charset="0"/>
+                      </a:endParaRPr>
+                    </a:p>
+                  </a:txBody>
+                  <a:tcPr marL="91440" marR="91440" marT="45720" marB="45720" anchor="ctr">
+                    <a:lnL w="12700" cap="flat" cmpd="sng" algn="ctr">
+                      <a:solidFill>
+                        <a:srgbClr val="FFFFFF"/>
+                      </a:solidFill>
+                      <a:prstDash val="solid"/>
+                      <a:round/>
+                      <a:headEnd type="none" w="med" len="med"/>
+                      <a:tailEnd type="none" w="med" len="med"/>
+                    </a:lnL>
+                    <a:lnR w="12700" cap="flat" cmpd="sng" algn="ctr">
+                      <a:solidFill>
+                        <a:srgbClr val="FFFFFF"/>
+                      </a:solidFill>
+                      <a:prstDash val="solid"/>
+                      <a:round/>
+                      <a:headEnd type="none" w="med" len="med"/>
+                      <a:tailEnd type="none" w="med" len="med"/>
+                    </a:lnR>
+                    <a:lnT w="12700" cap="flat" cmpd="sng" algn="ctr">
+                      <a:solidFill>
+                        <a:srgbClr val="FFFFFF"/>
+                      </a:solidFill>
+                      <a:prstDash val="solid"/>
+                      <a:round/>
+                      <a:headEnd type="none" w="med" len="med"/>
+                      <a:tailEnd type="none" w="med" len="med"/>
+                    </a:lnT>
+                    <a:lnB w="6350" cap="flat" cmpd="sng" algn="ctr">
+                      <a:solidFill>
+                        <a:srgbClr val="D9D9D9"/>
+                      </a:solidFill>
+                      <a:prstDash val="solid"/>
+                      <a:round/>
+                      <a:headEnd type="none" w="med" len="med"/>
+                      <a:tailEnd type="none" w="med" len="med"/>
+                    </a:lnB>
+                    <a:solidFill>
+                      <a:srgbClr val="FFFFFF"/>
+                    </a:solidFill>
+                  </a:tcPr>
+                </a:tc>
+                <a:tc>
+                  <a:txBody>
+                    <a:bodyPr/>
+                    <a:lstStyle/>
+                    <a:p>
+                      <a:pPr algn="ctr" indent="0" marL="0">
+                        <a:buNone/>
+                      </a:pPr>
+                      <a:r>
+                        <a:rPr lang="en-US" sz="1050" dirty="0">
+                          <a:solidFill>
+                            <a:srgbClr val="000000"/>
+                          </a:solidFill>
+                          <a:latin typeface="Times New Roman" pitchFamily="34" charset="0"/>
+                          <a:ea typeface="Times New Roman" pitchFamily="34" charset="-122"/>
+                          <a:cs typeface="Times New Roman" pitchFamily="34" charset="-120"/>
+                        </a:rPr>
+                        <a:t>2.564</a:t>
+                      </a:r>
+                      <a:endParaRPr lang="en-US" sz="1050" dirty="0">
+                        <a:latin typeface="Times New Roman" charset="0"/>
+                        <a:ea typeface="Times New Roman" charset="0"/>
+                        <a:cs typeface="Times New Roman" charset="0"/>
+                      </a:endParaRPr>
+                    </a:p>
+                  </a:txBody>
+                  <a:tcPr marL="91440" marR="91440" marT="45720" marB="45720" anchor="ctr">
+                    <a:lnL w="12700" cap="flat" cmpd="sng" algn="ctr">
+                      <a:solidFill>
+                        <a:srgbClr val="FFFFFF"/>
+                      </a:solidFill>
+                      <a:prstDash val="solid"/>
+                      <a:round/>
+                      <a:headEnd type="none" w="med" len="med"/>
+                      <a:tailEnd type="none" w="med" len="med"/>
+                    </a:lnL>
+                    <a:lnR w="12700" cap="flat" cmpd="sng" algn="ctr">
+                      <a:solidFill>
+                        <a:srgbClr val="FFFFFF"/>
+                      </a:solidFill>
+                      <a:prstDash val="solid"/>
+                      <a:round/>
+                      <a:headEnd type="none" w="med" len="med"/>
+                      <a:tailEnd type="none" w="med" len="med"/>
+                    </a:lnR>
+                    <a:lnT w="12700" cap="flat" cmpd="sng" algn="ctr">
+                      <a:solidFill>
+                        <a:srgbClr val="FFFFFF"/>
+                      </a:solidFill>
+                      <a:prstDash val="solid"/>
+                      <a:round/>
+                      <a:headEnd type="none" w="med" len="med"/>
+                      <a:tailEnd type="none" w="med" len="med"/>
+                    </a:lnT>
+                    <a:lnB w="6350" cap="flat" cmpd="sng" algn="ctr">
+                      <a:solidFill>
+                        <a:srgbClr val="D9D9D9"/>
+                      </a:solidFill>
+                      <a:prstDash val="solid"/>
+                      <a:round/>
+                      <a:headEnd type="none" w="med" len="med"/>
+                      <a:tailEnd type="none" w="med" len="med"/>
+                    </a:lnB>
+                    <a:solidFill>
+                      <a:srgbClr val="FFFFFF"/>
+                    </a:solidFill>
+                  </a:tcPr>
+                </a:tc>
+                <a:tc>
+                  <a:txBody>
+                    <a:bodyPr/>
+                    <a:lstStyle/>
+                    <a:p>
+                      <a:pPr algn="ctr" indent="0" marL="0">
+                        <a:buNone/>
+                      </a:pPr>
+                      <a:r>
+                        <a:rPr lang="en-US" sz="1050" dirty="0">
+                          <a:solidFill>
+                            <a:srgbClr val="000000"/>
+                          </a:solidFill>
+                          <a:latin typeface="Times New Roman" pitchFamily="34" charset="0"/>
+                          <a:ea typeface="Times New Roman" pitchFamily="34" charset="-122"/>
+                          <a:cs typeface="Times New Roman" pitchFamily="34" charset="-120"/>
+                        </a:rPr>
+                        <a:t>29.74</a:t>
+                      </a:r>
+                      <a:endParaRPr lang="en-US" sz="1050" dirty="0">
+                        <a:latin typeface="Times New Roman" charset="0"/>
+                        <a:ea typeface="Times New Roman" charset="0"/>
+                        <a:cs typeface="Times New Roman" charset="0"/>
+                      </a:endParaRPr>
+                    </a:p>
+                  </a:txBody>
+                  <a:tcPr marL="91440" marR="91440" marT="45720" marB="45720" anchor="ctr">
+                    <a:lnL w="12700" cap="flat" cmpd="sng" algn="ctr">
+                      <a:solidFill>
+                        <a:srgbClr val="FFFFFF"/>
+                      </a:solidFill>
+                      <a:prstDash val="solid"/>
+                      <a:round/>
+                      <a:headEnd type="none" w="med" len="med"/>
+                      <a:tailEnd type="none" w="med" len="med"/>
+                    </a:lnL>
+                    <a:lnR w="12700" cap="flat" cmpd="sng" algn="ctr">
+                      <a:solidFill>
+                        <a:srgbClr val="FFFFFF"/>
+                      </a:solidFill>
+                      <a:prstDash val="solid"/>
+                      <a:round/>
+                      <a:headEnd type="none" w="med" len="med"/>
+                      <a:tailEnd type="none" w="med" len="med"/>
+                    </a:lnR>
+                    <a:lnT w="12700" cap="flat" cmpd="sng" algn="ctr">
+                      <a:solidFill>
+                        <a:srgbClr val="FFFFFF"/>
+                      </a:solidFill>
+                      <a:prstDash val="solid"/>
+                      <a:round/>
+                      <a:headEnd type="none" w="med" len="med"/>
+                      <a:tailEnd type="none" w="med" len="med"/>
+                    </a:lnT>
+                    <a:lnB w="6350" cap="flat" cmpd="sng" algn="ctr">
+                      <a:solidFill>
+                        <a:srgbClr val="D9D9D9"/>
+                      </a:solidFill>
+                      <a:prstDash val="solid"/>
+                      <a:round/>
+                      <a:headEnd type="none" w="med" len="med"/>
+                      <a:tailEnd type="none" w="med" len="med"/>
+                    </a:lnB>
+                    <a:solidFill>
+                      <a:srgbClr val="FFFFFF"/>
+                    </a:solidFill>
+                  </a:tcPr>
+                </a:tc>
+                <a:tc>
+                  <a:txBody>
+                    <a:bodyPr/>
+                    <a:lstStyle/>
+                    <a:p>
+                      <a:pPr algn="ctr" indent="0" marL="0">
+                        <a:buNone/>
+                      </a:pPr>
+                      <a:r>
+                        <a:rPr lang="en-US" sz="1050" dirty="0">
+                          <a:solidFill>
+                            <a:srgbClr val="000000"/>
+                          </a:solidFill>
+                          <a:latin typeface="Times New Roman" pitchFamily="34" charset="0"/>
+                          <a:ea typeface="Times New Roman" pitchFamily="34" charset="-122"/>
+                          <a:cs typeface="Times New Roman" pitchFamily="34" charset="-120"/>
+                        </a:rPr>
+                        <a:t>44.14</a:t>
+                      </a:r>
+                      <a:endParaRPr lang="en-US" sz="1050" dirty="0">
+                        <a:latin typeface="Times New Roman" charset="0"/>
+                        <a:ea typeface="Times New Roman" charset="0"/>
+                        <a:cs typeface="Times New Roman" charset="0"/>
+                      </a:endParaRPr>
+                    </a:p>
+                  </a:txBody>
+                  <a:tcPr marL="91440" marR="91440" marT="45720" marB="45720" anchor="ctr">
+                    <a:lnL w="12700" cap="flat" cmpd="sng" algn="ctr">
+                      <a:solidFill>
+                        <a:srgbClr val="FFFFFF"/>
+                      </a:solidFill>
+                      <a:prstDash val="solid"/>
+                      <a:round/>
+                      <a:headEnd type="none" w="med" len="med"/>
+                      <a:tailEnd type="none" w="med" len="med"/>
+                    </a:lnL>
+                    <a:lnR w="12700" cap="flat" cmpd="sng" algn="ctr">
+                      <a:solidFill>
+                        <a:srgbClr val="FFFFFF"/>
+                      </a:solidFill>
+                      <a:prstDash val="solid"/>
+                      <a:round/>
+                      <a:headEnd type="none" w="med" len="med"/>
+                      <a:tailEnd type="none" w="med" len="med"/>
+                    </a:lnR>
+                    <a:lnT w="12700" cap="flat" cmpd="sng" algn="ctr">
+                      <a:solidFill>
+                        <a:srgbClr val="FFFFFF"/>
+                      </a:solidFill>
+                      <a:prstDash val="solid"/>
+                      <a:round/>
+                      <a:headEnd type="none" w="med" len="med"/>
+                      <a:tailEnd type="none" w="med" len="med"/>
+                    </a:lnT>
+                    <a:lnB w="6350" cap="flat" cmpd="sng" algn="ctr">
+                      <a:solidFill>
+                        <a:srgbClr val="D9D9D9"/>
+                      </a:solidFill>
+                      <a:prstDash val="solid"/>
+                      <a:round/>
+                      <a:headEnd type="none" w="med" len="med"/>
+                      <a:tailEnd type="none" w="med" len="med"/>
+                    </a:lnB>
+                    <a:solidFill>
+                      <a:srgbClr val="FFFFFF"/>
+                    </a:solidFill>
+                  </a:tcPr>
+                </a:tc>
+                <a:tc>
+                  <a:txBody>
+                    <a:bodyPr/>
+                    <a:lstStyle/>
+                    <a:p>
+                      <a:pPr algn="ctr" indent="0" marL="0">
+                        <a:buNone/>
+                      </a:pPr>
+                      <a:r>
+                        <a:rPr lang="en-US" sz="1050" dirty="0">
+                          <a:solidFill>
+                            <a:srgbClr val="000000"/>
+                          </a:solidFill>
+                          <a:latin typeface="Times New Roman" pitchFamily="34" charset="0"/>
+                          <a:ea typeface="Times New Roman" pitchFamily="34" charset="-122"/>
+                          <a:cs typeface="Times New Roman" pitchFamily="34" charset="-120"/>
+                        </a:rPr>
+                        <a:t>90.57</a:t>
+                      </a:r>
+                      <a:endParaRPr lang="en-US" sz="1050" dirty="0">
+                        <a:latin typeface="Times New Roman" charset="0"/>
+                        <a:ea typeface="Times New Roman" charset="0"/>
+                        <a:cs typeface="Times New Roman" charset="0"/>
+                      </a:endParaRPr>
+                    </a:p>
+                  </a:txBody>
+                  <a:tcPr marL="91440" marR="91440" marT="45720" marB="45720" anchor="ctr">
+                    <a:lnL w="12700" cap="flat" cmpd="sng" algn="ctr">
+                      <a:solidFill>
+                        <a:srgbClr val="FFFFFF"/>
+                      </a:solidFill>
+                      <a:prstDash val="solid"/>
+                      <a:round/>
+                      <a:headEnd type="none" w="med" len="med"/>
+                      <a:tailEnd type="none" w="med" len="med"/>
+                    </a:lnL>
+                    <a:lnR w="12700" cap="flat" cmpd="sng" algn="ctr">
+                      <a:solidFill>
+                        <a:srgbClr val="FFFFFF"/>
+                      </a:solidFill>
+                      <a:prstDash val="solid"/>
+                      <a:round/>
+                      <a:headEnd type="none" w="med" len="med"/>
+                      <a:tailEnd type="none" w="med" len="med"/>
+                    </a:lnR>
+                    <a:lnT w="12700" cap="flat" cmpd="sng" algn="ctr">
+                      <a:solidFill>
+                        <a:srgbClr val="FFFFFF"/>
+                      </a:solidFill>
+                      <a:prstDash val="solid"/>
+                      <a:round/>
+                      <a:headEnd type="none" w="med" len="med"/>
+                      <a:tailEnd type="none" w="med" len="med"/>
+                    </a:lnT>
+                    <a:lnB w="6350" cap="flat" cmpd="sng" algn="ctr">
+                      <a:solidFill>
+                        <a:srgbClr val="D9D9D9"/>
+                      </a:solidFill>
+                      <a:prstDash val="solid"/>
+                      <a:round/>
+                      <a:headEnd type="none" w="med" len="med"/>
+                      <a:tailEnd type="none" w="med" len="med"/>
+                    </a:lnB>
+                    <a:solidFill>
+                      <a:srgbClr val="FFFFFF"/>
+                    </a:solidFill>
+                  </a:tcPr>
+                </a:tc>
+              </a:tr>
+            </a:tbl>
+          </a:graphicData>
+        </a:graphic>
+      </p:graphicFrame>
+      <p:pic>
+        <p:nvPicPr>
+          <p:cNvPr id="8" name="Image 0" descr="figures\equations\metrics.png">    </p:cNvPr>
+          <p:cNvPicPr>
+            <a:picLocks noChangeAspect="1"/>
+          </p:cNvPicPr>
+          <p:nvPr/>
+        </p:nvPicPr>
+        <p:blipFill>
+          <a:blip r:embed="rId1"/>
+          <a:stretch>
+            <a:fillRect/>
+          </a:stretch>
+        </p:blipFill>
+        <p:spPr>
+          <a:xfrm>
+            <a:off x="914400" y="3886200"/>
+            <a:ext cx="5120640" cy="1485900"/>
+          </a:xfrm>
+          <a:prstGeom prst="rect">
+            <a:avLst/>
+          </a:prstGeom>
+        </p:spPr>
+      </p:pic>
+      <p:sp>
+        <p:nvSpPr>
+          <p:cNvPr id="9" name="Shape 5"/>
+          <p:cNvSpPr/>
+          <p:nvPr/>
+        </p:nvSpPr>
+        <p:spPr>
+          <a:xfrm>
+            <a:off x="6675120" y="3840480"/>
+            <a:ext cx="4846320" cy="1874520"/>
+          </a:xfrm>
+          <a:prstGeom prst="roundRect">
+            <a:avLst>
+              <a:gd name="adj" fmla="val 10732"/>
+            </a:avLst>
+          </a:prstGeom>
+          <a:solidFill>
+            <a:srgbClr val="F5F5F5"/>
+          </a:solidFill>
+          <a:ln w="9525">
+            <a:solidFill>
+              <a:srgbClr val="BFBFBF"/>
+            </a:solidFill>
+            <a:prstDash val="solid"/>
+          </a:ln>
+          <a:effectLst>
+            <a:outerShdw sx="100000" sy="100000" kx="0" ky="0" algn="bl" rotWithShape="0" blurRad="63500" dist="25400" dir="2700000">
+              <a:srgbClr val="888888">
+                <a:alpha val="35000"/>
+              </a:srgbClr>
+            </a:outerShdw>
+          </a:effectLst>
+        </p:spPr>
+      </p:sp>
+      <p:sp>
+        <p:nvSpPr>
+          <p:cNvPr id="10" name="Text 6"/>
+          <p:cNvSpPr txBox="1"/>
+          <p:nvPr/>
+        </p:nvSpPr>
+        <p:spPr>
+          <a:xfrm>
+            <a:off x="6858000" y="3986784"/>
+            <a:ext cx="4480560" cy="292608"/>
+          </a:xfrm>
+          <a:prstGeom prst="rect">
+            <a:avLst/>
+          </a:prstGeom>
+          <a:noFill/>
+          <a:ln/>
+        </p:spPr>
+        <p:txBody>
+          <a:bodyPr wrap="square" lIns="0" tIns="0" rIns="0" bIns="0" rtlCol="0" anchor="ctr"/>
+          <a:lstStyle/>
+          <a:p>
+            <a:pPr algn="ctr" indent="0" marL="0">
+              <a:buNone/>
+            </a:pPr>
+            <a:r>
+              <a:rPr lang="en-US" sz="1400" b="1" dirty="0">
+                <a:solidFill>
+                  <a:srgbClr val="000000"/>
+                </a:solidFill>
+                <a:latin typeface="Times New Roman" pitchFamily="34" charset="0"/>
+                <a:ea typeface="Times New Roman" pitchFamily="34" charset="-122"/>
+                <a:cs typeface="Times New Roman" pitchFamily="34" charset="-120"/>
+              </a:rPr>
+              <a:t>What the three protocols ask</a:t>
+            </a:r>
+            <a:endParaRPr lang="en-US" sz="1400" dirty="0"/>
+          </a:p>
+        </p:txBody>
+      </p:sp>
+      <p:sp>
+        <p:nvSpPr>
+          <p:cNvPr id="11" name="Text 7"/>
+          <p:cNvSpPr txBox="1"/>
+          <p:nvPr/>
+        </p:nvSpPr>
+        <p:spPr>
+          <a:xfrm>
+            <a:off x="6931152" y="4407408"/>
+            <a:ext cx="4334256" cy="1143000"/>
+          </a:xfrm>
+          <a:prstGeom prst="rect">
+            <a:avLst/>
+          </a:prstGeom>
+          <a:noFill/>
+          <a:ln/>
+        </p:spPr>
+        <p:txBody>
+          <a:bodyPr wrap="square" lIns="0" tIns="0" rIns="0" bIns="0" rtlCol="0" anchor="t"/>
+          <a:lstStyle/>
+          <a:p>
+            <a:pPr indent="0" marL="0">
+              <a:spcAft>
+                <a:spcPts val="700"/>
+              </a:spcAft>
+              <a:buNone/>
+            </a:pPr>
+            <a:r>
+              <a:rPr lang="en-US" sz="1050" dirty="0">
+                <a:solidFill>
+                  <a:srgbClr val="000000"/>
+                </a:solidFill>
+                <a:latin typeface="Times New Roman" pitchFamily="34" charset="0"/>
+                <a:ea typeface="Times New Roman" pitchFamily="34" charset="-122"/>
+                <a:cs typeface="Times New Roman" pitchFamily="34" charset="-120"/>
+              </a:rPr>
+              <a:t>Protocol 1 allows windows from the same person into both the training and the test set. Protocols 2 and 3 never do.</a:t>
+            </a:r>
+            <a:endParaRPr lang="en-US" sz="1050" dirty="0"/>
+          </a:p>
+          <a:p>
+            <a:pPr indent="0" marL="0">
+              <a:spcAft>
+                <a:spcPts val="700"/>
+              </a:spcAft>
+              <a:buNone/>
+            </a:pPr>
+            <a:r>
+              <a:rPr lang="en-US" sz="1050" dirty="0">
+                <a:solidFill>
+                  <a:srgbClr val="000000"/>
+                </a:solidFill>
+                <a:latin typeface="Times New Roman" pitchFamily="34" charset="0"/>
+                <a:ea typeface="Times New Roman" pitchFamily="34" charset="-122"/>
+                <a:cs typeface="Times New Roman" pitchFamily="34" charset="-120"/>
+              </a:rPr>
+              <a:t>So protocol 1 asks: how well does this work for a person the model has already seen? Protocols 2 and 3 ask: how well does it work for a new person?</a:t>
+            </a:r>
+            <a:endParaRPr lang="en-US" sz="1050" dirty="0"/>
+          </a:p>
+          <a:p>
+            <a:pPr indent="0" marL="0">
+              <a:spcAft>
+                <a:spcPts val="700"/>
+              </a:spcAft>
+              <a:buNone/>
+            </a:pPr>
+            <a:r>
+              <a:rPr lang="en-US" sz="1050" dirty="0">
+                <a:solidFill>
+                  <a:srgbClr val="000000"/>
+                </a:solidFill>
+                <a:latin typeface="Times New Roman" pitchFamily="34" charset="0"/>
+                <a:ea typeface="Times New Roman" pitchFamily="34" charset="-122"/>
+                <a:cs typeface="Times New Roman" pitchFamily="34" charset="-120"/>
+              </a:rPr>
+              <a:t>Both are fair questions. The first is the one the paper reports, and it is the one our Results I reproduces.</a:t>
+            </a:r>
+            <a:endParaRPr lang="en-US" sz="1050" dirty="0"/>
           </a:p>
         </p:txBody>
       </p:sp>
@@ -7350,7 +10425,7 @@
                 <a:ea typeface="Times New Roman" pitchFamily="34" charset="-122"/>
                 <a:cs typeface="Times New Roman" pitchFamily="34" charset="-120"/>
               </a:rPr>
-              <a:t>11. Results III — Feature-Set Ablation</a:t>
+              <a:t>11. Results III — Parkes Error Grid and Prediction Trace</a:t>
             </a:r>
             <a:endParaRPr lang="en-US" sz="2100" dirty="0"/>
           </a:p>
@@ -7490,6 +10565,522 @@
                 <a:ea typeface="Times New Roman" pitchFamily="34" charset="-122"/>
                 <a:cs typeface="Times New Roman" pitchFamily="34" charset="-120"/>
               </a:rPr>
+              <a:t>Participant c2s04 over seventeen days, under each of the two protocols. Red is the CGM reference, blue the prediction.</a:t>
+            </a:r>
+            <a:endParaRPr lang="en-US" sz="1300" dirty="0"/>
+          </a:p>
+        </p:txBody>
+      </p:sp>
+      <p:pic>
+        <p:nvPicPr>
+          <p:cNvPr id="7" name="Image 0" descr="figures\results\fig09_timeseries_random_window_c2s04.png">    </p:cNvPr>
+          <p:cNvPicPr>
+            <a:picLocks noChangeAspect="1"/>
+          </p:cNvPicPr>
+          <p:nvPr/>
+        </p:nvPicPr>
+        <p:blipFill>
+          <a:blip r:embed="rId1"/>
+          <a:stretch>
+            <a:fillRect/>
+          </a:stretch>
+        </p:blipFill>
+        <p:spPr>
+          <a:xfrm>
+            <a:off x="731520" y="1536192"/>
+            <a:ext cx="4538341" cy="2286000"/>
+          </a:xfrm>
+          <a:prstGeom prst="rect">
+            <a:avLst/>
+          </a:prstGeom>
+        </p:spPr>
+      </p:pic>
+      <p:pic>
+        <p:nvPicPr>
+          <p:cNvPr id="8" name="Image 1" descr="figures\results\fig09_timeseries_subject_aware_c2s04.png">    </p:cNvPr>
+          <p:cNvPicPr>
+            <a:picLocks noChangeAspect="1"/>
+          </p:cNvPicPr>
+          <p:nvPr/>
+        </p:nvPicPr>
+        <p:blipFill>
+          <a:blip r:embed="rId2"/>
+          <a:stretch>
+            <a:fillRect/>
+          </a:stretch>
+        </p:blipFill>
+        <p:spPr>
+          <a:xfrm>
+            <a:off x="6355080" y="1536192"/>
+            <a:ext cx="4538341" cy="2286000"/>
+          </a:xfrm>
+          <a:prstGeom prst="rect">
+            <a:avLst/>
+          </a:prstGeom>
+        </p:spPr>
+      </p:pic>
+      <p:sp>
+        <p:nvSpPr>
+          <p:cNvPr id="9" name="Text 5"/>
+          <p:cNvSpPr txBox="1"/>
+          <p:nvPr/>
+        </p:nvSpPr>
+        <p:spPr>
+          <a:xfrm>
+            <a:off x="731520" y="3895344"/>
+            <a:ext cx="5532120" cy="310896"/>
+          </a:xfrm>
+          <a:prstGeom prst="rect">
+            <a:avLst/>
+          </a:prstGeom>
+          <a:noFill/>
+          <a:ln/>
+        </p:spPr>
+        <p:txBody>
+          <a:bodyPr wrap="square" lIns="0" tIns="0" rIns="0" bIns="0" rtlCol="0" anchor="ctr"/>
+          <a:lstStyle/>
+          <a:p>
+            <a:pPr algn="ctr" indent="0" marL="0">
+              <a:buNone/>
+            </a:pPr>
+            <a:r>
+              <a:rPr lang="en-US" sz="1050" b="1" dirty="0">
+                <a:solidFill>
+                  <a:srgbClr val="000000"/>
+                </a:solidFill>
+                <a:latin typeface="Times New Roman" pitchFamily="34" charset="0"/>
+                <a:ea typeface="Times New Roman" pitchFamily="34" charset="-122"/>
+                <a:cs typeface="Times New Roman" pitchFamily="34" charset="-120"/>
+              </a:rPr>
+              <a:t>Random window split: the prediction follows the reference up and down.</a:t>
+            </a:r>
+            <a:endParaRPr lang="en-US" sz="1050" dirty="0"/>
+          </a:p>
+        </p:txBody>
+      </p:sp>
+      <p:sp>
+        <p:nvSpPr>
+          <p:cNvPr id="10" name="Text 6"/>
+          <p:cNvSpPr txBox="1"/>
+          <p:nvPr/>
+        </p:nvSpPr>
+        <p:spPr>
+          <a:xfrm>
+            <a:off x="6355080" y="3895344"/>
+            <a:ext cx="5532120" cy="310896"/>
+          </a:xfrm>
+          <a:prstGeom prst="rect">
+            <a:avLst/>
+          </a:prstGeom>
+          <a:noFill/>
+          <a:ln/>
+        </p:spPr>
+        <p:txBody>
+          <a:bodyPr wrap="square" lIns="0" tIns="0" rIns="0" bIns="0" rtlCol="0" anchor="ctr"/>
+          <a:lstStyle/>
+          <a:p>
+            <a:pPr algn="ctr" indent="0" marL="0">
+              <a:buNone/>
+            </a:pPr>
+            <a:r>
+              <a:rPr lang="en-US" sz="1050" b="1" dirty="0">
+                <a:solidFill>
+                  <a:srgbClr val="000000"/>
+                </a:solidFill>
+                <a:latin typeface="Times New Roman" pitchFamily="34" charset="0"/>
+                <a:ea typeface="Times New Roman" pitchFamily="34" charset="-122"/>
+                <a:cs typeface="Times New Roman" pitchFamily="34" charset="-120"/>
+              </a:rPr>
+              <a:t>Subject-aware split: the prediction flattens toward the mean.</a:t>
+            </a:r>
+            <a:endParaRPr lang="en-US" sz="1050" dirty="0"/>
+          </a:p>
+        </p:txBody>
+      </p:sp>
+      <p:pic>
+        <p:nvPicPr>
+          <p:cNvPr id="11" name="Image 2" descr="figures\results\fig10_parkes_random_window.png">    </p:cNvPr>
+          <p:cNvPicPr>
+            <a:picLocks noChangeAspect="1"/>
+          </p:cNvPicPr>
+          <p:nvPr/>
+        </p:nvPicPr>
+        <p:blipFill>
+          <a:blip r:embed="rId3"/>
+          <a:stretch>
+            <a:fillRect/>
+          </a:stretch>
+        </p:blipFill>
+        <p:spPr>
+          <a:xfrm>
+            <a:off x="1371600" y="4279392"/>
+            <a:ext cx="2021804" cy="2103120"/>
+          </a:xfrm>
+          <a:prstGeom prst="rect">
+            <a:avLst/>
+          </a:prstGeom>
+        </p:spPr>
+      </p:pic>
+      <p:sp>
+        <p:nvSpPr>
+          <p:cNvPr id="12" name="Shape 7"/>
+          <p:cNvSpPr/>
+          <p:nvPr/>
+        </p:nvSpPr>
+        <p:spPr>
+          <a:xfrm>
+            <a:off x="3931920" y="4315968"/>
+            <a:ext cx="7589520" cy="1965960"/>
+          </a:xfrm>
+          <a:prstGeom prst="roundRect">
+            <a:avLst>
+              <a:gd name="adj" fmla="val 10233"/>
+            </a:avLst>
+          </a:prstGeom>
+          <a:solidFill>
+            <a:srgbClr val="F5F5F5"/>
+          </a:solidFill>
+          <a:ln w="9525">
+            <a:solidFill>
+              <a:srgbClr val="BFBFBF"/>
+            </a:solidFill>
+            <a:prstDash val="solid"/>
+          </a:ln>
+          <a:effectLst>
+            <a:outerShdw sx="100000" sy="100000" kx="0" ky="0" algn="bl" rotWithShape="0" blurRad="63500" dist="25400" dir="2700000">
+              <a:srgbClr val="888888">
+                <a:alpha val="35000"/>
+              </a:srgbClr>
+            </a:outerShdw>
+          </a:effectLst>
+        </p:spPr>
+      </p:sp>
+      <p:sp>
+        <p:nvSpPr>
+          <p:cNvPr id="13" name="Text 8"/>
+          <p:cNvSpPr txBox="1"/>
+          <p:nvPr/>
+        </p:nvSpPr>
+        <p:spPr>
+          <a:xfrm>
+            <a:off x="4114800" y="4462272"/>
+            <a:ext cx="7223760" cy="292608"/>
+          </a:xfrm>
+          <a:prstGeom prst="rect">
+            <a:avLst/>
+          </a:prstGeom>
+          <a:noFill/>
+          <a:ln/>
+        </p:spPr>
+        <p:txBody>
+          <a:bodyPr wrap="square" lIns="0" tIns="0" rIns="0" bIns="0" rtlCol="0" anchor="ctr"/>
+          <a:lstStyle/>
+          <a:p>
+            <a:pPr algn="ctr" indent="0" marL="0">
+              <a:buNone/>
+            </a:pPr>
+            <a:r>
+              <a:rPr lang="en-US" sz="1400" b="1" dirty="0">
+                <a:solidFill>
+                  <a:srgbClr val="000000"/>
+                </a:solidFill>
+                <a:latin typeface="Times New Roman" pitchFamily="34" charset="0"/>
+                <a:ea typeface="Times New Roman" pitchFamily="34" charset="-122"/>
+                <a:cs typeface="Times New Roman" pitchFamily="34" charset="-120"/>
+              </a:rPr>
+              <a:t>Reading the two traces</a:t>
+            </a:r>
+            <a:endParaRPr lang="en-US" sz="1400" dirty="0"/>
+          </a:p>
+        </p:txBody>
+      </p:sp>
+      <p:sp>
+        <p:nvSpPr>
+          <p:cNvPr id="14" name="Text 9"/>
+          <p:cNvSpPr txBox="1"/>
+          <p:nvPr/>
+        </p:nvSpPr>
+        <p:spPr>
+          <a:xfrm>
+            <a:off x="4187952" y="4882896"/>
+            <a:ext cx="7077456" cy="1234440"/>
+          </a:xfrm>
+          <a:prstGeom prst="rect">
+            <a:avLst/>
+          </a:prstGeom>
+          <a:noFill/>
+          <a:ln/>
+        </p:spPr>
+        <p:txBody>
+          <a:bodyPr wrap="square" lIns="0" tIns="0" rIns="0" bIns="0" rtlCol="0" anchor="t"/>
+          <a:lstStyle/>
+          <a:p>
+            <a:pPr indent="0" marL="0">
+              <a:spcAft>
+                <a:spcPts val="700"/>
+              </a:spcAft>
+              <a:buNone/>
+            </a:pPr>
+            <a:r>
+              <a:rPr lang="en-US" sz="1050" dirty="0">
+                <a:solidFill>
+                  <a:srgbClr val="000000"/>
+                </a:solidFill>
+                <a:latin typeface="Times New Roman" pitchFamily="34" charset="0"/>
+                <a:ea typeface="Times New Roman" pitchFamily="34" charset="-122"/>
+                <a:cs typeface="Times New Roman" pitchFamily="34" charset="-120"/>
+              </a:rPr>
+              <a:t>On the left the model tracks the participant's daily rises and falls, because it has seen other windows from this same participant during training. This is the condition under which the published result is obtained.</a:t>
+            </a:r>
+            <a:endParaRPr lang="en-US" sz="1050" dirty="0"/>
+          </a:p>
+          <a:p>
+            <a:pPr indent="0" marL="0">
+              <a:spcAft>
+                <a:spcPts val="700"/>
+              </a:spcAft>
+              <a:buNone/>
+            </a:pPr>
+            <a:r>
+              <a:rPr lang="en-US" sz="1050" dirty="0">
+                <a:solidFill>
+                  <a:srgbClr val="000000"/>
+                </a:solidFill>
+                <a:latin typeface="Times New Roman" pitchFamily="34" charset="0"/>
+                <a:ea typeface="Times New Roman" pitchFamily="34" charset="-122"/>
+                <a:cs typeface="Times New Roman" pitchFamily="34" charset="-120"/>
+              </a:rPr>
+              <a:t>On the right the participant was held out entirely, and the prediction collapses toward the population average of about 7 mmol/L.</a:t>
+            </a:r>
+            <a:endParaRPr lang="en-US" sz="1050" dirty="0"/>
+          </a:p>
+          <a:p>
+            <a:pPr indent="0" marL="0">
+              <a:spcAft>
+                <a:spcPts val="700"/>
+              </a:spcAft>
+              <a:buNone/>
+            </a:pPr>
+            <a:r>
+              <a:rPr lang="en-US" sz="1050" dirty="0">
+                <a:solidFill>
+                  <a:srgbClr val="000000"/>
+                </a:solidFill>
+                <a:latin typeface="Times New Roman" pitchFamily="34" charset="0"/>
+                <a:ea typeface="Times New Roman" pitchFamily="34" charset="-122"/>
+                <a:cs typeface="Times New Roman" pitchFamily="34" charset="-120"/>
+              </a:rPr>
+              <a:t>The Parkes grid, inset, places 93.7% of the left-hand predictions in Zones A+B.</a:t>
+            </a:r>
+            <a:endParaRPr lang="en-US" sz="1050" dirty="0"/>
+          </a:p>
+        </p:txBody>
+      </p:sp>
+    </p:spTree>
+  </p:cSld>
+  <p:clrMapOvr>
+    <a:masterClrMapping/>
+  </p:clrMapOvr>
+</p:sld>
+</file>
+
+<file path=ppt/slides/slide14.xml><?xml version="1.0" encoding="utf-8"?>
+<p:sld xmlns:a="http://schemas.openxmlformats.org/drawingml/2006/main" xmlns:r="http://schemas.openxmlformats.org/officeDocument/2006/relationships" xmlns:p="http://schemas.openxmlformats.org/presentationml/2006/main">
+  <p:cSld name="Slide 14">
+    <p:bg>
+      <p:bgPr>
+        <a:solidFill>
+          <a:srgbClr val="FFFFFF"/>
+        </a:solidFill>
+      </p:bgPr>
+    </p:bg>
+    <p:spTree>
+      <p:nvGrpSpPr>
+        <p:cNvPr id="1" name=""/>
+        <p:cNvGrpSpPr/>
+        <p:nvPr/>
+      </p:nvGrpSpPr>
+      <p:grpSpPr>
+        <a:xfrm>
+          <a:off x="0" y="0"/>
+          <a:ext cx="0" cy="0"/>
+          <a:chOff x="0" y="0"/>
+          <a:chExt cx="0" cy="0"/>
+        </a:xfrm>
+      </p:grpSpPr>
+      <p:sp>
+        <p:nvSpPr>
+          <p:cNvPr id="2" name="Text 0"/>
+          <p:cNvSpPr txBox="1"/>
+          <p:nvPr/>
+        </p:nvSpPr>
+        <p:spPr>
+          <a:xfrm>
+            <a:off x="685800" y="384048"/>
+            <a:ext cx="10820095" cy="566928"/>
+          </a:xfrm>
+          <a:prstGeom prst="rect">
+            <a:avLst/>
+          </a:prstGeom>
+          <a:noFill/>
+          <a:ln/>
+        </p:spPr>
+        <p:txBody>
+          <a:bodyPr wrap="square" lIns="0" tIns="0" rIns="0" bIns="0" rtlCol="0" anchor="ctr"/>
+          <a:lstStyle/>
+          <a:p>
+            <a:pPr indent="0" marL="0">
+              <a:buNone/>
+            </a:pPr>
+            <a:r>
+              <a:rPr lang="en-US" sz="2100" b="1" dirty="0">
+                <a:solidFill>
+                  <a:srgbClr val="000000"/>
+                </a:solidFill>
+                <a:latin typeface="Times New Roman" pitchFamily="34" charset="0"/>
+                <a:ea typeface="Times New Roman" pitchFamily="34" charset="-122"/>
+                <a:cs typeface="Times New Roman" pitchFamily="34" charset="-120"/>
+              </a:rPr>
+              <a:t>12. Results IV — Feature-Set Ablation</a:t>
+            </a:r>
+            <a:endParaRPr lang="en-US" sz="2100" dirty="0"/>
+          </a:p>
+        </p:txBody>
+      </p:sp>
+      <p:sp>
+        <p:nvSpPr>
+          <p:cNvPr id="3" name="Shape 1"/>
+          <p:cNvSpPr/>
+          <p:nvPr/>
+        </p:nvSpPr>
+        <p:spPr>
+          <a:xfrm>
+            <a:off x="685800" y="1024128"/>
+            <a:ext cx="10820095" cy="3658"/>
+          </a:xfrm>
+          <a:prstGeom prst="line">
+            <a:avLst/>
+          </a:prstGeom>
+          <a:noFill/>
+          <a:ln w="13970">
+            <a:solidFill>
+              <a:srgbClr val="000000"/>
+            </a:solidFill>
+            <a:prstDash val="solid"/>
+          </a:ln>
+        </p:spPr>
+      </p:sp>
+      <p:sp>
+        <p:nvSpPr>
+          <p:cNvPr id="4" name="Text 2"/>
+          <p:cNvSpPr txBox="1"/>
+          <p:nvPr/>
+        </p:nvSpPr>
+        <p:spPr>
+          <a:xfrm>
+            <a:off x="685800" y="6382512"/>
+            <a:ext cx="8229600" cy="256032"/>
+          </a:xfrm>
+          <a:prstGeom prst="rect">
+            <a:avLst/>
+          </a:prstGeom>
+          <a:noFill/>
+          <a:ln/>
+        </p:spPr>
+        <p:txBody>
+          <a:bodyPr wrap="square" lIns="0" tIns="0" rIns="0" bIns="0" rtlCol="0" anchor="ctr"/>
+          <a:lstStyle/>
+          <a:p>
+            <a:pPr indent="0" marL="0">
+              <a:buNone/>
+            </a:pPr>
+            <a:r>
+              <a:rPr lang="en-US" sz="800" dirty="0">
+                <a:solidFill>
+                  <a:srgbClr val="444444"/>
+                </a:solidFill>
+                <a:latin typeface="Times New Roman" pitchFamily="34" charset="0"/>
+                <a:ea typeface="Times New Roman" pitchFamily="34" charset="-122"/>
+                <a:cs typeface="Times New Roman" pitchFamily="34" charset="-120"/>
+              </a:rPr>
+              <a:t>Mid Term Review | Noninvasive Blood Glucose Estimation from ECG and PPG</a:t>
+            </a:r>
+            <a:endParaRPr lang="en-US" sz="800" dirty="0"/>
+          </a:p>
+        </p:txBody>
+      </p:sp>
+      <p:sp>
+        <p:nvSpPr>
+          <p:cNvPr id="5" name="Text 3"/>
+          <p:cNvSpPr txBox="1"/>
+          <p:nvPr/>
+        </p:nvSpPr>
+        <p:spPr>
+          <a:xfrm>
+            <a:off x="10682935" y="6382512"/>
+            <a:ext cx="822960" cy="256032"/>
+          </a:xfrm>
+          <a:prstGeom prst="rect">
+            <a:avLst/>
+          </a:prstGeom>
+          <a:noFill/>
+          <a:ln/>
+        </p:spPr>
+        <p:txBody>
+          <a:bodyPr wrap="square" lIns="0" tIns="0" rIns="0" bIns="0" rtlCol="0" anchor="ctr"/>
+          <a:lstStyle/>
+          <a:p>
+            <a:pPr algn="r" indent="0" marL="0">
+              <a:buNone/>
+            </a:pPr>
+            <a:r>
+              <a:rPr lang="en-US" sz="800" dirty="0">
+                <a:solidFill>
+                  <a:srgbClr val="444444"/>
+                </a:solidFill>
+                <a:latin typeface="Times New Roman" pitchFamily="34" charset="0"/>
+                <a:ea typeface="Times New Roman" pitchFamily="34" charset="-122"/>
+                <a:cs typeface="Times New Roman" pitchFamily="34" charset="-120"/>
+              </a:rPr>
+              <a:t>14</a:t>
+            </a:r>
+            <a:endParaRPr lang="en-US" sz="800" dirty="0"/>
+          </a:p>
+        </p:txBody>
+      </p:sp>
+      <p:sp>
+        <p:nvSpPr>
+          <p:cNvPr id="6" name="Text 4"/>
+          <p:cNvSpPr txBox="1"/>
+          <p:nvPr/>
+        </p:nvSpPr>
+        <p:spPr>
+          <a:xfrm>
+            <a:off x="685800" y="1133856"/>
+            <a:ext cx="10820095" cy="310896"/>
+          </a:xfrm>
+          <a:prstGeom prst="rect">
+            <a:avLst/>
+          </a:prstGeom>
+          <a:noFill/>
+          <a:ln/>
+        </p:spPr>
+        <p:txBody>
+          <a:bodyPr wrap="square" lIns="0" tIns="0" rIns="0" bIns="0" rtlCol="0" anchor="ctr"/>
+          <a:lstStyle/>
+          <a:p>
+            <a:pPr algn="ctr" indent="0" marL="0">
+              <a:buNone/>
+            </a:pPr>
+            <a:r>
+              <a:rPr lang="en-US" sz="1300" b="1" dirty="0">
+                <a:solidFill>
+                  <a:srgbClr val="000000"/>
+                </a:solidFill>
+                <a:latin typeface="Times New Roman" pitchFamily="34" charset="0"/>
+                <a:ea typeface="Times New Roman" pitchFamily="34" charset="-122"/>
+                <a:cs typeface="Times New Roman" pitchFamily="34" charset="-120"/>
+              </a:rPr>
               <a:t>Every feature set evaluated under leave-one-subject-out with Choquet fusion</a:t>
             </a:r>
             <a:endParaRPr lang="en-US" sz="1300" dirty="0"/>
@@ -7498,7 +11089,7 @@
       </p:sp>
       <p:graphicFrame>
         <p:nvGraphicFramePr>
-          <p:cNvPr id="14" name="Table 0"/>
+          <p:cNvPr id="15" name="Table 0"/>
           <p:cNvGraphicFramePr>
             <a:graphicFrameLocks noGrp="1"/>
           </p:cNvGraphicFramePr>
@@ -10235,45 +13826,6 @@
           </a:p>
         </p:txBody>
       </p:sp>
-      <p:sp>
-        <p:nvSpPr>
-          <p:cNvPr id="16" name="Text 13"/>
-          <p:cNvSpPr txBox="1"/>
-          <p:nvPr/>
-        </p:nvSpPr>
-        <p:spPr>
-          <a:xfrm>
-            <a:off x="685800" y="5989320"/>
-            <a:ext cx="10820095" cy="457200"/>
-          </a:xfrm>
-          <a:prstGeom prst="rect">
-            <a:avLst/>
-          </a:prstGeom>
-          <a:noFill/>
-          <a:ln/>
-        </p:spPr>
-        <p:txBody>
-          <a:bodyPr wrap="square" lIns="0" tIns="0" rIns="0" bIns="0" rtlCol="0" anchor="ctr"/>
-          <a:lstStyle/>
-          <a:p>
-            <a:pPr algn="ctr" indent="0" marL="0">
-              <a:buNone/>
-            </a:pPr>
-            <a:r>
-              <a:rPr lang="en-US" sz="1150" b="1" dirty="0">
-                <a:solidFill>
-                  <a:srgbClr val="000000"/>
-                </a:solidFill>
-                <a:latin typeface="Times New Roman" pitchFamily="34" charset="0"/>
-                <a:ea typeface="Times New Roman" pitchFamily="34" charset="-122"/>
-                <a:cs typeface="Times New Roman" pitchFamily="34" charset="-120"/>
-              </a:rPr>
-              <a:t>Equivalent to Tables III and IV of the source paper.</a:t>
-            </a:r>
-            <a:endParaRPr lang="en-US" sz="1150" dirty="0"/>
-          </a:p>
-        </p:txBody>
-      </p:sp>
     </p:spTree>
   </p:cSld>
   <p:clrMapOvr>
@@ -10282,9 +13834,9 @@
 </p:sld>
 </file>
 
-<file path=ppt/slides/slide14.xml><?xml version="1.0" encoding="utf-8"?>
+<file path=ppt/slides/slide15.xml><?xml version="1.0" encoding="utf-8"?>
 <p:sld xmlns:a="http://schemas.openxmlformats.org/drawingml/2006/main" xmlns:r="http://schemas.openxmlformats.org/officeDocument/2006/relationships" xmlns:p="http://schemas.openxmlformats.org/presentationml/2006/main">
-  <p:cSld name="Slide 14">
+  <p:cSld name="Slide 15">
     <p:bg>
       <p:bgPr>
         <a:solidFill>
@@ -10339,7 +13891,7 @@
                 <a:ea typeface="Times New Roman" pitchFamily="34" charset="-122"/>
                 <a:cs typeface="Times New Roman" pitchFamily="34" charset="-120"/>
               </a:rPr>
-              <a:t>12. Results IV — Degeneracy of the Fusion Operator</a:t>
+              <a:t>13. Results V — Degeneracy of the Fusion Operator</a:t>
             </a:r>
             <a:endParaRPr lang="en-US" sz="2100" dirty="0"/>
           </a:p>
@@ -10440,7 +13992,7 @@
                 <a:ea typeface="Times New Roman" pitchFamily="34" charset="-122"/>
                 <a:cs typeface="Times New Roman" pitchFamily="34" charset="-120"/>
               </a:rPr>
-              <a:t>14</a:t>
+              <a:t>15</a:t>
             </a:r>
             <a:endParaRPr lang="en-US" sz="800" dirty="0"/>
           </a:p>
@@ -10538,7 +14090,7 @@
       </p:pic>
       <p:graphicFrame>
         <p:nvGraphicFramePr>
-          <p:cNvPr id="15" name="Table 0"/>
+          <p:cNvPr id="16" name="Table 0"/>
           <p:cNvGraphicFramePr>
             <a:graphicFrameLocks noGrp="1"/>
           </p:cNvGraphicFramePr>
@@ -12385,45 +15937,6 @@
           </a:p>
         </p:txBody>
       </p:sp>
-      <p:sp>
-        <p:nvSpPr>
-          <p:cNvPr id="13" name="Text 8"/>
-          <p:cNvSpPr txBox="1"/>
-          <p:nvPr/>
-        </p:nvSpPr>
-        <p:spPr>
-          <a:xfrm>
-            <a:off x="685800" y="6035040"/>
-            <a:ext cx="10820095" cy="457200"/>
-          </a:xfrm>
-          <a:prstGeom prst="rect">
-            <a:avLst/>
-          </a:prstGeom>
-          <a:noFill/>
-          <a:ln/>
-        </p:spPr>
-        <p:txBody>
-          <a:bodyPr wrap="square" lIns="0" tIns="0" rIns="0" bIns="0" rtlCol="0" anchor="ctr"/>
-          <a:lstStyle/>
-          <a:p>
-            <a:pPr algn="ctr" indent="0" marL="0">
-              <a:buNone/>
-            </a:pPr>
-            <a:r>
-              <a:rPr lang="en-US" sz="1150" b="1" dirty="0">
-                <a:solidFill>
-                  <a:srgbClr val="000000"/>
-                </a:solidFill>
-                <a:latin typeface="Times New Roman" pitchFamily="34" charset="0"/>
-                <a:ea typeface="Times New Roman" pitchFamily="34" charset="-122"/>
-                <a:cs typeface="Times New Roman" pitchFamily="34" charset="-120"/>
-              </a:rPr>
-              <a:t>The symmetric-measure/OWA equivalence is established theory. The contribution here is its identification as a practical failure mode of performance-based density estimation, with a closed-form diagnostic.</a:t>
-            </a:r>
-            <a:endParaRPr lang="en-US" sz="1150" dirty="0"/>
-          </a:p>
-        </p:txBody>
-      </p:sp>
     </p:spTree>
   </p:cSld>
   <p:clrMapOvr>
@@ -12432,9 +15945,9 @@
 </p:sld>
 </file>
 
-<file path=ppt/slides/slide15.xml><?xml version="1.0" encoding="utf-8"?>
+<file path=ppt/slides/slide16.xml><?xml version="1.0" encoding="utf-8"?>
 <p:sld xmlns:a="http://schemas.openxmlformats.org/drawingml/2006/main" xmlns:r="http://schemas.openxmlformats.org/officeDocument/2006/relationships" xmlns:p="http://schemas.openxmlformats.org/presentationml/2006/main">
-  <p:cSld name="Slide 15">
+  <p:cSld name="Slide 16">
     <p:bg>
       <p:bgPr>
         <a:solidFill>
@@ -12489,7 +16002,7 @@
                 <a:ea typeface="Times New Roman" pitchFamily="34" charset="-122"/>
                 <a:cs typeface="Times New Roman" pitchFamily="34" charset="-120"/>
               </a:rPr>
-              <a:t>13. Future Work and Expected Outcomes</a:t>
+              <a:t>14. Future Work and Expected Outcomes</a:t>
             </a:r>
             <a:endParaRPr lang="en-US" sz="2100" dirty="0"/>
           </a:p>
@@ -12590,7 +16103,7 @@
                 <a:ea typeface="Times New Roman" pitchFamily="34" charset="-122"/>
                 <a:cs typeface="Times New Roman" pitchFamily="34" charset="-120"/>
               </a:rPr>
-              <a:t>15</a:t>
+              <a:t>16</a:t>
             </a:r>
             <a:endParaRPr lang="en-US" sz="800" dirty="0"/>
           </a:p>
@@ -13234,45 +16747,6 @@
           </a:p>
         </p:txBody>
       </p:sp>
-      <p:sp>
-        <p:nvSpPr>
-          <p:cNvPr id="20" name="Text 18"/>
-          <p:cNvSpPr txBox="1"/>
-          <p:nvPr/>
-        </p:nvSpPr>
-        <p:spPr>
-          <a:xfrm>
-            <a:off x="685800" y="6080760"/>
-            <a:ext cx="10820095" cy="457200"/>
-          </a:xfrm>
-          <a:prstGeom prst="rect">
-            <a:avLst/>
-          </a:prstGeom>
-          <a:noFill/>
-          <a:ln/>
-        </p:spPr>
-        <p:txBody>
-          <a:bodyPr wrap="square" lIns="0" tIns="0" rIns="0" bIns="0" rtlCol="0" anchor="ctr"/>
-          <a:lstStyle/>
-          <a:p>
-            <a:pPr algn="ctr" indent="0" marL="0">
-              <a:buNone/>
-            </a:pPr>
-            <a:r>
-              <a:rPr lang="en-US" sz="1150" b="1" dirty="0">
-                <a:solidFill>
-                  <a:srgbClr val="000000"/>
-                </a:solidFill>
-                <a:latin typeface="Times New Roman" pitchFamily="34" charset="0"/>
-                <a:ea typeface="Times New Roman" pitchFamily="34" charset="-122"/>
-                <a:cs typeface="Times New Roman" pitchFamily="34" charset="-120"/>
-              </a:rPr>
-              <a:t>A short reproducibility paper is planned. Candidate venues: IEEE Journal of Biomedical and Health Informatics, or the ML Reproducibility Challenge.</a:t>
-            </a:r>
-            <a:endParaRPr lang="en-US" sz="1150" dirty="0"/>
-          </a:p>
-        </p:txBody>
-      </p:sp>
     </p:spTree>
   </p:cSld>
   <p:clrMapOvr>
@@ -13281,9 +16755,9 @@
 </p:sld>
 </file>
 
-<file path=ppt/slides/slide16.xml><?xml version="1.0" encoding="utf-8"?>
+<file path=ppt/slides/slide17.xml><?xml version="1.0" encoding="utf-8"?>
 <p:sld xmlns:a="http://schemas.openxmlformats.org/drawingml/2006/main" xmlns:r="http://schemas.openxmlformats.org/officeDocument/2006/relationships" xmlns:p="http://schemas.openxmlformats.org/presentationml/2006/main">
-  <p:cSld name="Slide 16">
+  <p:cSld name="Slide 17">
     <p:bg>
       <p:bgPr>
         <a:solidFill>
@@ -13338,7 +16812,7 @@
                 <a:ea typeface="Times New Roman" pitchFamily="34" charset="-122"/>
                 <a:cs typeface="Times New Roman" pitchFamily="34" charset="-120"/>
               </a:rPr>
-              <a:t>14. Conclusion and References</a:t>
+              <a:t>15. Conclusion and References</a:t>
             </a:r>
             <a:endParaRPr lang="en-US" sz="2100" dirty="0"/>
           </a:p>
@@ -13439,7 +16913,7 @@
                 <a:ea typeface="Times New Roman" pitchFamily="34" charset="-122"/>
                 <a:cs typeface="Times New Roman" pitchFamily="34" charset="-120"/>
               </a:rPr>
-              <a:t>16</a:t>
+              <a:t>17</a:t>
             </a:r>
             <a:endParaRPr lang="en-US" sz="800" dirty="0"/>
           </a:p>
@@ -13923,7 +17397,7 @@
         </p:nvSpPr>
         <p:spPr>
           <a:xfrm>
-            <a:off x="1051560" y="1572768"/>
+            <a:off x="1051560" y="1517904"/>
             <a:ext cx="457200" cy="384048"/>
           </a:xfrm>
           <a:prstGeom prst="rect">
@@ -13962,7 +17436,7 @@
         </p:nvSpPr>
         <p:spPr>
           <a:xfrm>
-            <a:off x="1618488" y="1572768"/>
+            <a:off x="1618488" y="1517904"/>
             <a:ext cx="4754880" cy="384048"/>
           </a:xfrm>
           <a:prstGeom prst="rect">
@@ -14001,7 +17475,7 @@
         </p:nvSpPr>
         <p:spPr>
           <a:xfrm>
-            <a:off x="1051560" y="2075688"/>
+            <a:off x="1051560" y="2002536"/>
             <a:ext cx="457200" cy="384048"/>
           </a:xfrm>
           <a:prstGeom prst="rect">
@@ -14040,7 +17514,7 @@
         </p:nvSpPr>
         <p:spPr>
           <a:xfrm>
-            <a:off x="1618488" y="2075688"/>
+            <a:off x="1618488" y="2002536"/>
             <a:ext cx="4754880" cy="384048"/>
           </a:xfrm>
           <a:prstGeom prst="rect">
@@ -14079,7 +17553,7 @@
         </p:nvSpPr>
         <p:spPr>
           <a:xfrm>
-            <a:off x="1051560" y="2578608"/>
+            <a:off x="1051560" y="2487168"/>
             <a:ext cx="457200" cy="384048"/>
           </a:xfrm>
           <a:prstGeom prst="rect">
@@ -14118,7 +17592,7 @@
         </p:nvSpPr>
         <p:spPr>
           <a:xfrm>
-            <a:off x="1618488" y="2578608"/>
+            <a:off x="1618488" y="2487168"/>
             <a:ext cx="4754880" cy="384048"/>
           </a:xfrm>
           <a:prstGeom prst="rect">
@@ -14157,7 +17631,7 @@
         </p:nvSpPr>
         <p:spPr>
           <a:xfrm>
-            <a:off x="1051560" y="3081528"/>
+            <a:off x="1051560" y="2971800"/>
             <a:ext cx="457200" cy="384048"/>
           </a:xfrm>
           <a:prstGeom prst="rect">
@@ -14196,7 +17670,7 @@
         </p:nvSpPr>
         <p:spPr>
           <a:xfrm>
-            <a:off x="1618488" y="3081528"/>
+            <a:off x="1618488" y="2971800"/>
             <a:ext cx="4754880" cy="384048"/>
           </a:xfrm>
           <a:prstGeom prst="rect">
@@ -14235,7 +17709,7 @@
         </p:nvSpPr>
         <p:spPr>
           <a:xfrm>
-            <a:off x="1051560" y="3584448"/>
+            <a:off x="1051560" y="3456432"/>
             <a:ext cx="457200" cy="384048"/>
           </a:xfrm>
           <a:prstGeom prst="rect">
@@ -14274,7 +17748,7 @@
         </p:nvSpPr>
         <p:spPr>
           <a:xfrm>
-            <a:off x="1618488" y="3584448"/>
+            <a:off x="1618488" y="3456432"/>
             <a:ext cx="4754880" cy="384048"/>
           </a:xfrm>
           <a:prstGeom prst="rect">
@@ -14313,7 +17787,7 @@
         </p:nvSpPr>
         <p:spPr>
           <a:xfrm>
-            <a:off x="1051560" y="4087368"/>
+            <a:off x="1051560" y="3941064"/>
             <a:ext cx="457200" cy="384048"/>
           </a:xfrm>
           <a:prstGeom prst="rect">
@@ -14352,7 +17826,7 @@
         </p:nvSpPr>
         <p:spPr>
           <a:xfrm>
-            <a:off x="1618488" y="4087368"/>
+            <a:off x="1618488" y="3941064"/>
             <a:ext cx="4754880" cy="384048"/>
           </a:xfrm>
           <a:prstGeom prst="rect">
@@ -14391,7 +17865,7 @@
         </p:nvSpPr>
         <p:spPr>
           <a:xfrm>
-            <a:off x="1051560" y="4590288"/>
+            <a:off x="1051560" y="4425696"/>
             <a:ext cx="457200" cy="384048"/>
           </a:xfrm>
           <a:prstGeom prst="rect">
@@ -14430,7 +17904,7 @@
         </p:nvSpPr>
         <p:spPr>
           <a:xfrm>
-            <a:off x="1618488" y="4590288"/>
+            <a:off x="1618488" y="4425696"/>
             <a:ext cx="4754880" cy="384048"/>
           </a:xfrm>
           <a:prstGeom prst="rect">
@@ -14469,7 +17943,7 @@
         </p:nvSpPr>
         <p:spPr>
           <a:xfrm>
-            <a:off x="6629400" y="1572768"/>
+            <a:off x="1051560" y="4910328"/>
             <a:ext cx="457200" cy="384048"/>
           </a:xfrm>
           <a:prstGeom prst="rect">
@@ -14508,7 +17982,7 @@
         </p:nvSpPr>
         <p:spPr>
           <a:xfrm>
-            <a:off x="7196328" y="1572768"/>
+            <a:off x="1618488" y="4910328"/>
             <a:ext cx="4754880" cy="384048"/>
           </a:xfrm>
           <a:prstGeom prst="rect">
@@ -14547,7 +18021,7 @@
         </p:nvSpPr>
         <p:spPr>
           <a:xfrm>
-            <a:off x="6629400" y="2075688"/>
+            <a:off x="6629400" y="1517904"/>
             <a:ext cx="457200" cy="384048"/>
           </a:xfrm>
           <a:prstGeom prst="rect">
@@ -14586,7 +18060,7 @@
         </p:nvSpPr>
         <p:spPr>
           <a:xfrm>
-            <a:off x="7196328" y="2075688"/>
+            <a:off x="7196328" y="1517904"/>
             <a:ext cx="4754880" cy="384048"/>
           </a:xfrm>
           <a:prstGeom prst="rect">
@@ -14611,7 +18085,7 @@
                 <a:ea typeface="Times New Roman" pitchFamily="34" charset="-122"/>
                 <a:cs typeface="Times New Roman" pitchFamily="34" charset="-120"/>
               </a:rPr>
-              <a:t>Results I — Performance Under Three Split Protocols</a:t>
+              <a:t>Results I — Reproducing the Published Result</a:t>
             </a:r>
             <a:endParaRPr lang="en-US" sz="1300" dirty="0"/>
           </a:p>
@@ -14625,7 +18099,7 @@
         </p:nvSpPr>
         <p:spPr>
           <a:xfrm>
-            <a:off x="6629400" y="2578608"/>
+            <a:off x="6629400" y="2002536"/>
             <a:ext cx="457200" cy="384048"/>
           </a:xfrm>
           <a:prstGeom prst="rect">
@@ -14664,7 +18138,7 @@
         </p:nvSpPr>
         <p:spPr>
           <a:xfrm>
-            <a:off x="7196328" y="2578608"/>
+            <a:off x="7196328" y="2002536"/>
             <a:ext cx="4754880" cy="384048"/>
           </a:xfrm>
           <a:prstGeom prst="rect">
@@ -14689,7 +18163,7 @@
                 <a:ea typeface="Times New Roman" pitchFamily="34" charset="-122"/>
                 <a:cs typeface="Times New Roman" pitchFamily="34" charset="-120"/>
               </a:rPr>
-              <a:t>Results II — Parkes Error Grid and Prediction Trace</a:t>
+              <a:t>Results II — The Effect of the Evaluation Protocol</a:t>
             </a:r>
             <a:endParaRPr lang="en-US" sz="1300" dirty="0"/>
           </a:p>
@@ -14703,7 +18177,7 @@
         </p:nvSpPr>
         <p:spPr>
           <a:xfrm>
-            <a:off x="6629400" y="3081528"/>
+            <a:off x="6629400" y="2487168"/>
             <a:ext cx="457200" cy="384048"/>
           </a:xfrm>
           <a:prstGeom prst="rect">
@@ -14742,7 +18216,7 @@
         </p:nvSpPr>
         <p:spPr>
           <a:xfrm>
-            <a:off x="7196328" y="3081528"/>
+            <a:off x="7196328" y="2487168"/>
             <a:ext cx="4754880" cy="384048"/>
           </a:xfrm>
           <a:prstGeom prst="rect">
@@ -14767,7 +18241,7 @@
                 <a:ea typeface="Times New Roman" pitchFamily="34" charset="-122"/>
                 <a:cs typeface="Times New Roman" pitchFamily="34" charset="-120"/>
               </a:rPr>
-              <a:t>Results III — Feature-Set Ablation</a:t>
+              <a:t>Results III — Parkes Error Grid and Prediction Trace</a:t>
             </a:r>
             <a:endParaRPr lang="en-US" sz="1300" dirty="0"/>
           </a:p>
@@ -14781,7 +18255,7 @@
         </p:nvSpPr>
         <p:spPr>
           <a:xfrm>
-            <a:off x="6629400" y="3584448"/>
+            <a:off x="6629400" y="2971800"/>
             <a:ext cx="457200" cy="384048"/>
           </a:xfrm>
           <a:prstGeom prst="rect">
@@ -14820,7 +18294,7 @@
         </p:nvSpPr>
         <p:spPr>
           <a:xfrm>
-            <a:off x="7196328" y="3584448"/>
+            <a:off x="7196328" y="2971800"/>
             <a:ext cx="4754880" cy="384048"/>
           </a:xfrm>
           <a:prstGeom prst="rect">
@@ -14845,7 +18319,7 @@
                 <a:ea typeface="Times New Roman" pitchFamily="34" charset="-122"/>
                 <a:cs typeface="Times New Roman" pitchFamily="34" charset="-120"/>
               </a:rPr>
-              <a:t>Results IV — Degeneracy of the Fusion Operator</a:t>
+              <a:t>Results IV — Feature-Set Ablation</a:t>
             </a:r>
             <a:endParaRPr lang="en-US" sz="1300" dirty="0"/>
           </a:p>
@@ -14859,7 +18333,7 @@
         </p:nvSpPr>
         <p:spPr>
           <a:xfrm>
-            <a:off x="6629400" y="4087368"/>
+            <a:off x="6629400" y="3456432"/>
             <a:ext cx="457200" cy="384048"/>
           </a:xfrm>
           <a:prstGeom prst="rect">
@@ -14898,7 +18372,7 @@
         </p:nvSpPr>
         <p:spPr>
           <a:xfrm>
-            <a:off x="7196328" y="4087368"/>
+            <a:off x="7196328" y="3456432"/>
             <a:ext cx="4754880" cy="384048"/>
           </a:xfrm>
           <a:prstGeom prst="rect">
@@ -14923,7 +18397,7 @@
                 <a:ea typeface="Times New Roman" pitchFamily="34" charset="-122"/>
                 <a:cs typeface="Times New Roman" pitchFamily="34" charset="-120"/>
               </a:rPr>
-              <a:t>Future Work and Expected Outcomes</a:t>
+              <a:t>Results V — Degeneracy of the Fusion Operator</a:t>
             </a:r>
             <a:endParaRPr lang="en-US" sz="1300" dirty="0"/>
           </a:p>
@@ -14937,7 +18411,7 @@
         </p:nvSpPr>
         <p:spPr>
           <a:xfrm>
-            <a:off x="6629400" y="4590288"/>
+            <a:off x="6629400" y="3941064"/>
             <a:ext cx="457200" cy="384048"/>
           </a:xfrm>
           <a:prstGeom prst="rect">
@@ -14976,7 +18450,85 @@
         </p:nvSpPr>
         <p:spPr>
           <a:xfrm>
-            <a:off x="7196328" y="4590288"/>
+            <a:off x="7196328" y="3941064"/>
+            <a:ext cx="4754880" cy="384048"/>
+          </a:xfrm>
+          <a:prstGeom prst="rect">
+            <a:avLst/>
+          </a:prstGeom>
+          <a:noFill/>
+          <a:ln/>
+        </p:spPr>
+        <p:txBody>
+          <a:bodyPr wrap="square" lIns="0" tIns="0" rIns="0" bIns="0" rtlCol="0" anchor="ctr"/>
+          <a:lstStyle/>
+          <a:p>
+            <a:pPr indent="0" marL="0">
+              <a:buNone/>
+            </a:pPr>
+            <a:r>
+              <a:rPr lang="en-US" sz="1300" dirty="0">
+                <a:solidFill>
+                  <a:srgbClr val="000000"/>
+                </a:solidFill>
+                <a:latin typeface="Times New Roman" pitchFamily="34" charset="0"/>
+                <a:ea typeface="Times New Roman" pitchFamily="34" charset="-122"/>
+                <a:cs typeface="Times New Roman" pitchFamily="34" charset="-120"/>
+              </a:rPr>
+              <a:t>Future Work and Expected Outcomes</a:t>
+            </a:r>
+            <a:endParaRPr lang="en-US" sz="1300" dirty="0"/>
+          </a:p>
+        </p:txBody>
+      </p:sp>
+      <p:sp>
+        <p:nvSpPr>
+          <p:cNvPr id="32" name="Text 30"/>
+          <p:cNvSpPr txBox="1"/>
+          <p:nvPr/>
+        </p:nvSpPr>
+        <p:spPr>
+          <a:xfrm>
+            <a:off x="6629400" y="4425696"/>
+            <a:ext cx="457200" cy="384048"/>
+          </a:xfrm>
+          <a:prstGeom prst="rect">
+            <a:avLst/>
+          </a:prstGeom>
+          <a:noFill/>
+          <a:ln/>
+        </p:spPr>
+        <p:txBody>
+          <a:bodyPr wrap="square" lIns="0" tIns="0" rIns="0" bIns="0" rtlCol="0" anchor="ctr"/>
+          <a:lstStyle/>
+          <a:p>
+            <a:pPr algn="r" indent="0" marL="0">
+              <a:buNone/>
+            </a:pPr>
+            <a:r>
+              <a:rPr lang="en-US" sz="1300" dirty="0">
+                <a:solidFill>
+                  <a:srgbClr val="000000"/>
+                </a:solidFill>
+                <a:latin typeface="Times New Roman" pitchFamily="34" charset="0"/>
+                <a:ea typeface="Times New Roman" pitchFamily="34" charset="-122"/>
+                <a:cs typeface="Times New Roman" pitchFamily="34" charset="-120"/>
+              </a:rPr>
+              <a:t>15.</a:t>
+            </a:r>
+            <a:endParaRPr lang="en-US" sz="1300" dirty="0"/>
+          </a:p>
+        </p:txBody>
+      </p:sp>
+      <p:sp>
+        <p:nvSpPr>
+          <p:cNvPr id="33" name="Text 31"/>
+          <p:cNvSpPr txBox="1"/>
+          <p:nvPr/>
+        </p:nvSpPr>
+        <p:spPr>
+          <a:xfrm>
+            <a:off x="7196328" y="4425696"/>
             <a:ext cx="4754880" cy="384048"/>
           </a:xfrm>
           <a:prstGeom prst="rect">
@@ -15009,7 +18561,7 @@
       </p:sp>
       <p:sp>
         <p:nvSpPr>
-          <p:cNvPr id="32" name="Text 30"/>
+          <p:cNvPr id="34" name="Text 32"/>
           <p:cNvSpPr txBox="1"/>
           <p:nvPr/>
         </p:nvSpPr>
@@ -15048,7 +18600,7 @@
       </p:sp>
       <p:sp>
         <p:nvSpPr>
-          <p:cNvPr id="33" name="Text 31"/>
+          <p:cNvPr id="35" name="Text 33"/>
           <p:cNvSpPr txBox="1"/>
           <p:nvPr/>
         </p:nvSpPr>
@@ -15682,45 +19234,6 @@
           </a:p>
         </p:txBody>
       </p:sp>
-      <p:sp>
-        <p:nvSpPr>
-          <p:cNvPr id="15" name="Text 13"/>
-          <p:cNvSpPr txBox="1"/>
-          <p:nvPr/>
-        </p:nvSpPr>
-        <p:spPr>
-          <a:xfrm>
-            <a:off x="685800" y="5806440"/>
-            <a:ext cx="10820095" cy="457200"/>
-          </a:xfrm>
-          <a:prstGeom prst="rect">
-            <a:avLst/>
-          </a:prstGeom>
-          <a:noFill/>
-          <a:ln/>
-        </p:spPr>
-        <p:txBody>
-          <a:bodyPr wrap="square" lIns="0" tIns="0" rIns="0" bIns="0" rtlCol="0" anchor="ctr"/>
-          <a:lstStyle/>
-          <a:p>
-            <a:pPr algn="ctr" indent="0" marL="0">
-              <a:buNone/>
-            </a:pPr>
-            <a:r>
-              <a:rPr lang="en-US" sz="1150" b="1" dirty="0">
-                <a:solidFill>
-                  <a:srgbClr val="000000"/>
-                </a:solidFill>
-                <a:latin typeface="Times New Roman" pitchFamily="34" charset="0"/>
-                <a:ea typeface="Times New Roman" pitchFamily="34" charset="-122"/>
-                <a:cs typeface="Times New Roman" pitchFamily="34" charset="-120"/>
-              </a:rPr>
-              <a:t>A painless, continuous, zero-consumable glucose monitor would remove a lifelong burden — if the signal genuinely carries the information.</a:t>
-            </a:r>
-            <a:endParaRPr lang="en-US" sz="1150" dirty="0"/>
-          </a:p>
-        </p:txBody>
-      </p:sp>
     </p:spTree>
   </p:cSld>
   <p:clrMapOvr>
@@ -18541,45 +22054,6 @@
           </a:p>
         </p:txBody>
       </p:sp>
-      <p:sp>
-        <p:nvSpPr>
-          <p:cNvPr id="11" name="Text 8"/>
-          <p:cNvSpPr txBox="1"/>
-          <p:nvPr/>
-        </p:nvSpPr>
-        <p:spPr>
-          <a:xfrm>
-            <a:off x="685800" y="5806440"/>
-            <a:ext cx="10820095" cy="457200"/>
-          </a:xfrm>
-          <a:prstGeom prst="rect">
-            <a:avLst/>
-          </a:prstGeom>
-          <a:noFill/>
-          <a:ln/>
-        </p:spPr>
-        <p:txBody>
-          <a:bodyPr wrap="square" lIns="0" tIns="0" rIns="0" bIns="0" rtlCol="0" anchor="ctr"/>
-          <a:lstStyle/>
-          <a:p>
-            <a:pPr algn="ctr" indent="0" marL="0">
-              <a:buNone/>
-            </a:pPr>
-            <a:r>
-              <a:rPr lang="en-US" sz="1150" b="1" dirty="0">
-                <a:solidFill>
-                  <a:srgbClr val="000000"/>
-                </a:solidFill>
-                <a:latin typeface="Times New Roman" pitchFamily="34" charset="0"/>
-                <a:ea typeface="Times New Roman" pitchFamily="34" charset="-122"/>
-                <a:cs typeface="Times New Roman" pitchFamily="34" charset="-120"/>
-              </a:rPr>
-              <a:t>Survey takeaway: the reported accuracy is the strongest in its class, and has never been independently verified.</a:t>
-            </a:r>
-            <a:endParaRPr lang="en-US" sz="1150" dirty="0"/>
-          </a:p>
-        </p:txBody>
-      </p:sp>
     </p:spTree>
   </p:cSld>
   <p:clrMapOvr>
@@ -19520,45 +22994,6 @@
           </a:graphicData>
         </a:graphic>
       </p:graphicFrame>
-      <p:sp>
-        <p:nvSpPr>
-          <p:cNvPr id="8" name="Text 5"/>
-          <p:cNvSpPr txBox="1"/>
-          <p:nvPr/>
-        </p:nvSpPr>
-        <p:spPr>
-          <a:xfrm>
-            <a:off x="685800" y="5806440"/>
-            <a:ext cx="10820095" cy="457200"/>
-          </a:xfrm>
-          <a:prstGeom prst="rect">
-            <a:avLst/>
-          </a:prstGeom>
-          <a:noFill/>
-          <a:ln/>
-        </p:spPr>
-        <p:txBody>
-          <a:bodyPr wrap="square" lIns="0" tIns="0" rIns="0" bIns="0" rtlCol="0" anchor="ctr"/>
-          <a:lstStyle/>
-          <a:p>
-            <a:pPr algn="ctr" indent="0" marL="0">
-              <a:buNone/>
-            </a:pPr>
-            <a:r>
-              <a:rPr lang="en-US" sz="1150" b="1" dirty="0">
-                <a:solidFill>
-                  <a:srgbClr val="000000"/>
-                </a:solidFill>
-                <a:latin typeface="Times New Roman" pitchFamily="34" charset="0"/>
-                <a:ea typeface="Times New Roman" pitchFamily="34" charset="-122"/>
-                <a:cs typeface="Times New Roman" pitchFamily="34" charset="-120"/>
-              </a:rPr>
-              <a:t>Survey takeaway: the first two studies motivate our three-protocol design; the third establishes which part of our theoretical result is prior work.</a:t>
-            </a:r>
-            <a:endParaRPr lang="en-US" sz="1150" dirty="0"/>
-          </a:p>
-        </p:txBody>
-      </p:sp>
     </p:spTree>
   </p:cSld>
   <p:clrMapOvr>
@@ -20313,45 +23748,6 @@
               <a:t>No check that identical input produces identical features.</a:t>
             </a:r>
             <a:endParaRPr lang="en-US" sz="1100" dirty="0"/>
-          </a:p>
-        </p:txBody>
-      </p:sp>
-      <p:sp>
-        <p:nvSpPr>
-          <p:cNvPr id="21" name="Text 19"/>
-          <p:cNvSpPr txBox="1"/>
-          <p:nvPr/>
-        </p:nvSpPr>
-        <p:spPr>
-          <a:xfrm>
-            <a:off x="685800" y="5943600"/>
-            <a:ext cx="10820095" cy="457200"/>
-          </a:xfrm>
-          <a:prstGeom prst="rect">
-            <a:avLst/>
-          </a:prstGeom>
-          <a:noFill/>
-          <a:ln/>
-        </p:spPr>
-        <p:txBody>
-          <a:bodyPr wrap="square" lIns="0" tIns="0" rIns="0" bIns="0" rtlCol="0" anchor="ctr"/>
-          <a:lstStyle/>
-          <a:p>
-            <a:pPr algn="ctr" indent="0" marL="0">
-              <a:buNone/>
-            </a:pPr>
-            <a:r>
-              <a:rPr lang="en-US" sz="1150" b="1" dirty="0">
-                <a:solidFill>
-                  <a:srgbClr val="000000"/>
-                </a:solidFill>
-                <a:latin typeface="Times New Roman" pitchFamily="34" charset="0"/>
-                <a:ea typeface="Times New Roman" pitchFamily="34" charset="-122"/>
-                <a:cs typeface="Times New Roman" pitchFamily="34" charset="-120"/>
-              </a:rPr>
-              <a:t>Each gap above corresponds directly to one of the findings reported in Sections 9 to 12.</a:t>
-            </a:r>
-            <a:endParaRPr lang="en-US" sz="1150" dirty="0"/>
           </a:p>
         </p:txBody>
       </p:sp>
@@ -23829,45 +27225,6 @@
           </a:graphicData>
         </a:graphic>
       </p:graphicFrame>
-      <p:sp>
-        <p:nvSpPr>
-          <p:cNvPr id="9" name="Text 5"/>
-          <p:cNvSpPr txBox="1"/>
-          <p:nvPr/>
-        </p:nvSpPr>
-        <p:spPr>
-          <a:xfrm>
-            <a:off x="685800" y="5806440"/>
-            <a:ext cx="10820095" cy="457200"/>
-          </a:xfrm>
-          <a:prstGeom prst="rect">
-            <a:avLst/>
-          </a:prstGeom>
-          <a:noFill/>
-          <a:ln/>
-        </p:spPr>
-        <p:txBody>
-          <a:bodyPr wrap="square" lIns="0" tIns="0" rIns="0" bIns="0" rtlCol="0" anchor="ctr"/>
-          <a:lstStyle/>
-          <a:p>
-            <a:pPr algn="ctr" indent="0" marL="0">
-              <a:buNone/>
-            </a:pPr>
-            <a:r>
-              <a:rPr lang="en-US" sz="1150" b="1" dirty="0">
-                <a:solidFill>
-                  <a:srgbClr val="000000"/>
-                </a:solidFill>
-                <a:latin typeface="Times New Roman" pitchFamily="34" charset="0"/>
-                <a:ea typeface="Times New Roman" pitchFamily="34" charset="-122"/>
-                <a:cs typeface="Times New Roman" pitchFamily="34" charset="-120"/>
-              </a:rPr>
-              <a:t>The 2.519 mmol/L standard deviation is the RMSE of a model that always predicts the mean. That is the no-skill baseline against which every result in this work is reported.</a:t>
-            </a:r>
-            <a:endParaRPr lang="en-US" sz="1150" dirty="0"/>
-          </a:p>
-        </p:txBody>
-      </p:sp>
     </p:spTree>
   </p:cSld>
   <p:clrMapOvr>

--- a/deck/btp_midterm_review.pptx
+++ b/deck/btp_midterm_review.pptx
@@ -11081,7 +11081,7 @@
                 <a:ea typeface="Times New Roman" pitchFamily="34" charset="-122"/>
                 <a:cs typeface="Times New Roman" pitchFamily="34" charset="-120"/>
               </a:rPr>
-              <a:t>Every feature set evaluated under leave-one-subject-out with Choquet fusion</a:t>
+              <a:t>Which feature family carries the information? Run under leave-one-subject-out only, for the reason given on the right.</a:t>
             </a:r>
             <a:endParaRPr lang="en-US" sz="1300" dirty="0"/>
           </a:p>
@@ -13522,8 +13522,8 @@
         </p:nvSpPr>
         <p:spPr>
           <a:xfrm>
-            <a:off x="7680960" y="1627632"/>
-            <a:ext cx="3840480" cy="457200"/>
+            <a:off x="685800" y="3913632"/>
+            <a:ext cx="6446520" cy="274320"/>
           </a:xfrm>
           <a:prstGeom prst="rect">
             <a:avLst/>
@@ -13535,11 +13535,11 @@
           <a:bodyPr wrap="square" lIns="0" tIns="0" rIns="0" bIns="0" rtlCol="0" anchor="ctr"/>
           <a:lstStyle/>
           <a:p>
-            <a:pPr indent="0" marL="0">
+            <a:pPr algn="ctr" indent="0" marL="0">
               <a:buNone/>
             </a:pPr>
             <a:r>
-              <a:rPr lang="en-US" sz="1100" b="1" dirty="0">
+              <a:rPr lang="en-US" sz="1150" b="1" dirty="0">
                 <a:solidFill>
                   <a:srgbClr val="000000"/>
                 </a:solidFill>
@@ -13547,22 +13547,1150 @@
                 <a:ea typeface="Times New Roman" pitchFamily="34" charset="-122"/>
                 <a:cs typeface="Times New Roman" pitchFamily="34" charset="-120"/>
               </a:rPr>
-              <a:t>Every feature set falls behind the baseline.</a:t>
+              <a:t>Which configurations were run</a:t>
             </a:r>
-            <a:endParaRPr lang="en-US" sz="1100" dirty="0"/>
+            <a:endParaRPr lang="en-US" sz="1150" dirty="0"/>
           </a:p>
         </p:txBody>
       </p:sp>
+      <p:graphicFrame>
+        <p:nvGraphicFramePr>
+          <p:cNvPr id="29" name="Table 1"/>
+          <p:cNvGraphicFramePr>
+            <a:graphicFrameLocks noGrp="1"/>
+          </p:cNvGraphicFramePr>
+          <p:nvPr>
+            <p:extLst>
+              <p:ext uri="{D42A27DB-BD31-4B8C-83A1-F6EECF244321}">
+                <p14:modId xmlns:p14="http://schemas.microsoft.com/office/powerpoint/2010/main" val="1579011935"/>
+              </p:ext>
+            </p:extLst>
+          </p:nvPr>
+        </p:nvGraphicFramePr>
+        <p:xfrm>
+          <a:off x="685800" y="4261104"/>
+          <a:ext cx="6446520" cy="914400"/>
+        </p:xfrm>
+        <a:graphic>
+          <a:graphicData uri="http://schemas.openxmlformats.org/drawingml/2006/table">
+            <a:tbl>
+              <a:tblPr/>
+              <a:tblGrid>
+                <a:gridCol w="2331720"/>
+                <a:gridCol w="1371600"/>
+                <a:gridCol w="1371600"/>
+                <a:gridCol w="1371600"/>
+              </a:tblGrid>
+              <a:tr h="292608">
+                <a:tc>
+                  <a:txBody>
+                    <a:bodyPr/>
+                    <a:lstStyle/>
+                    <a:p>
+                      <a:pPr algn="ctr" indent="0" marL="0">
+                        <a:buNone/>
+                      </a:pPr>
+                      <a:r>
+                        <a:rPr lang="en-US" sz="1050" b="1" dirty="0">
+                          <a:solidFill>
+                            <a:srgbClr val="000000"/>
+                          </a:solidFill>
+                          <a:latin typeface="Times New Roman" pitchFamily="34" charset="0"/>
+                          <a:ea typeface="Times New Roman" pitchFamily="34" charset="-122"/>
+                          <a:cs typeface="Times New Roman" pitchFamily="34" charset="-120"/>
+                        </a:rPr>
+                        <a:t>Feature set</a:t>
+                      </a:r>
+                      <a:endParaRPr lang="en-US" sz="1050" dirty="0">
+                        <a:latin typeface="Times New Roman" charset="0"/>
+                        <a:ea typeface="Times New Roman" charset="0"/>
+                        <a:cs typeface="Times New Roman" charset="0"/>
+                      </a:endParaRPr>
+                    </a:p>
+                  </a:txBody>
+                  <a:tcPr marL="91440" marR="91440" marT="45720" marB="45720" anchor="ctr">
+                    <a:lnL w="12700" cap="flat" cmpd="sng" algn="ctr">
+                      <a:solidFill>
+                        <a:srgbClr val="FFFFFF"/>
+                      </a:solidFill>
+                      <a:prstDash val="solid"/>
+                      <a:round/>
+                      <a:headEnd type="none" w="med" len="med"/>
+                      <a:tailEnd type="none" w="med" len="med"/>
+                    </a:lnL>
+                    <a:lnR w="12700" cap="flat" cmpd="sng" algn="ctr">
+                      <a:solidFill>
+                        <a:srgbClr val="FFFFFF"/>
+                      </a:solidFill>
+                      <a:prstDash val="solid"/>
+                      <a:round/>
+                      <a:headEnd type="none" w="med" len="med"/>
+                      <a:tailEnd type="none" w="med" len="med"/>
+                    </a:lnR>
+                    <a:lnT w="12700" cap="flat" cmpd="sng" algn="ctr">
+                      <a:solidFill>
+                        <a:srgbClr val="FFFFFF"/>
+                      </a:solidFill>
+                      <a:prstDash val="solid"/>
+                      <a:round/>
+                      <a:headEnd type="none" w="med" len="med"/>
+                      <a:tailEnd type="none" w="med" len="med"/>
+                    </a:lnT>
+                    <a:lnB w="6350" cap="flat" cmpd="sng" algn="ctr">
+                      <a:solidFill>
+                        <a:srgbClr val="D9D9D9"/>
+                      </a:solidFill>
+                      <a:prstDash val="solid"/>
+                      <a:round/>
+                      <a:headEnd type="none" w="med" len="med"/>
+                      <a:tailEnd type="none" w="med" len="med"/>
+                    </a:lnB>
+                    <a:solidFill>
+                      <a:srgbClr val="EBEBEB"/>
+                    </a:solidFill>
+                  </a:tcPr>
+                </a:tc>
+                <a:tc>
+                  <a:txBody>
+                    <a:bodyPr/>
+                    <a:lstStyle/>
+                    <a:p>
+                      <a:pPr algn="ctr" indent="0" marL="0">
+                        <a:buNone/>
+                      </a:pPr>
+                      <a:r>
+                        <a:rPr lang="en-US" sz="1050" b="1" dirty="0">
+                          <a:solidFill>
+                            <a:srgbClr val="000000"/>
+                          </a:solidFill>
+                          <a:latin typeface="Times New Roman" pitchFamily="34" charset="0"/>
+                          <a:ea typeface="Times New Roman" pitchFamily="34" charset="-122"/>
+                          <a:cs typeface="Times New Roman" pitchFamily="34" charset="-120"/>
+                        </a:rPr>
+                        <a:t>Random window</a:t>
+                      </a:r>
+                      <a:endParaRPr lang="en-US" sz="1050" dirty="0">
+                        <a:latin typeface="Times New Roman" charset="0"/>
+                        <a:ea typeface="Times New Roman" charset="0"/>
+                        <a:cs typeface="Times New Roman" charset="0"/>
+                      </a:endParaRPr>
+                    </a:p>
+                  </a:txBody>
+                  <a:tcPr marL="91440" marR="91440" marT="45720" marB="45720" anchor="ctr">
+                    <a:lnL w="12700" cap="flat" cmpd="sng" algn="ctr">
+                      <a:solidFill>
+                        <a:srgbClr val="FFFFFF"/>
+                      </a:solidFill>
+                      <a:prstDash val="solid"/>
+                      <a:round/>
+                      <a:headEnd type="none" w="med" len="med"/>
+                      <a:tailEnd type="none" w="med" len="med"/>
+                    </a:lnL>
+                    <a:lnR w="12700" cap="flat" cmpd="sng" algn="ctr">
+                      <a:solidFill>
+                        <a:srgbClr val="FFFFFF"/>
+                      </a:solidFill>
+                      <a:prstDash val="solid"/>
+                      <a:round/>
+                      <a:headEnd type="none" w="med" len="med"/>
+                      <a:tailEnd type="none" w="med" len="med"/>
+                    </a:lnR>
+                    <a:lnT w="12700" cap="flat" cmpd="sng" algn="ctr">
+                      <a:solidFill>
+                        <a:srgbClr val="FFFFFF"/>
+                      </a:solidFill>
+                      <a:prstDash val="solid"/>
+                      <a:round/>
+                      <a:headEnd type="none" w="med" len="med"/>
+                      <a:tailEnd type="none" w="med" len="med"/>
+                    </a:lnT>
+                    <a:lnB w="6350" cap="flat" cmpd="sng" algn="ctr">
+                      <a:solidFill>
+                        <a:srgbClr val="D9D9D9"/>
+                      </a:solidFill>
+                      <a:prstDash val="solid"/>
+                      <a:round/>
+                      <a:headEnd type="none" w="med" len="med"/>
+                      <a:tailEnd type="none" w="med" len="med"/>
+                    </a:lnB>
+                    <a:solidFill>
+                      <a:srgbClr val="EBEBEB"/>
+                    </a:solidFill>
+                  </a:tcPr>
+                </a:tc>
+                <a:tc>
+                  <a:txBody>
+                    <a:bodyPr/>
+                    <a:lstStyle/>
+                    <a:p>
+                      <a:pPr algn="ctr" indent="0" marL="0">
+                        <a:buNone/>
+                      </a:pPr>
+                      <a:r>
+                        <a:rPr lang="en-US" sz="1050" b="1" dirty="0">
+                          <a:solidFill>
+                            <a:srgbClr val="000000"/>
+                          </a:solidFill>
+                          <a:latin typeface="Times New Roman" pitchFamily="34" charset="0"/>
+                          <a:ea typeface="Times New Roman" pitchFamily="34" charset="-122"/>
+                          <a:cs typeface="Times New Roman" pitchFamily="34" charset="-120"/>
+                        </a:rPr>
+                        <a:t>Subject-aware</a:t>
+                      </a:r>
+                      <a:endParaRPr lang="en-US" sz="1050" dirty="0">
+                        <a:latin typeface="Times New Roman" charset="0"/>
+                        <a:ea typeface="Times New Roman" charset="0"/>
+                        <a:cs typeface="Times New Roman" charset="0"/>
+                      </a:endParaRPr>
+                    </a:p>
+                  </a:txBody>
+                  <a:tcPr marL="91440" marR="91440" marT="45720" marB="45720" anchor="ctr">
+                    <a:lnL w="12700" cap="flat" cmpd="sng" algn="ctr">
+                      <a:solidFill>
+                        <a:srgbClr val="FFFFFF"/>
+                      </a:solidFill>
+                      <a:prstDash val="solid"/>
+                      <a:round/>
+                      <a:headEnd type="none" w="med" len="med"/>
+                      <a:tailEnd type="none" w="med" len="med"/>
+                    </a:lnL>
+                    <a:lnR w="12700" cap="flat" cmpd="sng" algn="ctr">
+                      <a:solidFill>
+                        <a:srgbClr val="FFFFFF"/>
+                      </a:solidFill>
+                      <a:prstDash val="solid"/>
+                      <a:round/>
+                      <a:headEnd type="none" w="med" len="med"/>
+                      <a:tailEnd type="none" w="med" len="med"/>
+                    </a:lnR>
+                    <a:lnT w="12700" cap="flat" cmpd="sng" algn="ctr">
+                      <a:solidFill>
+                        <a:srgbClr val="FFFFFF"/>
+                      </a:solidFill>
+                      <a:prstDash val="solid"/>
+                      <a:round/>
+                      <a:headEnd type="none" w="med" len="med"/>
+                      <a:tailEnd type="none" w="med" len="med"/>
+                    </a:lnT>
+                    <a:lnB w="6350" cap="flat" cmpd="sng" algn="ctr">
+                      <a:solidFill>
+                        <a:srgbClr val="D9D9D9"/>
+                      </a:solidFill>
+                      <a:prstDash val="solid"/>
+                      <a:round/>
+                      <a:headEnd type="none" w="med" len="med"/>
+                      <a:tailEnd type="none" w="med" len="med"/>
+                    </a:lnB>
+                    <a:solidFill>
+                      <a:srgbClr val="EBEBEB"/>
+                    </a:solidFill>
+                  </a:tcPr>
+                </a:tc>
+                <a:tc>
+                  <a:txBody>
+                    <a:bodyPr/>
+                    <a:lstStyle/>
+                    <a:p>
+                      <a:pPr algn="ctr" indent="0" marL="0">
+                        <a:buNone/>
+                      </a:pPr>
+                      <a:r>
+                        <a:rPr lang="en-US" sz="1050" b="1" dirty="0">
+                          <a:solidFill>
+                            <a:srgbClr val="000000"/>
+                          </a:solidFill>
+                          <a:latin typeface="Times New Roman" pitchFamily="34" charset="0"/>
+                          <a:ea typeface="Times New Roman" pitchFamily="34" charset="-122"/>
+                          <a:cs typeface="Times New Roman" pitchFamily="34" charset="-120"/>
+                        </a:rPr>
+                        <a:t>Leave-one-out</a:t>
+                      </a:r>
+                      <a:endParaRPr lang="en-US" sz="1050" dirty="0">
+                        <a:latin typeface="Times New Roman" charset="0"/>
+                        <a:ea typeface="Times New Roman" charset="0"/>
+                        <a:cs typeface="Times New Roman" charset="0"/>
+                      </a:endParaRPr>
+                    </a:p>
+                  </a:txBody>
+                  <a:tcPr marL="91440" marR="91440" marT="45720" marB="45720" anchor="ctr">
+                    <a:lnL w="12700" cap="flat" cmpd="sng" algn="ctr">
+                      <a:solidFill>
+                        <a:srgbClr val="FFFFFF"/>
+                      </a:solidFill>
+                      <a:prstDash val="solid"/>
+                      <a:round/>
+                      <a:headEnd type="none" w="med" len="med"/>
+                      <a:tailEnd type="none" w="med" len="med"/>
+                    </a:lnL>
+                    <a:lnR w="12700" cap="flat" cmpd="sng" algn="ctr">
+                      <a:solidFill>
+                        <a:srgbClr val="FFFFFF"/>
+                      </a:solidFill>
+                      <a:prstDash val="solid"/>
+                      <a:round/>
+                      <a:headEnd type="none" w="med" len="med"/>
+                      <a:tailEnd type="none" w="med" len="med"/>
+                    </a:lnR>
+                    <a:lnT w="12700" cap="flat" cmpd="sng" algn="ctr">
+                      <a:solidFill>
+                        <a:srgbClr val="FFFFFF"/>
+                      </a:solidFill>
+                      <a:prstDash val="solid"/>
+                      <a:round/>
+                      <a:headEnd type="none" w="med" len="med"/>
+                      <a:tailEnd type="none" w="med" len="med"/>
+                    </a:lnT>
+                    <a:lnB w="6350" cap="flat" cmpd="sng" algn="ctr">
+                      <a:solidFill>
+                        <a:srgbClr val="D9D9D9"/>
+                      </a:solidFill>
+                      <a:prstDash val="solid"/>
+                      <a:round/>
+                      <a:headEnd type="none" w="med" len="med"/>
+                      <a:tailEnd type="none" w="med" len="med"/>
+                    </a:lnB>
+                    <a:solidFill>
+                      <a:srgbClr val="EBEBEB"/>
+                    </a:solidFill>
+                  </a:tcPr>
+                </a:tc>
+              </a:tr>
+              <a:tr h="292608">
+                <a:tc>
+                  <a:txBody>
+                    <a:bodyPr/>
+                    <a:lstStyle/>
+                    <a:p>
+                      <a:pPr algn="l" indent="0" marL="0">
+                        <a:buNone/>
+                      </a:pPr>
+                      <a:r>
+                        <a:rPr lang="en-US" sz="1050" dirty="0">
+                          <a:solidFill>
+                            <a:srgbClr val="000000"/>
+                          </a:solidFill>
+                          <a:latin typeface="Times New Roman" pitchFamily="34" charset="0"/>
+                          <a:ea typeface="Times New Roman" pitchFamily="34" charset="-122"/>
+                          <a:cs typeface="Times New Roman" pitchFamily="34" charset="-120"/>
+                        </a:rPr>
+                        <a:t>Fused (193)</a:t>
+                      </a:r>
+                      <a:endParaRPr lang="en-US" sz="1050" dirty="0">
+                        <a:latin typeface="Times New Roman" charset="0"/>
+                        <a:ea typeface="Times New Roman" charset="0"/>
+                        <a:cs typeface="Times New Roman" charset="0"/>
+                      </a:endParaRPr>
+                    </a:p>
+                  </a:txBody>
+                  <a:tcPr marL="91440" marR="91440" marT="45720" marB="45720" anchor="ctr">
+                    <a:lnL w="12700" cap="flat" cmpd="sng" algn="ctr">
+                      <a:solidFill>
+                        <a:srgbClr val="FFFFFF"/>
+                      </a:solidFill>
+                      <a:prstDash val="solid"/>
+                      <a:round/>
+                      <a:headEnd type="none" w="med" len="med"/>
+                      <a:tailEnd type="none" w="med" len="med"/>
+                    </a:lnL>
+                    <a:lnR w="12700" cap="flat" cmpd="sng" algn="ctr">
+                      <a:solidFill>
+                        <a:srgbClr val="FFFFFF"/>
+                      </a:solidFill>
+                      <a:prstDash val="solid"/>
+                      <a:round/>
+                      <a:headEnd type="none" w="med" len="med"/>
+                      <a:tailEnd type="none" w="med" len="med"/>
+                    </a:lnR>
+                    <a:lnT w="12700" cap="flat" cmpd="sng" algn="ctr">
+                      <a:solidFill>
+                        <a:srgbClr val="FFFFFF"/>
+                      </a:solidFill>
+                      <a:prstDash val="solid"/>
+                      <a:round/>
+                      <a:headEnd type="none" w="med" len="med"/>
+                      <a:tailEnd type="none" w="med" len="med"/>
+                    </a:lnT>
+                    <a:lnB w="6350" cap="flat" cmpd="sng" algn="ctr">
+                      <a:solidFill>
+                        <a:srgbClr val="D9D9D9"/>
+                      </a:solidFill>
+                      <a:prstDash val="solid"/>
+                      <a:round/>
+                      <a:headEnd type="none" w="med" len="med"/>
+                      <a:tailEnd type="none" w="med" len="med"/>
+                    </a:lnB>
+                    <a:solidFill>
+                      <a:srgbClr val="FFFFFF"/>
+                    </a:solidFill>
+                  </a:tcPr>
+                </a:tc>
+                <a:tc>
+                  <a:txBody>
+                    <a:bodyPr/>
+                    <a:lstStyle/>
+                    <a:p>
+                      <a:pPr algn="ctr" indent="0" marL="0">
+                        <a:buNone/>
+                      </a:pPr>
+                      <a:r>
+                        <a:rPr lang="en-US" sz="1050" dirty="0">
+                          <a:solidFill>
+                            <a:srgbClr val="000000"/>
+                          </a:solidFill>
+                          <a:latin typeface="Times New Roman" pitchFamily="34" charset="0"/>
+                          <a:ea typeface="Times New Roman" pitchFamily="34" charset="-122"/>
+                          <a:cs typeface="Times New Roman" pitchFamily="34" charset="-120"/>
+                        </a:rPr>
+                        <a:t>run</a:t>
+                      </a:r>
+                      <a:endParaRPr lang="en-US" sz="1050" dirty="0">
+                        <a:latin typeface="Times New Roman" charset="0"/>
+                        <a:ea typeface="Times New Roman" charset="0"/>
+                        <a:cs typeface="Times New Roman" charset="0"/>
+                      </a:endParaRPr>
+                    </a:p>
+                  </a:txBody>
+                  <a:tcPr marL="91440" marR="91440" marT="45720" marB="45720" anchor="ctr">
+                    <a:lnL w="12700" cap="flat" cmpd="sng" algn="ctr">
+                      <a:solidFill>
+                        <a:srgbClr val="FFFFFF"/>
+                      </a:solidFill>
+                      <a:prstDash val="solid"/>
+                      <a:round/>
+                      <a:headEnd type="none" w="med" len="med"/>
+                      <a:tailEnd type="none" w="med" len="med"/>
+                    </a:lnL>
+                    <a:lnR w="12700" cap="flat" cmpd="sng" algn="ctr">
+                      <a:solidFill>
+                        <a:srgbClr val="FFFFFF"/>
+                      </a:solidFill>
+                      <a:prstDash val="solid"/>
+                      <a:round/>
+                      <a:headEnd type="none" w="med" len="med"/>
+                      <a:tailEnd type="none" w="med" len="med"/>
+                    </a:lnR>
+                    <a:lnT w="12700" cap="flat" cmpd="sng" algn="ctr">
+                      <a:solidFill>
+                        <a:srgbClr val="FFFFFF"/>
+                      </a:solidFill>
+                      <a:prstDash val="solid"/>
+                      <a:round/>
+                      <a:headEnd type="none" w="med" len="med"/>
+                      <a:tailEnd type="none" w="med" len="med"/>
+                    </a:lnT>
+                    <a:lnB w="6350" cap="flat" cmpd="sng" algn="ctr">
+                      <a:solidFill>
+                        <a:srgbClr val="D9D9D9"/>
+                      </a:solidFill>
+                      <a:prstDash val="solid"/>
+                      <a:round/>
+                      <a:headEnd type="none" w="med" len="med"/>
+                      <a:tailEnd type="none" w="med" len="med"/>
+                    </a:lnB>
+                    <a:solidFill>
+                      <a:srgbClr val="FFFFFF"/>
+                    </a:solidFill>
+                  </a:tcPr>
+                </a:tc>
+                <a:tc>
+                  <a:txBody>
+                    <a:bodyPr/>
+                    <a:lstStyle/>
+                    <a:p>
+                      <a:pPr algn="ctr" indent="0" marL="0">
+                        <a:buNone/>
+                      </a:pPr>
+                      <a:r>
+                        <a:rPr lang="en-US" sz="1050" dirty="0">
+                          <a:solidFill>
+                            <a:srgbClr val="000000"/>
+                          </a:solidFill>
+                          <a:latin typeface="Times New Roman" pitchFamily="34" charset="0"/>
+                          <a:ea typeface="Times New Roman" pitchFamily="34" charset="-122"/>
+                          <a:cs typeface="Times New Roman" pitchFamily="34" charset="-120"/>
+                        </a:rPr>
+                        <a:t>run</a:t>
+                      </a:r>
+                      <a:endParaRPr lang="en-US" sz="1050" dirty="0">
+                        <a:latin typeface="Times New Roman" charset="0"/>
+                        <a:ea typeface="Times New Roman" charset="0"/>
+                        <a:cs typeface="Times New Roman" charset="0"/>
+                      </a:endParaRPr>
+                    </a:p>
+                  </a:txBody>
+                  <a:tcPr marL="91440" marR="91440" marT="45720" marB="45720" anchor="ctr">
+                    <a:lnL w="12700" cap="flat" cmpd="sng" algn="ctr">
+                      <a:solidFill>
+                        <a:srgbClr val="FFFFFF"/>
+                      </a:solidFill>
+                      <a:prstDash val="solid"/>
+                      <a:round/>
+                      <a:headEnd type="none" w="med" len="med"/>
+                      <a:tailEnd type="none" w="med" len="med"/>
+                    </a:lnL>
+                    <a:lnR w="12700" cap="flat" cmpd="sng" algn="ctr">
+                      <a:solidFill>
+                        <a:srgbClr val="FFFFFF"/>
+                      </a:solidFill>
+                      <a:prstDash val="solid"/>
+                      <a:round/>
+                      <a:headEnd type="none" w="med" len="med"/>
+                      <a:tailEnd type="none" w="med" len="med"/>
+                    </a:lnR>
+                    <a:lnT w="12700" cap="flat" cmpd="sng" algn="ctr">
+                      <a:solidFill>
+                        <a:srgbClr val="FFFFFF"/>
+                      </a:solidFill>
+                      <a:prstDash val="solid"/>
+                      <a:round/>
+                      <a:headEnd type="none" w="med" len="med"/>
+                      <a:tailEnd type="none" w="med" len="med"/>
+                    </a:lnT>
+                    <a:lnB w="6350" cap="flat" cmpd="sng" algn="ctr">
+                      <a:solidFill>
+                        <a:srgbClr val="D9D9D9"/>
+                      </a:solidFill>
+                      <a:prstDash val="solid"/>
+                      <a:round/>
+                      <a:headEnd type="none" w="med" len="med"/>
+                      <a:tailEnd type="none" w="med" len="med"/>
+                    </a:lnB>
+                    <a:solidFill>
+                      <a:srgbClr val="FFFFFF"/>
+                    </a:solidFill>
+                  </a:tcPr>
+                </a:tc>
+                <a:tc>
+                  <a:txBody>
+                    <a:bodyPr/>
+                    <a:lstStyle/>
+                    <a:p>
+                      <a:pPr algn="ctr" indent="0" marL="0">
+                        <a:buNone/>
+                      </a:pPr>
+                      <a:r>
+                        <a:rPr lang="en-US" sz="1050" dirty="0">
+                          <a:solidFill>
+                            <a:srgbClr val="000000"/>
+                          </a:solidFill>
+                          <a:latin typeface="Times New Roman" pitchFamily="34" charset="0"/>
+                          <a:ea typeface="Times New Roman" pitchFamily="34" charset="-122"/>
+                          <a:cs typeface="Times New Roman" pitchFamily="34" charset="-120"/>
+                        </a:rPr>
+                        <a:t>run</a:t>
+                      </a:r>
+                      <a:endParaRPr lang="en-US" sz="1050" dirty="0">
+                        <a:latin typeface="Times New Roman" charset="0"/>
+                        <a:ea typeface="Times New Roman" charset="0"/>
+                        <a:cs typeface="Times New Roman" charset="0"/>
+                      </a:endParaRPr>
+                    </a:p>
+                  </a:txBody>
+                  <a:tcPr marL="91440" marR="91440" marT="45720" marB="45720" anchor="ctr">
+                    <a:lnL w="12700" cap="flat" cmpd="sng" algn="ctr">
+                      <a:solidFill>
+                        <a:srgbClr val="FFFFFF"/>
+                      </a:solidFill>
+                      <a:prstDash val="solid"/>
+                      <a:round/>
+                      <a:headEnd type="none" w="med" len="med"/>
+                      <a:tailEnd type="none" w="med" len="med"/>
+                    </a:lnL>
+                    <a:lnR w="12700" cap="flat" cmpd="sng" algn="ctr">
+                      <a:solidFill>
+                        <a:srgbClr val="FFFFFF"/>
+                      </a:solidFill>
+                      <a:prstDash val="solid"/>
+                      <a:round/>
+                      <a:headEnd type="none" w="med" len="med"/>
+                      <a:tailEnd type="none" w="med" len="med"/>
+                    </a:lnR>
+                    <a:lnT w="12700" cap="flat" cmpd="sng" algn="ctr">
+                      <a:solidFill>
+                        <a:srgbClr val="FFFFFF"/>
+                      </a:solidFill>
+                      <a:prstDash val="solid"/>
+                      <a:round/>
+                      <a:headEnd type="none" w="med" len="med"/>
+                      <a:tailEnd type="none" w="med" len="med"/>
+                    </a:lnT>
+                    <a:lnB w="6350" cap="flat" cmpd="sng" algn="ctr">
+                      <a:solidFill>
+                        <a:srgbClr val="D9D9D9"/>
+                      </a:solidFill>
+                      <a:prstDash val="solid"/>
+                      <a:round/>
+                      <a:headEnd type="none" w="med" len="med"/>
+                      <a:tailEnd type="none" w="med" len="med"/>
+                    </a:lnB>
+                    <a:solidFill>
+                      <a:srgbClr val="FFFFFF"/>
+                    </a:solidFill>
+                  </a:tcPr>
+                </a:tc>
+              </a:tr>
+              <a:tr h="292608">
+                <a:tc>
+                  <a:txBody>
+                    <a:bodyPr/>
+                    <a:lstStyle/>
+                    <a:p>
+                      <a:pPr algn="l" indent="0" marL="0">
+                        <a:buNone/>
+                      </a:pPr>
+                      <a:r>
+                        <a:rPr lang="en-US" sz="1050" dirty="0">
+                          <a:solidFill>
+                            <a:srgbClr val="000000"/>
+                          </a:solidFill>
+                          <a:latin typeface="Times New Roman" pitchFamily="34" charset="0"/>
+                          <a:ea typeface="Times New Roman" pitchFamily="34" charset="-122"/>
+                          <a:cs typeface="Times New Roman" pitchFamily="34" charset="-120"/>
+                        </a:rPr>
+                        <a:t>ECG only, PPG only</a:t>
+                      </a:r>
+                      <a:endParaRPr lang="en-US" sz="1050" dirty="0">
+                        <a:latin typeface="Times New Roman" charset="0"/>
+                        <a:ea typeface="Times New Roman" charset="0"/>
+                        <a:cs typeface="Times New Roman" charset="0"/>
+                      </a:endParaRPr>
+                    </a:p>
+                  </a:txBody>
+                  <a:tcPr marL="91440" marR="91440" marT="45720" marB="45720" anchor="ctr">
+                    <a:lnL w="12700" cap="flat" cmpd="sng" algn="ctr">
+                      <a:solidFill>
+                        <a:srgbClr val="FFFFFF"/>
+                      </a:solidFill>
+                      <a:prstDash val="solid"/>
+                      <a:round/>
+                      <a:headEnd type="none" w="med" len="med"/>
+                      <a:tailEnd type="none" w="med" len="med"/>
+                    </a:lnL>
+                    <a:lnR w="12700" cap="flat" cmpd="sng" algn="ctr">
+                      <a:solidFill>
+                        <a:srgbClr val="FFFFFF"/>
+                      </a:solidFill>
+                      <a:prstDash val="solid"/>
+                      <a:round/>
+                      <a:headEnd type="none" w="med" len="med"/>
+                      <a:tailEnd type="none" w="med" len="med"/>
+                    </a:lnR>
+                    <a:lnT w="12700" cap="flat" cmpd="sng" algn="ctr">
+                      <a:solidFill>
+                        <a:srgbClr val="FFFFFF"/>
+                      </a:solidFill>
+                      <a:prstDash val="solid"/>
+                      <a:round/>
+                      <a:headEnd type="none" w="med" len="med"/>
+                      <a:tailEnd type="none" w="med" len="med"/>
+                    </a:lnT>
+                    <a:lnB w="6350" cap="flat" cmpd="sng" algn="ctr">
+                      <a:solidFill>
+                        <a:srgbClr val="D9D9D9"/>
+                      </a:solidFill>
+                      <a:prstDash val="solid"/>
+                      <a:round/>
+                      <a:headEnd type="none" w="med" len="med"/>
+                      <a:tailEnd type="none" w="med" len="med"/>
+                    </a:lnB>
+                    <a:solidFill>
+                      <a:srgbClr val="FFFFFF"/>
+                    </a:solidFill>
+                  </a:tcPr>
+                </a:tc>
+                <a:tc>
+                  <a:txBody>
+                    <a:bodyPr/>
+                    <a:lstStyle/>
+                    <a:p>
+                      <a:pPr algn="ctr" indent="0" marL="0">
+                        <a:buNone/>
+                      </a:pPr>
+                      <a:r>
+                        <a:rPr lang="en-US" sz="1050" dirty="0">
+                          <a:solidFill>
+                            <a:srgbClr val="000000"/>
+                          </a:solidFill>
+                          <a:latin typeface="Times New Roman" pitchFamily="34" charset="0"/>
+                          <a:ea typeface="Times New Roman" pitchFamily="34" charset="-122"/>
+                          <a:cs typeface="Times New Roman" pitchFamily="34" charset="-120"/>
+                        </a:rPr>
+                        <a:t>not run</a:t>
+                      </a:r>
+                      <a:endParaRPr lang="en-US" sz="1050" dirty="0">
+                        <a:latin typeface="Times New Roman" charset="0"/>
+                        <a:ea typeface="Times New Roman" charset="0"/>
+                        <a:cs typeface="Times New Roman" charset="0"/>
+                      </a:endParaRPr>
+                    </a:p>
+                  </a:txBody>
+                  <a:tcPr marL="91440" marR="91440" marT="45720" marB="45720" anchor="ctr">
+                    <a:lnL w="12700" cap="flat" cmpd="sng" algn="ctr">
+                      <a:solidFill>
+                        <a:srgbClr val="FFFFFF"/>
+                      </a:solidFill>
+                      <a:prstDash val="solid"/>
+                      <a:round/>
+                      <a:headEnd type="none" w="med" len="med"/>
+                      <a:tailEnd type="none" w="med" len="med"/>
+                    </a:lnL>
+                    <a:lnR w="12700" cap="flat" cmpd="sng" algn="ctr">
+                      <a:solidFill>
+                        <a:srgbClr val="FFFFFF"/>
+                      </a:solidFill>
+                      <a:prstDash val="solid"/>
+                      <a:round/>
+                      <a:headEnd type="none" w="med" len="med"/>
+                      <a:tailEnd type="none" w="med" len="med"/>
+                    </a:lnR>
+                    <a:lnT w="12700" cap="flat" cmpd="sng" algn="ctr">
+                      <a:solidFill>
+                        <a:srgbClr val="FFFFFF"/>
+                      </a:solidFill>
+                      <a:prstDash val="solid"/>
+                      <a:round/>
+                      <a:headEnd type="none" w="med" len="med"/>
+                      <a:tailEnd type="none" w="med" len="med"/>
+                    </a:lnT>
+                    <a:lnB w="6350" cap="flat" cmpd="sng" algn="ctr">
+                      <a:solidFill>
+                        <a:srgbClr val="D9D9D9"/>
+                      </a:solidFill>
+                      <a:prstDash val="solid"/>
+                      <a:round/>
+                      <a:headEnd type="none" w="med" len="med"/>
+                      <a:tailEnd type="none" w="med" len="med"/>
+                    </a:lnB>
+                    <a:solidFill>
+                      <a:srgbClr val="FFFFFF"/>
+                    </a:solidFill>
+                  </a:tcPr>
+                </a:tc>
+                <a:tc>
+                  <a:txBody>
+                    <a:bodyPr/>
+                    <a:lstStyle/>
+                    <a:p>
+                      <a:pPr algn="ctr" indent="0" marL="0">
+                        <a:buNone/>
+                      </a:pPr>
+                      <a:r>
+                        <a:rPr lang="en-US" sz="1050" dirty="0">
+                          <a:solidFill>
+                            <a:srgbClr val="000000"/>
+                          </a:solidFill>
+                          <a:latin typeface="Times New Roman" pitchFamily="34" charset="0"/>
+                          <a:ea typeface="Times New Roman" pitchFamily="34" charset="-122"/>
+                          <a:cs typeface="Times New Roman" pitchFamily="34" charset="-120"/>
+                        </a:rPr>
+                        <a:t>not run</a:t>
+                      </a:r>
+                      <a:endParaRPr lang="en-US" sz="1050" dirty="0">
+                        <a:latin typeface="Times New Roman" charset="0"/>
+                        <a:ea typeface="Times New Roman" charset="0"/>
+                        <a:cs typeface="Times New Roman" charset="0"/>
+                      </a:endParaRPr>
+                    </a:p>
+                  </a:txBody>
+                  <a:tcPr marL="91440" marR="91440" marT="45720" marB="45720" anchor="ctr">
+                    <a:lnL w="12700" cap="flat" cmpd="sng" algn="ctr">
+                      <a:solidFill>
+                        <a:srgbClr val="FFFFFF"/>
+                      </a:solidFill>
+                      <a:prstDash val="solid"/>
+                      <a:round/>
+                      <a:headEnd type="none" w="med" len="med"/>
+                      <a:tailEnd type="none" w="med" len="med"/>
+                    </a:lnL>
+                    <a:lnR w="12700" cap="flat" cmpd="sng" algn="ctr">
+                      <a:solidFill>
+                        <a:srgbClr val="FFFFFF"/>
+                      </a:solidFill>
+                      <a:prstDash val="solid"/>
+                      <a:round/>
+                      <a:headEnd type="none" w="med" len="med"/>
+                      <a:tailEnd type="none" w="med" len="med"/>
+                    </a:lnR>
+                    <a:lnT w="12700" cap="flat" cmpd="sng" algn="ctr">
+                      <a:solidFill>
+                        <a:srgbClr val="FFFFFF"/>
+                      </a:solidFill>
+                      <a:prstDash val="solid"/>
+                      <a:round/>
+                      <a:headEnd type="none" w="med" len="med"/>
+                      <a:tailEnd type="none" w="med" len="med"/>
+                    </a:lnT>
+                    <a:lnB w="6350" cap="flat" cmpd="sng" algn="ctr">
+                      <a:solidFill>
+                        <a:srgbClr val="D9D9D9"/>
+                      </a:solidFill>
+                      <a:prstDash val="solid"/>
+                      <a:round/>
+                      <a:headEnd type="none" w="med" len="med"/>
+                      <a:tailEnd type="none" w="med" len="med"/>
+                    </a:lnB>
+                    <a:solidFill>
+                      <a:srgbClr val="FFFFFF"/>
+                    </a:solidFill>
+                  </a:tcPr>
+                </a:tc>
+                <a:tc>
+                  <a:txBody>
+                    <a:bodyPr/>
+                    <a:lstStyle/>
+                    <a:p>
+                      <a:pPr algn="ctr" indent="0" marL="0">
+                        <a:buNone/>
+                      </a:pPr>
+                      <a:r>
+                        <a:rPr lang="en-US" sz="1050" dirty="0">
+                          <a:solidFill>
+                            <a:srgbClr val="000000"/>
+                          </a:solidFill>
+                          <a:latin typeface="Times New Roman" pitchFamily="34" charset="0"/>
+                          <a:ea typeface="Times New Roman" pitchFamily="34" charset="-122"/>
+                          <a:cs typeface="Times New Roman" pitchFamily="34" charset="-120"/>
+                        </a:rPr>
+                        <a:t>run</a:t>
+                      </a:r>
+                      <a:endParaRPr lang="en-US" sz="1050" dirty="0">
+                        <a:latin typeface="Times New Roman" charset="0"/>
+                        <a:ea typeface="Times New Roman" charset="0"/>
+                        <a:cs typeface="Times New Roman" charset="0"/>
+                      </a:endParaRPr>
+                    </a:p>
+                  </a:txBody>
+                  <a:tcPr marL="91440" marR="91440" marT="45720" marB="45720" anchor="ctr">
+                    <a:lnL w="12700" cap="flat" cmpd="sng" algn="ctr">
+                      <a:solidFill>
+                        <a:srgbClr val="FFFFFF"/>
+                      </a:solidFill>
+                      <a:prstDash val="solid"/>
+                      <a:round/>
+                      <a:headEnd type="none" w="med" len="med"/>
+                      <a:tailEnd type="none" w="med" len="med"/>
+                    </a:lnL>
+                    <a:lnR w="12700" cap="flat" cmpd="sng" algn="ctr">
+                      <a:solidFill>
+                        <a:srgbClr val="FFFFFF"/>
+                      </a:solidFill>
+                      <a:prstDash val="solid"/>
+                      <a:round/>
+                      <a:headEnd type="none" w="med" len="med"/>
+                      <a:tailEnd type="none" w="med" len="med"/>
+                    </a:lnR>
+                    <a:lnT w="12700" cap="flat" cmpd="sng" algn="ctr">
+                      <a:solidFill>
+                        <a:srgbClr val="FFFFFF"/>
+                      </a:solidFill>
+                      <a:prstDash val="solid"/>
+                      <a:round/>
+                      <a:headEnd type="none" w="med" len="med"/>
+                      <a:tailEnd type="none" w="med" len="med"/>
+                    </a:lnT>
+                    <a:lnB w="6350" cap="flat" cmpd="sng" algn="ctr">
+                      <a:solidFill>
+                        <a:srgbClr val="D9D9D9"/>
+                      </a:solidFill>
+                      <a:prstDash val="solid"/>
+                      <a:round/>
+                      <a:headEnd type="none" w="med" len="med"/>
+                      <a:tailEnd type="none" w="med" len="med"/>
+                    </a:lnB>
+                    <a:solidFill>
+                      <a:srgbClr val="FFFFFF"/>
+                    </a:solidFill>
+                  </a:tcPr>
+                </a:tc>
+              </a:tr>
+              <a:tr h="292608">
+                <a:tc>
+                  <a:txBody>
+                    <a:bodyPr/>
+                    <a:lstStyle/>
+                    <a:p>
+                      <a:pPr algn="l" indent="0" marL="0">
+                        <a:buNone/>
+                      </a:pPr>
+                      <a:r>
+                        <a:rPr lang="en-US" sz="1050" dirty="0">
+                          <a:solidFill>
+                            <a:srgbClr val="000000"/>
+                          </a:solidFill>
+                          <a:latin typeface="Times New Roman" pitchFamily="34" charset="0"/>
+                          <a:ea typeface="Times New Roman" pitchFamily="34" charset="-122"/>
+                          <a:cs typeface="Times New Roman" pitchFamily="34" charset="-120"/>
+                        </a:rPr>
+                        <a:t>Temporal, morphological</a:t>
+                      </a:r>
+                      <a:endParaRPr lang="en-US" sz="1050" dirty="0">
+                        <a:latin typeface="Times New Roman" charset="0"/>
+                        <a:ea typeface="Times New Roman" charset="0"/>
+                        <a:cs typeface="Times New Roman" charset="0"/>
+                      </a:endParaRPr>
+                    </a:p>
+                  </a:txBody>
+                  <a:tcPr marL="91440" marR="91440" marT="45720" marB="45720" anchor="ctr">
+                    <a:lnL w="12700" cap="flat" cmpd="sng" algn="ctr">
+                      <a:solidFill>
+                        <a:srgbClr val="FFFFFF"/>
+                      </a:solidFill>
+                      <a:prstDash val="solid"/>
+                      <a:round/>
+                      <a:headEnd type="none" w="med" len="med"/>
+                      <a:tailEnd type="none" w="med" len="med"/>
+                    </a:lnL>
+                    <a:lnR w="12700" cap="flat" cmpd="sng" algn="ctr">
+                      <a:solidFill>
+                        <a:srgbClr val="FFFFFF"/>
+                      </a:solidFill>
+                      <a:prstDash val="solid"/>
+                      <a:round/>
+                      <a:headEnd type="none" w="med" len="med"/>
+                      <a:tailEnd type="none" w="med" len="med"/>
+                    </a:lnR>
+                    <a:lnT w="12700" cap="flat" cmpd="sng" algn="ctr">
+                      <a:solidFill>
+                        <a:srgbClr val="FFFFFF"/>
+                      </a:solidFill>
+                      <a:prstDash val="solid"/>
+                      <a:round/>
+                      <a:headEnd type="none" w="med" len="med"/>
+                      <a:tailEnd type="none" w="med" len="med"/>
+                    </a:lnT>
+                    <a:lnB w="6350" cap="flat" cmpd="sng" algn="ctr">
+                      <a:solidFill>
+                        <a:srgbClr val="D9D9D9"/>
+                      </a:solidFill>
+                      <a:prstDash val="solid"/>
+                      <a:round/>
+                      <a:headEnd type="none" w="med" len="med"/>
+                      <a:tailEnd type="none" w="med" len="med"/>
+                    </a:lnB>
+                    <a:solidFill>
+                      <a:srgbClr val="FFFFFF"/>
+                    </a:solidFill>
+                  </a:tcPr>
+                </a:tc>
+                <a:tc>
+                  <a:txBody>
+                    <a:bodyPr/>
+                    <a:lstStyle/>
+                    <a:p>
+                      <a:pPr algn="ctr" indent="0" marL="0">
+                        <a:buNone/>
+                      </a:pPr>
+                      <a:r>
+                        <a:rPr lang="en-US" sz="1050" dirty="0">
+                          <a:solidFill>
+                            <a:srgbClr val="000000"/>
+                          </a:solidFill>
+                          <a:latin typeface="Times New Roman" pitchFamily="34" charset="0"/>
+                          <a:ea typeface="Times New Roman" pitchFamily="34" charset="-122"/>
+                          <a:cs typeface="Times New Roman" pitchFamily="34" charset="-120"/>
+                        </a:rPr>
+                        <a:t>not run</a:t>
+                      </a:r>
+                      <a:endParaRPr lang="en-US" sz="1050" dirty="0">
+                        <a:latin typeface="Times New Roman" charset="0"/>
+                        <a:ea typeface="Times New Roman" charset="0"/>
+                        <a:cs typeface="Times New Roman" charset="0"/>
+                      </a:endParaRPr>
+                    </a:p>
+                  </a:txBody>
+                  <a:tcPr marL="91440" marR="91440" marT="45720" marB="45720" anchor="ctr">
+                    <a:lnL w="12700" cap="flat" cmpd="sng" algn="ctr">
+                      <a:solidFill>
+                        <a:srgbClr val="FFFFFF"/>
+                      </a:solidFill>
+                      <a:prstDash val="solid"/>
+                      <a:round/>
+                      <a:headEnd type="none" w="med" len="med"/>
+                      <a:tailEnd type="none" w="med" len="med"/>
+                    </a:lnL>
+                    <a:lnR w="12700" cap="flat" cmpd="sng" algn="ctr">
+                      <a:solidFill>
+                        <a:srgbClr val="FFFFFF"/>
+                      </a:solidFill>
+                      <a:prstDash val="solid"/>
+                      <a:round/>
+                      <a:headEnd type="none" w="med" len="med"/>
+                      <a:tailEnd type="none" w="med" len="med"/>
+                    </a:lnR>
+                    <a:lnT w="12700" cap="flat" cmpd="sng" algn="ctr">
+                      <a:solidFill>
+                        <a:srgbClr val="FFFFFF"/>
+                      </a:solidFill>
+                      <a:prstDash val="solid"/>
+                      <a:round/>
+                      <a:headEnd type="none" w="med" len="med"/>
+                      <a:tailEnd type="none" w="med" len="med"/>
+                    </a:lnT>
+                    <a:lnB w="6350" cap="flat" cmpd="sng" algn="ctr">
+                      <a:solidFill>
+                        <a:srgbClr val="D9D9D9"/>
+                      </a:solidFill>
+                      <a:prstDash val="solid"/>
+                      <a:round/>
+                      <a:headEnd type="none" w="med" len="med"/>
+                      <a:tailEnd type="none" w="med" len="med"/>
+                    </a:lnB>
+                    <a:solidFill>
+                      <a:srgbClr val="FFFFFF"/>
+                    </a:solidFill>
+                  </a:tcPr>
+                </a:tc>
+                <a:tc>
+                  <a:txBody>
+                    <a:bodyPr/>
+                    <a:lstStyle/>
+                    <a:p>
+                      <a:pPr algn="ctr" indent="0" marL="0">
+                        <a:buNone/>
+                      </a:pPr>
+                      <a:r>
+                        <a:rPr lang="en-US" sz="1050" dirty="0">
+                          <a:solidFill>
+                            <a:srgbClr val="000000"/>
+                          </a:solidFill>
+                          <a:latin typeface="Times New Roman" pitchFamily="34" charset="0"/>
+                          <a:ea typeface="Times New Roman" pitchFamily="34" charset="-122"/>
+                          <a:cs typeface="Times New Roman" pitchFamily="34" charset="-120"/>
+                        </a:rPr>
+                        <a:t>not run</a:t>
+                      </a:r>
+                      <a:endParaRPr lang="en-US" sz="1050" dirty="0">
+                        <a:latin typeface="Times New Roman" charset="0"/>
+                        <a:ea typeface="Times New Roman" charset="0"/>
+                        <a:cs typeface="Times New Roman" charset="0"/>
+                      </a:endParaRPr>
+                    </a:p>
+                  </a:txBody>
+                  <a:tcPr marL="91440" marR="91440" marT="45720" marB="45720" anchor="ctr">
+                    <a:lnL w="12700" cap="flat" cmpd="sng" algn="ctr">
+                      <a:solidFill>
+                        <a:srgbClr val="FFFFFF"/>
+                      </a:solidFill>
+                      <a:prstDash val="solid"/>
+                      <a:round/>
+                      <a:headEnd type="none" w="med" len="med"/>
+                      <a:tailEnd type="none" w="med" len="med"/>
+                    </a:lnL>
+                    <a:lnR w="12700" cap="flat" cmpd="sng" algn="ctr">
+                      <a:solidFill>
+                        <a:srgbClr val="FFFFFF"/>
+                      </a:solidFill>
+                      <a:prstDash val="solid"/>
+                      <a:round/>
+                      <a:headEnd type="none" w="med" len="med"/>
+                      <a:tailEnd type="none" w="med" len="med"/>
+                    </a:lnR>
+                    <a:lnT w="12700" cap="flat" cmpd="sng" algn="ctr">
+                      <a:solidFill>
+                        <a:srgbClr val="FFFFFF"/>
+                      </a:solidFill>
+                      <a:prstDash val="solid"/>
+                      <a:round/>
+                      <a:headEnd type="none" w="med" len="med"/>
+                      <a:tailEnd type="none" w="med" len="med"/>
+                    </a:lnT>
+                    <a:lnB w="6350" cap="flat" cmpd="sng" algn="ctr">
+                      <a:solidFill>
+                        <a:srgbClr val="D9D9D9"/>
+                      </a:solidFill>
+                      <a:prstDash val="solid"/>
+                      <a:round/>
+                      <a:headEnd type="none" w="med" len="med"/>
+                      <a:tailEnd type="none" w="med" len="med"/>
+                    </a:lnB>
+                    <a:solidFill>
+                      <a:srgbClr val="FFFFFF"/>
+                    </a:solidFill>
+                  </a:tcPr>
+                </a:tc>
+                <a:tc>
+                  <a:txBody>
+                    <a:bodyPr/>
+                    <a:lstStyle/>
+                    <a:p>
+                      <a:pPr algn="ctr" indent="0" marL="0">
+                        <a:buNone/>
+                      </a:pPr>
+                      <a:r>
+                        <a:rPr lang="en-US" sz="1050" dirty="0">
+                          <a:solidFill>
+                            <a:srgbClr val="000000"/>
+                          </a:solidFill>
+                          <a:latin typeface="Times New Roman" pitchFamily="34" charset="0"/>
+                          <a:ea typeface="Times New Roman" pitchFamily="34" charset="-122"/>
+                          <a:cs typeface="Times New Roman" pitchFamily="34" charset="-120"/>
+                        </a:rPr>
+                        <a:t>run</a:t>
+                      </a:r>
+                      <a:endParaRPr lang="en-US" sz="1050" dirty="0">
+                        <a:latin typeface="Times New Roman" charset="0"/>
+                        <a:ea typeface="Times New Roman" charset="0"/>
+                        <a:cs typeface="Times New Roman" charset="0"/>
+                      </a:endParaRPr>
+                    </a:p>
+                  </a:txBody>
+                  <a:tcPr marL="91440" marR="91440" marT="45720" marB="45720" anchor="ctr">
+                    <a:lnL w="12700" cap="flat" cmpd="sng" algn="ctr">
+                      <a:solidFill>
+                        <a:srgbClr val="FFFFFF"/>
+                      </a:solidFill>
+                      <a:prstDash val="solid"/>
+                      <a:round/>
+                      <a:headEnd type="none" w="med" len="med"/>
+                      <a:tailEnd type="none" w="med" len="med"/>
+                    </a:lnL>
+                    <a:lnR w="12700" cap="flat" cmpd="sng" algn="ctr">
+                      <a:solidFill>
+                        <a:srgbClr val="FFFFFF"/>
+                      </a:solidFill>
+                      <a:prstDash val="solid"/>
+                      <a:round/>
+                      <a:headEnd type="none" w="med" len="med"/>
+                      <a:tailEnd type="none" w="med" len="med"/>
+                    </a:lnR>
+                    <a:lnT w="12700" cap="flat" cmpd="sng" algn="ctr">
+                      <a:solidFill>
+                        <a:srgbClr val="FFFFFF"/>
+                      </a:solidFill>
+                      <a:prstDash val="solid"/>
+                      <a:round/>
+                      <a:headEnd type="none" w="med" len="med"/>
+                      <a:tailEnd type="none" w="med" len="med"/>
+                    </a:lnT>
+                    <a:lnB w="6350" cap="flat" cmpd="sng" algn="ctr">
+                      <a:solidFill>
+                        <a:srgbClr val="D9D9D9"/>
+                      </a:solidFill>
+                      <a:prstDash val="solid"/>
+                      <a:round/>
+                      <a:headEnd type="none" w="med" len="med"/>
+                      <a:tailEnd type="none" w="med" len="med"/>
+                    </a:lnB>
+                    <a:solidFill>
+                      <a:srgbClr val="FFFFFF"/>
+                    </a:solidFill>
+                  </a:tcPr>
+                </a:tc>
+              </a:tr>
+            </a:tbl>
+          </a:graphicData>
+        </a:graphic>
+      </p:graphicFrame>
       <p:sp>
         <p:nvSpPr>
-          <p:cNvPr id="9" name="Text 6"/>
+          <p:cNvPr id="10" name="Text 6"/>
           <p:cNvSpPr txBox="1"/>
           <p:nvPr/>
         </p:nvSpPr>
         <p:spPr>
           <a:xfrm>
-            <a:off x="7680960" y="1920240"/>
-            <a:ext cx="3840480" cy="621792"/>
+            <a:off x="685800" y="5504688"/>
+            <a:ext cx="6446520" cy="310896"/>
           </a:xfrm>
           <a:prstGeom prst="rect">
             <a:avLst/>
@@ -13571,37 +14699,37 @@
           <a:ln/>
         </p:spPr>
         <p:txBody>
-          <a:bodyPr wrap="square" lIns="0" tIns="0" rIns="0" bIns="0" rtlCol="0" anchor="ctr"/>
+          <a:bodyPr wrap="square" lIns="0" tIns="0" rIns="0" bIns="0" rtlCol="0" anchor="t"/>
           <a:lstStyle/>
           <a:p>
-            <a:pPr indent="0" marL="0">
+            <a:pPr algn="ctr" indent="0" marL="0">
               <a:buNone/>
             </a:pPr>
             <a:r>
-              <a:rPr lang="en-US" sz="1000" dirty="0">
+              <a:rPr lang="en-US" sz="950" dirty="0">
                 <a:solidFill>
-                  <a:srgbClr val="000000"/>
+                  <a:srgbClr val="444444"/>
                 </a:solidFill>
                 <a:latin typeface="Times New Roman" pitchFamily="34" charset="0"/>
                 <a:ea typeface="Times New Roman" pitchFamily="34" charset="-122"/>
                 <a:cs typeface="Times New Roman" pitchFamily="34" charset="-120"/>
               </a:rPr>
-              <a:t>The entire spread, best to worst, is 0.036 in R², and the baseline lies above all of it.</a:t>
+              <a:t>The eight blanks are roughly 2.4 hours of compute, not a finding. They are listed under further work.</a:t>
             </a:r>
-            <a:endParaRPr lang="en-US" sz="1000" dirty="0"/>
+            <a:endParaRPr lang="en-US" sz="950" dirty="0"/>
           </a:p>
         </p:txBody>
       </p:sp>
       <p:sp>
         <p:nvSpPr>
-          <p:cNvPr id="10" name="Text 7"/>
+          <p:cNvPr id="11" name="Text 7"/>
           <p:cNvSpPr txBox="1"/>
           <p:nvPr/>
         </p:nvSpPr>
         <p:spPr>
           <a:xfrm>
-            <a:off x="7680960" y="2560320"/>
-            <a:ext cx="3840480" cy="457200"/>
+            <a:off x="7589520" y="1554480"/>
+            <a:ext cx="3931920" cy="274320"/>
           </a:xfrm>
           <a:prstGeom prst="rect">
             <a:avLst/>
@@ -13610,14 +14738,14 @@
           <a:ln/>
         </p:spPr>
         <p:txBody>
-          <a:bodyPr wrap="square" lIns="0" tIns="0" rIns="0" bIns="0" rtlCol="0" anchor="ctr"/>
+          <a:bodyPr wrap="square" lIns="0" tIns="0" rIns="0" bIns="0" rtlCol="0" anchor="t"/>
           <a:lstStyle/>
           <a:p>
             <a:pPr indent="0" marL="0">
               <a:buNone/>
             </a:pPr>
             <a:r>
-              <a:rPr lang="en-US" sz="1100" b="1" dirty="0">
+              <a:rPr lang="en-US" sz="1050" b="1" dirty="0">
                 <a:solidFill>
                   <a:srgbClr val="000000"/>
                 </a:solidFill>
@@ -13625,22 +14753,22 @@
                 <a:ea typeface="Times New Roman" pitchFamily="34" charset="-122"/>
                 <a:cs typeface="Times New Roman" pitchFamily="34" charset="-120"/>
               </a:rPr>
-              <a:t>Fusing the two signals is worse than the better one alone.</a:t>
+              <a:t>Why only this protocol, when Section 9 was positive?</a:t>
             </a:r>
-            <a:endParaRPr lang="en-US" sz="1100" dirty="0"/>
+            <a:endParaRPr lang="en-US" sz="1050" dirty="0"/>
           </a:p>
         </p:txBody>
       </p:sp>
       <p:sp>
         <p:nvSpPr>
-          <p:cNvPr id="11" name="Text 8"/>
+          <p:cNvPr id="12" name="Text 8"/>
           <p:cNvSpPr txBox="1"/>
           <p:nvPr/>
         </p:nvSpPr>
         <p:spPr>
           <a:xfrm>
-            <a:off x="7680960" y="2852928"/>
-            <a:ext cx="3840480" cy="621792"/>
+            <a:off x="7589520" y="1810512"/>
+            <a:ext cx="3931920" cy="841248"/>
           </a:xfrm>
           <a:prstGeom prst="rect">
             <a:avLst/>
@@ -13649,14 +14777,14 @@
           <a:ln/>
         </p:spPr>
         <p:txBody>
-          <a:bodyPr wrap="square" lIns="0" tIns="0" rIns="0" bIns="0" rtlCol="0" anchor="ctr"/>
+          <a:bodyPr wrap="square" lIns="0" tIns="0" rIns="0" bIns="0" rtlCol="0" anchor="t"/>
           <a:lstStyle/>
           <a:p>
             <a:pPr indent="0" marL="0">
               <a:buNone/>
             </a:pPr>
             <a:r>
-              <a:rPr lang="en-US" sz="1000" dirty="0">
+              <a:rPr lang="en-US" sz="950" dirty="0">
                 <a:solidFill>
                   <a:srgbClr val="000000"/>
                 </a:solidFill>
@@ -13664,22 +14792,22 @@
                 <a:ea typeface="Times New Roman" pitchFamily="34" charset="-122"/>
                 <a:cs typeface="Times New Roman" pitchFamily="34" charset="-120"/>
               </a:rPr>
-              <a:t>PPG alone (−0.075) exceeds the fused set (−0.097). The source paper reports the opposite ordering. A 0.03 gap between two failing configurations is not read as evidence.</a:t>
+              <a:t>The question here is whether a feature family generalises to a new person. Under a random split every family also gets to exploit the per-participant shortcut, so it would rank them partly on how well each identifies the participant. Holding a person out removes that.</a:t>
             </a:r>
-            <a:endParaRPr lang="en-US" sz="1000" dirty="0"/>
+            <a:endParaRPr lang="en-US" sz="950" dirty="0"/>
           </a:p>
         </p:txBody>
       </p:sp>
       <p:sp>
         <p:nvSpPr>
-          <p:cNvPr id="12" name="Text 9"/>
+          <p:cNvPr id="13" name="Text 9"/>
           <p:cNvSpPr txBox="1"/>
           <p:nvPr/>
         </p:nvSpPr>
         <p:spPr>
           <a:xfrm>
-            <a:off x="7680960" y="3493008"/>
-            <a:ext cx="3840480" cy="457200"/>
+            <a:off x="7589520" y="2688336"/>
+            <a:ext cx="3931920" cy="274320"/>
           </a:xfrm>
           <a:prstGeom prst="rect">
             <a:avLst/>
@@ -13688,14 +14816,14 @@
           <a:ln/>
         </p:spPr>
         <p:txBody>
-          <a:bodyPr wrap="square" lIns="0" tIns="0" rIns="0" bIns="0" rtlCol="0" anchor="ctr"/>
+          <a:bodyPr wrap="square" lIns="0" tIns="0" rIns="0" bIns="0" rtlCol="0" anchor="t"/>
           <a:lstStyle/>
           <a:p>
             <a:pPr indent="0" marL="0">
               <a:buNone/>
             </a:pPr>
             <a:r>
-              <a:rPr lang="en-US" sz="1100" b="1" dirty="0">
+              <a:rPr lang="en-US" sz="1050" b="1" dirty="0">
                 <a:solidFill>
                   <a:srgbClr val="000000"/>
                 </a:solidFill>
@@ -13703,22 +14831,22 @@
                 <a:ea typeface="Times New Roman" pitchFamily="34" charset="-122"/>
                 <a:cs typeface="Times New Roman" pitchFamily="34" charset="-120"/>
               </a:rPr>
-              <a:t>Fewer features perform better.</a:t>
+              <a:t>What this costs us.</a:t>
             </a:r>
-            <a:endParaRPr lang="en-US" sz="1100" dirty="0"/>
+            <a:endParaRPr lang="en-US" sz="1050" dirty="0"/>
           </a:p>
         </p:txBody>
       </p:sp>
       <p:sp>
         <p:nvSpPr>
-          <p:cNvPr id="13" name="Text 10"/>
+          <p:cNvPr id="14" name="Text 10"/>
           <p:cNvSpPr txBox="1"/>
           <p:nvPr/>
         </p:nvSpPr>
         <p:spPr>
           <a:xfrm>
-            <a:off x="7680960" y="3785616"/>
-            <a:ext cx="3840480" cy="621792"/>
+            <a:off x="7589520" y="2944368"/>
+            <a:ext cx="3931920" cy="841248"/>
           </a:xfrm>
           <a:prstGeom prst="rect">
             <a:avLst/>
@@ -13727,14 +14855,14 @@
           <a:ln/>
         </p:spPr>
         <p:txBody>
-          <a:bodyPr wrap="square" lIns="0" tIns="0" rIns="0" bIns="0" rtlCol="0" anchor="ctr"/>
+          <a:bodyPr wrap="square" lIns="0" tIns="0" rIns="0" bIns="0" rtlCol="0" anchor="t"/>
           <a:lstStyle/>
           <a:p>
             <a:pPr indent="0" marL="0">
               <a:buNone/>
             </a:pPr>
             <a:r>
-              <a:rPr lang="en-US" sz="1000" dirty="0">
+              <a:rPr lang="en-US" sz="950" dirty="0">
                 <a:solidFill>
                   <a:srgbClr val="000000"/>
                 </a:solidFill>
@@ -13742,22 +14870,22 @@
                 <a:ea typeface="Times New Roman" pitchFamily="34" charset="-122"/>
                 <a:cs typeface="Times New Roman" pitchFamily="34" charset="-120"/>
               </a:rPr>
-              <a:t>33 features exceed 193. When additional information degrades a model, the model is fitting noise rather than signal.</a:t>
+              <a:t>These rows are therefore not directly comparable to Tables III and IV of the source paper, which are computed under the authors' random split. Running the ablation under that protocol as well is the first item of further work.</a:t>
             </a:r>
-            <a:endParaRPr lang="en-US" sz="1000" dirty="0"/>
+            <a:endParaRPr lang="en-US" sz="950" dirty="0"/>
           </a:p>
         </p:txBody>
       </p:sp>
       <p:sp>
         <p:nvSpPr>
-          <p:cNvPr id="14" name="Text 11"/>
+          <p:cNvPr id="15" name="Text 11"/>
           <p:cNvSpPr txBox="1"/>
           <p:nvPr/>
         </p:nvSpPr>
         <p:spPr>
           <a:xfrm>
-            <a:off x="7680960" y="4425696"/>
-            <a:ext cx="3840480" cy="457200"/>
+            <a:off x="7589520" y="3822192"/>
+            <a:ext cx="3931920" cy="274320"/>
           </a:xfrm>
           <a:prstGeom prst="rect">
             <a:avLst/>
@@ -13766,14 +14894,14 @@
           <a:ln/>
         </p:spPr>
         <p:txBody>
-          <a:bodyPr wrap="square" lIns="0" tIns="0" rIns="0" bIns="0" rtlCol="0" anchor="ctr"/>
+          <a:bodyPr wrap="square" lIns="0" tIns="0" rIns="0" bIns="0" rtlCol="0" anchor="t"/>
           <a:lstStyle/>
           <a:p>
             <a:pPr indent="0" marL="0">
               <a:buNone/>
             </a:pPr>
             <a:r>
-              <a:rPr lang="en-US" sz="1100" b="1" dirty="0">
+              <a:rPr lang="en-US" sz="1050" b="1" dirty="0">
                 <a:solidFill>
                   <a:srgbClr val="000000"/>
                 </a:solidFill>
@@ -13781,22 +14909,22 @@
                 <a:ea typeface="Times New Roman" pitchFamily="34" charset="-122"/>
                 <a:cs typeface="Times New Roman" pitchFamily="34" charset="-120"/>
               </a:rPr>
-              <a:t>The clinical score is inversely related to R².</a:t>
+              <a:t>The spread is small, and nothing separates cleanly.</a:t>
             </a:r>
-            <a:endParaRPr lang="en-US" sz="1100" dirty="0"/>
+            <a:endParaRPr lang="en-US" sz="1050" dirty="0"/>
           </a:p>
         </p:txBody>
       </p:sp>
       <p:sp>
         <p:nvSpPr>
-          <p:cNvPr id="15" name="Text 12"/>
+          <p:cNvPr id="16" name="Text 12"/>
           <p:cNvSpPr txBox="1"/>
           <p:nvPr/>
         </p:nvSpPr>
         <p:spPr>
           <a:xfrm>
-            <a:off x="7680960" y="4718304"/>
-            <a:ext cx="3840480" cy="621792"/>
+            <a:off x="7589520" y="4078224"/>
+            <a:ext cx="3931920" cy="841248"/>
           </a:xfrm>
           <a:prstGeom prst="rect">
             <a:avLst/>
@@ -13805,14 +14933,14 @@
           <a:ln/>
         </p:spPr>
         <p:txBody>
-          <a:bodyPr wrap="square" lIns="0" tIns="0" rIns="0" bIns="0" rtlCol="0" anchor="ctr"/>
+          <a:bodyPr wrap="square" lIns="0" tIns="0" rIns="0" bIns="0" rtlCol="0" anchor="t"/>
           <a:lstStyle/>
           <a:p>
             <a:pPr indent="0" marL="0">
               <a:buNone/>
             </a:pPr>
             <a:r>
-              <a:rPr lang="en-US" sz="1000" dirty="0">
+              <a:rPr lang="en-US" sz="950" dirty="0">
                 <a:solidFill>
                   <a:srgbClr val="000000"/>
                 </a:solidFill>
@@ -13820,9 +14948,87 @@
                 <a:ea typeface="Times New Roman" pitchFamily="34" charset="-122"/>
                 <a:cs typeface="Times New Roman" pitchFamily="34" charset="-120"/>
               </a:rPr>
-              <a:t>The configurations with the poorest R² carry the highest Zone A+B.</a:t>
+              <a:t>Best to worst is 0.036 in R². We do not read PPG (−0.075) as beating the fused set (−0.097) on a gap that size, though the paper reports the opposite ordering.</a:t>
             </a:r>
-            <a:endParaRPr lang="en-US" sz="1000" dirty="0"/>
+            <a:endParaRPr lang="en-US" sz="950" dirty="0"/>
+          </a:p>
+        </p:txBody>
+      </p:sp>
+      <p:sp>
+        <p:nvSpPr>
+          <p:cNvPr id="17" name="Text 13"/>
+          <p:cNvSpPr txBox="1"/>
+          <p:nvPr/>
+        </p:nvSpPr>
+        <p:spPr>
+          <a:xfrm>
+            <a:off x="7589520" y="4956048"/>
+            <a:ext cx="3931920" cy="274320"/>
+          </a:xfrm>
+          <a:prstGeom prst="rect">
+            <a:avLst/>
+          </a:prstGeom>
+          <a:noFill/>
+          <a:ln/>
+        </p:spPr>
+        <p:txBody>
+          <a:bodyPr wrap="square" lIns="0" tIns="0" rIns="0" bIns="0" rtlCol="0" anchor="t"/>
+          <a:lstStyle/>
+          <a:p>
+            <a:pPr indent="0" marL="0">
+              <a:buNone/>
+            </a:pPr>
+            <a:r>
+              <a:rPr lang="en-US" sz="1050" b="1" dirty="0">
+                <a:solidFill>
+                  <a:srgbClr val="000000"/>
+                </a:solidFill>
+                <a:latin typeface="Times New Roman" pitchFamily="34" charset="0"/>
+                <a:ea typeface="Times New Roman" pitchFamily="34" charset="-122"/>
+                <a:cs typeface="Times New Roman" pitchFamily="34" charset="-120"/>
+              </a:rPr>
+              <a:t>Fewer features score better, and Zone A+B runs backwards.</a:t>
+            </a:r>
+            <a:endParaRPr lang="en-US" sz="1050" dirty="0"/>
+          </a:p>
+        </p:txBody>
+      </p:sp>
+      <p:sp>
+        <p:nvSpPr>
+          <p:cNvPr id="18" name="Text 14"/>
+          <p:cNvSpPr txBox="1"/>
+          <p:nvPr/>
+        </p:nvSpPr>
+        <p:spPr>
+          <a:xfrm>
+            <a:off x="7589520" y="5212080"/>
+            <a:ext cx="3931920" cy="841248"/>
+          </a:xfrm>
+          <a:prstGeom prst="rect">
+            <a:avLst/>
+          </a:prstGeom>
+          <a:noFill/>
+          <a:ln/>
+        </p:spPr>
+        <p:txBody>
+          <a:bodyPr wrap="square" lIns="0" tIns="0" rIns="0" bIns="0" rtlCol="0" anchor="t"/>
+          <a:lstStyle/>
+          <a:p>
+            <a:pPr indent="0" marL="0">
+              <a:buNone/>
+            </a:pPr>
+            <a:r>
+              <a:rPr lang="en-US" sz="950" dirty="0">
+                <a:solidFill>
+                  <a:srgbClr val="000000"/>
+                </a:solidFill>
+                <a:latin typeface="Times New Roman" pitchFamily="34" charset="0"/>
+                <a:ea typeface="Times New Roman" pitchFamily="34" charset="-122"/>
+                <a:cs typeface="Times New Roman" pitchFamily="34" charset="-120"/>
+              </a:rPr>
+              <a:t>33 features beat 193, which is what fitting noise looks like. The weakest sets by R² carry the highest Zone A+B, the same inversion as Section 11.</a:t>
+            </a:r>
+            <a:endParaRPr lang="en-US" sz="950" dirty="0"/>
           </a:p>
         </p:txBody>
       </p:sp>
